--- a/Final/Figures/BXtransition(sum).pptx
+++ b/Final/Figures/BXtransition(sum).pptx
@@ -2,13 +2,14 @@
 <file path=ppt/presentation.xml><?xml version="1.0" encoding="utf-8"?>
 <p:presentation xmlns:a="http://schemas.openxmlformats.org/drawingml/2006/main" xmlns:r="http://schemas.openxmlformats.org/officeDocument/2006/relationships" xmlns:p="http://schemas.openxmlformats.org/presentationml/2006/main" saveSubsetFonts="1">
   <p:sldMasterIdLst>
-    <p:sldMasterId id="2147483696" r:id="rId1"/>
+    <p:sldMasterId id="2147483756" r:id="rId1"/>
   </p:sldMasterIdLst>
   <p:sldIdLst>
     <p:sldId id="257" r:id="rId2"/>
     <p:sldId id="256" r:id="rId3"/>
+    <p:sldId id="259" r:id="rId4"/>
   </p:sldIdLst>
-  <p:sldSz cx="7199313" cy="9575800"/>
+  <p:sldSz cx="9906000" cy="3600450"/>
   <p:notesSz cx="6858000" cy="9144000"/>
   <p:defaultTextStyle>
     <a:defPPr>
@@ -142,15 +143,15 @@
         </p:nvSpPr>
         <p:spPr>
           <a:xfrm>
-            <a:off x="539949" y="1567151"/>
-            <a:ext cx="6119416" cy="3333797"/>
+            <a:off x="1238250" y="589241"/>
+            <a:ext cx="7429500" cy="1253490"/>
           </a:xfrm>
         </p:spPr>
         <p:txBody>
           <a:bodyPr anchor="b"/>
           <a:lstStyle>
             <a:lvl1pPr algn="ctr">
-              <a:defRPr sz="4724"/>
+              <a:defRPr sz="3150"/>
             </a:lvl1pPr>
           </a:lstStyle>
           <a:p>
@@ -174,8 +175,8 @@
         </p:nvSpPr>
         <p:spPr>
           <a:xfrm>
-            <a:off x="899914" y="5029512"/>
-            <a:ext cx="5399485" cy="2311934"/>
+            <a:off x="1238250" y="1891070"/>
+            <a:ext cx="7429500" cy="869275"/>
           </a:xfrm>
         </p:spPr>
         <p:txBody>
@@ -183,39 +184,39 @@
           <a:lstStyle>
             <a:lvl1pPr marL="0" indent="0" algn="ctr">
               <a:buNone/>
-              <a:defRPr sz="1890"/>
+              <a:defRPr sz="1260"/>
             </a:lvl1pPr>
-            <a:lvl2pPr marL="359954" indent="0" algn="ctr">
+            <a:lvl2pPr marL="240030" indent="0" algn="ctr">
               <a:buNone/>
-              <a:defRPr sz="1575"/>
+              <a:defRPr sz="1050"/>
             </a:lvl2pPr>
-            <a:lvl3pPr marL="719907" indent="0" algn="ctr">
+            <a:lvl3pPr marL="480060" indent="0" algn="ctr">
               <a:buNone/>
-              <a:defRPr sz="1417"/>
+              <a:defRPr sz="945"/>
             </a:lvl3pPr>
-            <a:lvl4pPr marL="1079861" indent="0" algn="ctr">
+            <a:lvl4pPr marL="720090" indent="0" algn="ctr">
               <a:buNone/>
-              <a:defRPr sz="1260"/>
+              <a:defRPr sz="840"/>
             </a:lvl4pPr>
-            <a:lvl5pPr marL="1439814" indent="0" algn="ctr">
+            <a:lvl5pPr marL="960120" indent="0" algn="ctr">
               <a:buNone/>
-              <a:defRPr sz="1260"/>
+              <a:defRPr sz="840"/>
             </a:lvl5pPr>
-            <a:lvl6pPr marL="1799768" indent="0" algn="ctr">
+            <a:lvl6pPr marL="1200150" indent="0" algn="ctr">
               <a:buNone/>
-              <a:defRPr sz="1260"/>
+              <a:defRPr sz="840"/>
             </a:lvl6pPr>
-            <a:lvl7pPr marL="2159721" indent="0" algn="ctr">
+            <a:lvl7pPr marL="1440180" indent="0" algn="ctr">
               <a:buNone/>
-              <a:defRPr sz="1260"/>
+              <a:defRPr sz="840"/>
             </a:lvl7pPr>
-            <a:lvl8pPr marL="2519675" indent="0" algn="ctr">
+            <a:lvl8pPr marL="1680210" indent="0" algn="ctr">
               <a:buNone/>
-              <a:defRPr sz="1260"/>
+              <a:defRPr sz="840"/>
             </a:lvl8pPr>
-            <a:lvl9pPr marL="2879628" indent="0" algn="ctr">
+            <a:lvl9pPr marL="1920240" indent="0" algn="ctr">
               <a:buNone/>
-              <a:defRPr sz="1260"/>
+              <a:defRPr sz="840"/>
             </a:lvl9pPr>
           </a:lstStyle>
           <a:p>
@@ -244,7 +245,7 @@
           <a:p>
             <a:fld id="{24C44D4F-D6DB-48D1-8C0A-431A4767C007}" type="datetimeFigureOut">
               <a:rPr lang="zh-TW" altLang="en-US" smtClean="0"/>
-              <a:t>2026/5/6</a:t>
+              <a:t>2026/5/21</a:t>
             </a:fld>
             <a:endParaRPr lang="zh-TW" altLang="en-US"/>
           </a:p>
@@ -295,7 +296,7 @@
     </p:spTree>
     <p:extLst>
       <p:ext uri="{BB962C8B-B14F-4D97-AF65-F5344CB8AC3E}">
-        <p14:creationId xmlns:p14="http://schemas.microsoft.com/office/powerpoint/2010/main" val="4034403876"/>
+        <p14:creationId xmlns:p14="http://schemas.microsoft.com/office/powerpoint/2010/main" val="532166240"/>
       </p:ext>
     </p:extLst>
   </p:cSld>
@@ -414,7 +415,7 @@
           <a:p>
             <a:fld id="{24C44D4F-D6DB-48D1-8C0A-431A4767C007}" type="datetimeFigureOut">
               <a:rPr lang="zh-TW" altLang="en-US" smtClean="0"/>
-              <a:t>2026/5/6</a:t>
+              <a:t>2026/5/21</a:t>
             </a:fld>
             <a:endParaRPr lang="zh-TW" altLang="en-US"/>
           </a:p>
@@ -465,7 +466,7 @@
     </p:spTree>
     <p:extLst>
       <p:ext uri="{BB962C8B-B14F-4D97-AF65-F5344CB8AC3E}">
-        <p14:creationId xmlns:p14="http://schemas.microsoft.com/office/powerpoint/2010/main" val="1182005455"/>
+        <p14:creationId xmlns:p14="http://schemas.microsoft.com/office/powerpoint/2010/main" val="64200020"/>
       </p:ext>
     </p:extLst>
   </p:cSld>
@@ -504,8 +505,8 @@
         </p:nvSpPr>
         <p:spPr>
           <a:xfrm>
-            <a:off x="5152009" y="509823"/>
-            <a:ext cx="1552352" cy="8115048"/>
+            <a:off x="7088981" y="191691"/>
+            <a:ext cx="2135981" cy="3051215"/>
           </a:xfrm>
         </p:spPr>
         <p:txBody>
@@ -532,8 +533,8 @@
         </p:nvSpPr>
         <p:spPr>
           <a:xfrm>
-            <a:off x="494953" y="509823"/>
-            <a:ext cx="4567064" cy="8115048"/>
+            <a:off x="681037" y="191691"/>
+            <a:ext cx="6284119" cy="3051215"/>
           </a:xfrm>
         </p:spPr>
         <p:txBody>
@@ -594,7 +595,7 @@
           <a:p>
             <a:fld id="{24C44D4F-D6DB-48D1-8C0A-431A4767C007}" type="datetimeFigureOut">
               <a:rPr lang="zh-TW" altLang="en-US" smtClean="0"/>
-              <a:t>2026/5/6</a:t>
+              <a:t>2026/5/21</a:t>
             </a:fld>
             <a:endParaRPr lang="zh-TW" altLang="en-US"/>
           </a:p>
@@ -645,7 +646,7 @@
     </p:spTree>
     <p:extLst>
       <p:ext uri="{BB962C8B-B14F-4D97-AF65-F5344CB8AC3E}">
-        <p14:creationId xmlns:p14="http://schemas.microsoft.com/office/powerpoint/2010/main" val="1171312288"/>
+        <p14:creationId xmlns:p14="http://schemas.microsoft.com/office/powerpoint/2010/main" val="4219872711"/>
       </p:ext>
     </p:extLst>
   </p:cSld>
@@ -764,7 +765,7 @@
           <a:p>
             <a:fld id="{24C44D4F-D6DB-48D1-8C0A-431A4767C007}" type="datetimeFigureOut">
               <a:rPr lang="zh-TW" altLang="en-US" smtClean="0"/>
-              <a:t>2026/5/6</a:t>
+              <a:t>2026/5/21</a:t>
             </a:fld>
             <a:endParaRPr lang="zh-TW" altLang="en-US"/>
           </a:p>
@@ -815,7 +816,7 @@
     </p:spTree>
     <p:extLst>
       <p:ext uri="{BB962C8B-B14F-4D97-AF65-F5344CB8AC3E}">
-        <p14:creationId xmlns:p14="http://schemas.microsoft.com/office/powerpoint/2010/main" val="2447072018"/>
+        <p14:creationId xmlns:p14="http://schemas.microsoft.com/office/powerpoint/2010/main" val="2622726486"/>
       </p:ext>
     </p:extLst>
   </p:cSld>
@@ -854,15 +855,15 @@
         </p:nvSpPr>
         <p:spPr>
           <a:xfrm>
-            <a:off x="491204" y="2387303"/>
-            <a:ext cx="6209407" cy="3983266"/>
+            <a:off x="675878" y="897613"/>
+            <a:ext cx="8543925" cy="1497687"/>
           </a:xfrm>
         </p:spPr>
         <p:txBody>
           <a:bodyPr anchor="b"/>
           <a:lstStyle>
             <a:lvl1pPr>
-              <a:defRPr sz="4724"/>
+              <a:defRPr sz="3150"/>
             </a:lvl1pPr>
           </a:lstStyle>
           <a:p>
@@ -886,42 +887,14 @@
         </p:nvSpPr>
         <p:spPr>
           <a:xfrm>
-            <a:off x="491204" y="6408252"/>
-            <a:ext cx="6209407" cy="2094706"/>
+            <a:off x="675878" y="2409468"/>
+            <a:ext cx="8543925" cy="787598"/>
           </a:xfrm>
         </p:spPr>
         <p:txBody>
           <a:bodyPr/>
           <a:lstStyle>
             <a:lvl1pPr marL="0" indent="0">
-              <a:buNone/>
-              <a:defRPr sz="1890">
-                <a:solidFill>
-                  <a:schemeClr val="tx1"/>
-                </a:solidFill>
-              </a:defRPr>
-            </a:lvl1pPr>
-            <a:lvl2pPr marL="359954" indent="0">
-              <a:buNone/>
-              <a:defRPr sz="1575">
-                <a:solidFill>
-                  <a:schemeClr val="tx1">
-                    <a:tint val="75000"/>
-                  </a:schemeClr>
-                </a:solidFill>
-              </a:defRPr>
-            </a:lvl2pPr>
-            <a:lvl3pPr marL="719907" indent="0">
-              <a:buNone/>
-              <a:defRPr sz="1417">
-                <a:solidFill>
-                  <a:schemeClr val="tx1">
-                    <a:tint val="75000"/>
-                  </a:schemeClr>
-                </a:solidFill>
-              </a:defRPr>
-            </a:lvl3pPr>
-            <a:lvl4pPr marL="1079861" indent="0">
               <a:buNone/>
               <a:defRPr sz="1260">
                 <a:solidFill>
@@ -930,10 +903,40 @@
                   </a:schemeClr>
                 </a:solidFill>
               </a:defRPr>
+            </a:lvl1pPr>
+            <a:lvl2pPr marL="240030" indent="0">
+              <a:buNone/>
+              <a:defRPr sz="1050">
+                <a:solidFill>
+                  <a:schemeClr val="tx1">
+                    <a:tint val="75000"/>
+                  </a:schemeClr>
+                </a:solidFill>
+              </a:defRPr>
+            </a:lvl2pPr>
+            <a:lvl3pPr marL="480060" indent="0">
+              <a:buNone/>
+              <a:defRPr sz="945">
+                <a:solidFill>
+                  <a:schemeClr val="tx1">
+                    <a:tint val="75000"/>
+                  </a:schemeClr>
+                </a:solidFill>
+              </a:defRPr>
+            </a:lvl3pPr>
+            <a:lvl4pPr marL="720090" indent="0">
+              <a:buNone/>
+              <a:defRPr sz="840">
+                <a:solidFill>
+                  <a:schemeClr val="tx1">
+                    <a:tint val="75000"/>
+                  </a:schemeClr>
+                </a:solidFill>
+              </a:defRPr>
             </a:lvl4pPr>
-            <a:lvl5pPr marL="1439814" indent="0">
+            <a:lvl5pPr marL="960120" indent="0">
               <a:buNone/>
-              <a:defRPr sz="1260">
+              <a:defRPr sz="840">
                 <a:solidFill>
                   <a:schemeClr val="tx1">
                     <a:tint val="75000"/>
@@ -941,9 +944,9 @@
                 </a:solidFill>
               </a:defRPr>
             </a:lvl5pPr>
-            <a:lvl6pPr marL="1799768" indent="0">
+            <a:lvl6pPr marL="1200150" indent="0">
               <a:buNone/>
-              <a:defRPr sz="1260">
+              <a:defRPr sz="840">
                 <a:solidFill>
                   <a:schemeClr val="tx1">
                     <a:tint val="75000"/>
@@ -951,9 +954,9 @@
                 </a:solidFill>
               </a:defRPr>
             </a:lvl6pPr>
-            <a:lvl7pPr marL="2159721" indent="0">
+            <a:lvl7pPr marL="1440180" indent="0">
               <a:buNone/>
-              <a:defRPr sz="1260">
+              <a:defRPr sz="840">
                 <a:solidFill>
                   <a:schemeClr val="tx1">
                     <a:tint val="75000"/>
@@ -961,9 +964,9 @@
                 </a:solidFill>
               </a:defRPr>
             </a:lvl7pPr>
-            <a:lvl8pPr marL="2519675" indent="0">
+            <a:lvl8pPr marL="1680210" indent="0">
               <a:buNone/>
-              <a:defRPr sz="1260">
+              <a:defRPr sz="840">
                 <a:solidFill>
                   <a:schemeClr val="tx1">
                     <a:tint val="75000"/>
@@ -971,9 +974,9 @@
                 </a:solidFill>
               </a:defRPr>
             </a:lvl8pPr>
-            <a:lvl9pPr marL="2879628" indent="0">
+            <a:lvl9pPr marL="1920240" indent="0">
               <a:buNone/>
-              <a:defRPr sz="1260">
+              <a:defRPr sz="840">
                 <a:solidFill>
                   <a:schemeClr val="tx1">
                     <a:tint val="75000"/>
@@ -1008,7 +1011,7 @@
           <a:p>
             <a:fld id="{24C44D4F-D6DB-48D1-8C0A-431A4767C007}" type="datetimeFigureOut">
               <a:rPr lang="zh-TW" altLang="en-US" smtClean="0"/>
-              <a:t>2026/5/6</a:t>
+              <a:t>2026/5/21</a:t>
             </a:fld>
             <a:endParaRPr lang="zh-TW" altLang="en-US"/>
           </a:p>
@@ -1059,7 +1062,7 @@
     </p:spTree>
     <p:extLst>
       <p:ext uri="{BB962C8B-B14F-4D97-AF65-F5344CB8AC3E}">
-        <p14:creationId xmlns:p14="http://schemas.microsoft.com/office/powerpoint/2010/main" val="1002859813"/>
+        <p14:creationId xmlns:p14="http://schemas.microsoft.com/office/powerpoint/2010/main" val="1527695301"/>
       </p:ext>
     </p:extLst>
   </p:cSld>
@@ -1121,8 +1124,8 @@
         </p:nvSpPr>
         <p:spPr>
           <a:xfrm>
-            <a:off x="494953" y="2549113"/>
-            <a:ext cx="3059708" cy="6075757"/>
+            <a:off x="681038" y="958453"/>
+            <a:ext cx="4210050" cy="2284452"/>
           </a:xfrm>
         </p:spPr>
         <p:txBody>
@@ -1178,8 +1181,8 @@
         </p:nvSpPr>
         <p:spPr>
           <a:xfrm>
-            <a:off x="3644652" y="2549113"/>
-            <a:ext cx="3059708" cy="6075757"/>
+            <a:off x="5014913" y="958453"/>
+            <a:ext cx="4210050" cy="2284452"/>
           </a:xfrm>
         </p:spPr>
         <p:txBody>
@@ -1240,7 +1243,7 @@
           <a:p>
             <a:fld id="{24C44D4F-D6DB-48D1-8C0A-431A4767C007}" type="datetimeFigureOut">
               <a:rPr lang="zh-TW" altLang="en-US" smtClean="0"/>
-              <a:t>2026/5/6</a:t>
+              <a:t>2026/5/21</a:t>
             </a:fld>
             <a:endParaRPr lang="zh-TW" altLang="en-US"/>
           </a:p>
@@ -1291,7 +1294,7 @@
     </p:spTree>
     <p:extLst>
       <p:ext uri="{BB962C8B-B14F-4D97-AF65-F5344CB8AC3E}">
-        <p14:creationId xmlns:p14="http://schemas.microsoft.com/office/powerpoint/2010/main" val="2068165651"/>
+        <p14:creationId xmlns:p14="http://schemas.microsoft.com/office/powerpoint/2010/main" val="3700618643"/>
       </p:ext>
     </p:extLst>
   </p:cSld>
@@ -1330,8 +1333,8 @@
         </p:nvSpPr>
         <p:spPr>
           <a:xfrm>
-            <a:off x="495891" y="509825"/>
-            <a:ext cx="6209407" cy="1850879"/>
+            <a:off x="682328" y="191691"/>
+            <a:ext cx="8543925" cy="695921"/>
           </a:xfrm>
         </p:spPr>
         <p:txBody>
@@ -1358,8 +1361,8 @@
         </p:nvSpPr>
         <p:spPr>
           <a:xfrm>
-            <a:off x="495891" y="2347402"/>
-            <a:ext cx="3045646" cy="1150425"/>
+            <a:off x="682328" y="882610"/>
+            <a:ext cx="4190702" cy="432554"/>
           </a:xfrm>
         </p:spPr>
         <p:txBody>
@@ -1367,39 +1370,39 @@
           <a:lstStyle>
             <a:lvl1pPr marL="0" indent="0">
               <a:buNone/>
-              <a:defRPr sz="1890" b="1"/>
+              <a:defRPr sz="1260" b="1"/>
             </a:lvl1pPr>
-            <a:lvl2pPr marL="359954" indent="0">
+            <a:lvl2pPr marL="240030" indent="0">
               <a:buNone/>
-              <a:defRPr sz="1575" b="1"/>
+              <a:defRPr sz="1050" b="1"/>
             </a:lvl2pPr>
-            <a:lvl3pPr marL="719907" indent="0">
+            <a:lvl3pPr marL="480060" indent="0">
               <a:buNone/>
-              <a:defRPr sz="1417" b="1"/>
+              <a:defRPr sz="945" b="1"/>
             </a:lvl3pPr>
-            <a:lvl4pPr marL="1079861" indent="0">
+            <a:lvl4pPr marL="720090" indent="0">
               <a:buNone/>
-              <a:defRPr sz="1260" b="1"/>
+              <a:defRPr sz="840" b="1"/>
             </a:lvl4pPr>
-            <a:lvl5pPr marL="1439814" indent="0">
+            <a:lvl5pPr marL="960120" indent="0">
               <a:buNone/>
-              <a:defRPr sz="1260" b="1"/>
+              <a:defRPr sz="840" b="1"/>
             </a:lvl5pPr>
-            <a:lvl6pPr marL="1799768" indent="0">
+            <a:lvl6pPr marL="1200150" indent="0">
               <a:buNone/>
-              <a:defRPr sz="1260" b="1"/>
+              <a:defRPr sz="840" b="1"/>
             </a:lvl6pPr>
-            <a:lvl7pPr marL="2159721" indent="0">
+            <a:lvl7pPr marL="1440180" indent="0">
               <a:buNone/>
-              <a:defRPr sz="1260" b="1"/>
+              <a:defRPr sz="840" b="1"/>
             </a:lvl7pPr>
-            <a:lvl8pPr marL="2519675" indent="0">
+            <a:lvl8pPr marL="1680210" indent="0">
               <a:buNone/>
-              <a:defRPr sz="1260" b="1"/>
+              <a:defRPr sz="840" b="1"/>
             </a:lvl8pPr>
-            <a:lvl9pPr marL="2879628" indent="0">
+            <a:lvl9pPr marL="1920240" indent="0">
               <a:buNone/>
-              <a:defRPr sz="1260" b="1"/>
+              <a:defRPr sz="840" b="1"/>
             </a:lvl9pPr>
           </a:lstStyle>
           <a:p>
@@ -1423,8 +1426,8 @@
         </p:nvSpPr>
         <p:spPr>
           <a:xfrm>
-            <a:off x="495891" y="3497827"/>
-            <a:ext cx="3045646" cy="5144777"/>
+            <a:off x="682328" y="1315164"/>
+            <a:ext cx="4190702" cy="1934409"/>
           </a:xfrm>
         </p:spPr>
         <p:txBody>
@@ -1480,8 +1483,8 @@
         </p:nvSpPr>
         <p:spPr>
           <a:xfrm>
-            <a:off x="3644652" y="2347402"/>
-            <a:ext cx="3060646" cy="1150425"/>
+            <a:off x="5014913" y="882610"/>
+            <a:ext cx="4211340" cy="432554"/>
           </a:xfrm>
         </p:spPr>
         <p:txBody>
@@ -1489,39 +1492,39 @@
           <a:lstStyle>
             <a:lvl1pPr marL="0" indent="0">
               <a:buNone/>
-              <a:defRPr sz="1890" b="1"/>
+              <a:defRPr sz="1260" b="1"/>
             </a:lvl1pPr>
-            <a:lvl2pPr marL="359954" indent="0">
+            <a:lvl2pPr marL="240030" indent="0">
               <a:buNone/>
-              <a:defRPr sz="1575" b="1"/>
+              <a:defRPr sz="1050" b="1"/>
             </a:lvl2pPr>
-            <a:lvl3pPr marL="719907" indent="0">
+            <a:lvl3pPr marL="480060" indent="0">
               <a:buNone/>
-              <a:defRPr sz="1417" b="1"/>
+              <a:defRPr sz="945" b="1"/>
             </a:lvl3pPr>
-            <a:lvl4pPr marL="1079861" indent="0">
+            <a:lvl4pPr marL="720090" indent="0">
               <a:buNone/>
-              <a:defRPr sz="1260" b="1"/>
+              <a:defRPr sz="840" b="1"/>
             </a:lvl4pPr>
-            <a:lvl5pPr marL="1439814" indent="0">
+            <a:lvl5pPr marL="960120" indent="0">
               <a:buNone/>
-              <a:defRPr sz="1260" b="1"/>
+              <a:defRPr sz="840" b="1"/>
             </a:lvl5pPr>
-            <a:lvl6pPr marL="1799768" indent="0">
+            <a:lvl6pPr marL="1200150" indent="0">
               <a:buNone/>
-              <a:defRPr sz="1260" b="1"/>
+              <a:defRPr sz="840" b="1"/>
             </a:lvl6pPr>
-            <a:lvl7pPr marL="2159721" indent="0">
+            <a:lvl7pPr marL="1440180" indent="0">
               <a:buNone/>
-              <a:defRPr sz="1260" b="1"/>
+              <a:defRPr sz="840" b="1"/>
             </a:lvl7pPr>
-            <a:lvl8pPr marL="2519675" indent="0">
+            <a:lvl8pPr marL="1680210" indent="0">
               <a:buNone/>
-              <a:defRPr sz="1260" b="1"/>
+              <a:defRPr sz="840" b="1"/>
             </a:lvl8pPr>
-            <a:lvl9pPr marL="2879628" indent="0">
+            <a:lvl9pPr marL="1920240" indent="0">
               <a:buNone/>
-              <a:defRPr sz="1260" b="1"/>
+              <a:defRPr sz="840" b="1"/>
             </a:lvl9pPr>
           </a:lstStyle>
           <a:p>
@@ -1545,8 +1548,8 @@
         </p:nvSpPr>
         <p:spPr>
           <a:xfrm>
-            <a:off x="3644652" y="3497827"/>
-            <a:ext cx="3060646" cy="5144777"/>
+            <a:off x="5014913" y="1315164"/>
+            <a:ext cx="4211340" cy="1934409"/>
           </a:xfrm>
         </p:spPr>
         <p:txBody>
@@ -1607,7 +1610,7 @@
           <a:p>
             <a:fld id="{24C44D4F-D6DB-48D1-8C0A-431A4767C007}" type="datetimeFigureOut">
               <a:rPr lang="zh-TW" altLang="en-US" smtClean="0"/>
-              <a:t>2026/5/6</a:t>
+              <a:t>2026/5/21</a:t>
             </a:fld>
             <a:endParaRPr lang="zh-TW" altLang="en-US"/>
           </a:p>
@@ -1658,7 +1661,7 @@
     </p:spTree>
     <p:extLst>
       <p:ext uri="{BB962C8B-B14F-4D97-AF65-F5344CB8AC3E}">
-        <p14:creationId xmlns:p14="http://schemas.microsoft.com/office/powerpoint/2010/main" val="1782564245"/>
+        <p14:creationId xmlns:p14="http://schemas.microsoft.com/office/powerpoint/2010/main" val="391642534"/>
       </p:ext>
     </p:extLst>
   </p:cSld>
@@ -1725,7 +1728,7 @@
           <a:p>
             <a:fld id="{24C44D4F-D6DB-48D1-8C0A-431A4767C007}" type="datetimeFigureOut">
               <a:rPr lang="zh-TW" altLang="en-US" smtClean="0"/>
-              <a:t>2026/5/6</a:t>
+              <a:t>2026/5/21</a:t>
             </a:fld>
             <a:endParaRPr lang="zh-TW" altLang="en-US"/>
           </a:p>
@@ -1776,7 +1779,7 @@
     </p:spTree>
     <p:extLst>
       <p:ext uri="{BB962C8B-B14F-4D97-AF65-F5344CB8AC3E}">
-        <p14:creationId xmlns:p14="http://schemas.microsoft.com/office/powerpoint/2010/main" val="3962104076"/>
+        <p14:creationId xmlns:p14="http://schemas.microsoft.com/office/powerpoint/2010/main" val="2001019036"/>
       </p:ext>
     </p:extLst>
   </p:cSld>
@@ -1820,7 +1823,7 @@
           <a:p>
             <a:fld id="{24C44D4F-D6DB-48D1-8C0A-431A4767C007}" type="datetimeFigureOut">
               <a:rPr lang="zh-TW" altLang="en-US" smtClean="0"/>
-              <a:t>2026/5/6</a:t>
+              <a:t>2026/5/21</a:t>
             </a:fld>
             <a:endParaRPr lang="zh-TW" altLang="en-US"/>
           </a:p>
@@ -1871,7 +1874,7 @@
     </p:spTree>
     <p:extLst>
       <p:ext uri="{BB962C8B-B14F-4D97-AF65-F5344CB8AC3E}">
-        <p14:creationId xmlns:p14="http://schemas.microsoft.com/office/powerpoint/2010/main" val="3523369629"/>
+        <p14:creationId xmlns:p14="http://schemas.microsoft.com/office/powerpoint/2010/main" val="1388858746"/>
       </p:ext>
     </p:extLst>
   </p:cSld>
@@ -1910,15 +1913,15 @@
         </p:nvSpPr>
         <p:spPr>
           <a:xfrm>
-            <a:off x="495890" y="638387"/>
-            <a:ext cx="2321966" cy="2234353"/>
+            <a:off x="682328" y="240030"/>
+            <a:ext cx="3194943" cy="840105"/>
           </a:xfrm>
         </p:spPr>
         <p:txBody>
           <a:bodyPr anchor="b"/>
           <a:lstStyle>
             <a:lvl1pPr>
-              <a:defRPr sz="2519"/>
+              <a:defRPr sz="1680"/>
             </a:lvl1pPr>
           </a:lstStyle>
           <a:p>
@@ -1942,39 +1945,39 @@
         </p:nvSpPr>
         <p:spPr>
           <a:xfrm>
-            <a:off x="3060646" y="1378740"/>
-            <a:ext cx="3644652" cy="6805025"/>
+            <a:off x="4211340" y="518398"/>
+            <a:ext cx="5014913" cy="2558653"/>
           </a:xfrm>
         </p:spPr>
         <p:txBody>
           <a:bodyPr/>
           <a:lstStyle>
             <a:lvl1pPr>
-              <a:defRPr sz="2519"/>
+              <a:defRPr sz="1680"/>
             </a:lvl1pPr>
             <a:lvl2pPr>
-              <a:defRPr sz="2204"/>
+              <a:defRPr sz="1470"/>
             </a:lvl2pPr>
             <a:lvl3pPr>
-              <a:defRPr sz="1890"/>
+              <a:defRPr sz="1260"/>
             </a:lvl3pPr>
             <a:lvl4pPr>
-              <a:defRPr sz="1575"/>
+              <a:defRPr sz="1050"/>
             </a:lvl4pPr>
             <a:lvl5pPr>
-              <a:defRPr sz="1575"/>
+              <a:defRPr sz="1050"/>
             </a:lvl5pPr>
             <a:lvl6pPr>
-              <a:defRPr sz="1575"/>
+              <a:defRPr sz="1050"/>
             </a:lvl6pPr>
             <a:lvl7pPr>
-              <a:defRPr sz="1575"/>
+              <a:defRPr sz="1050"/>
             </a:lvl7pPr>
             <a:lvl8pPr>
-              <a:defRPr sz="1575"/>
+              <a:defRPr sz="1050"/>
             </a:lvl8pPr>
             <a:lvl9pPr>
-              <a:defRPr sz="1575"/>
+              <a:defRPr sz="1050"/>
             </a:lvl9pPr>
           </a:lstStyle>
           <a:p>
@@ -2027,8 +2030,8 @@
         </p:nvSpPr>
         <p:spPr>
           <a:xfrm>
-            <a:off x="495890" y="2872740"/>
-            <a:ext cx="2321966" cy="5322106"/>
+            <a:off x="682328" y="1080135"/>
+            <a:ext cx="3194943" cy="2001084"/>
           </a:xfrm>
         </p:spPr>
         <p:txBody>
@@ -2036,39 +2039,39 @@
           <a:lstStyle>
             <a:lvl1pPr marL="0" indent="0">
               <a:buNone/>
-              <a:defRPr sz="1260"/>
+              <a:defRPr sz="840"/>
             </a:lvl1pPr>
-            <a:lvl2pPr marL="359954" indent="0">
+            <a:lvl2pPr marL="240030" indent="0">
               <a:buNone/>
-              <a:defRPr sz="1102"/>
+              <a:defRPr sz="735"/>
             </a:lvl2pPr>
-            <a:lvl3pPr marL="719907" indent="0">
+            <a:lvl3pPr marL="480060" indent="0">
               <a:buNone/>
-              <a:defRPr sz="945"/>
+              <a:defRPr sz="630"/>
             </a:lvl3pPr>
-            <a:lvl4pPr marL="1079861" indent="0">
+            <a:lvl4pPr marL="720090" indent="0">
               <a:buNone/>
-              <a:defRPr sz="787"/>
+              <a:defRPr sz="525"/>
             </a:lvl4pPr>
-            <a:lvl5pPr marL="1439814" indent="0">
+            <a:lvl5pPr marL="960120" indent="0">
               <a:buNone/>
-              <a:defRPr sz="787"/>
+              <a:defRPr sz="525"/>
             </a:lvl5pPr>
-            <a:lvl6pPr marL="1799768" indent="0">
+            <a:lvl6pPr marL="1200150" indent="0">
               <a:buNone/>
-              <a:defRPr sz="787"/>
+              <a:defRPr sz="525"/>
             </a:lvl6pPr>
-            <a:lvl7pPr marL="2159721" indent="0">
+            <a:lvl7pPr marL="1440180" indent="0">
               <a:buNone/>
-              <a:defRPr sz="787"/>
+              <a:defRPr sz="525"/>
             </a:lvl7pPr>
-            <a:lvl8pPr marL="2519675" indent="0">
+            <a:lvl8pPr marL="1680210" indent="0">
               <a:buNone/>
-              <a:defRPr sz="787"/>
+              <a:defRPr sz="525"/>
             </a:lvl8pPr>
-            <a:lvl9pPr marL="2879628" indent="0">
+            <a:lvl9pPr marL="1920240" indent="0">
               <a:buNone/>
-              <a:defRPr sz="787"/>
+              <a:defRPr sz="525"/>
             </a:lvl9pPr>
           </a:lstStyle>
           <a:p>
@@ -2097,7 +2100,7 @@
           <a:p>
             <a:fld id="{24C44D4F-D6DB-48D1-8C0A-431A4767C007}" type="datetimeFigureOut">
               <a:rPr lang="zh-TW" altLang="en-US" smtClean="0"/>
-              <a:t>2026/5/6</a:t>
+              <a:t>2026/5/21</a:t>
             </a:fld>
             <a:endParaRPr lang="zh-TW" altLang="en-US"/>
           </a:p>
@@ -2148,7 +2151,7 @@
     </p:spTree>
     <p:extLst>
       <p:ext uri="{BB962C8B-B14F-4D97-AF65-F5344CB8AC3E}">
-        <p14:creationId xmlns:p14="http://schemas.microsoft.com/office/powerpoint/2010/main" val="783111451"/>
+        <p14:creationId xmlns:p14="http://schemas.microsoft.com/office/powerpoint/2010/main" val="3828381705"/>
       </p:ext>
     </p:extLst>
   </p:cSld>
@@ -2187,15 +2190,15 @@
         </p:nvSpPr>
         <p:spPr>
           <a:xfrm>
-            <a:off x="495890" y="638387"/>
-            <a:ext cx="2321966" cy="2234353"/>
+            <a:off x="682328" y="240030"/>
+            <a:ext cx="3194943" cy="840105"/>
           </a:xfrm>
         </p:spPr>
         <p:txBody>
           <a:bodyPr anchor="b"/>
           <a:lstStyle>
             <a:lvl1pPr>
-              <a:defRPr sz="2519"/>
+              <a:defRPr sz="1680"/>
             </a:lvl1pPr>
           </a:lstStyle>
           <a:p>
@@ -2219,8 +2222,8 @@
         </p:nvSpPr>
         <p:spPr>
           <a:xfrm>
-            <a:off x="3060646" y="1378740"/>
-            <a:ext cx="3644652" cy="6805025"/>
+            <a:off x="4211340" y="518398"/>
+            <a:ext cx="5014913" cy="2558653"/>
           </a:xfrm>
         </p:spPr>
         <p:txBody>
@@ -2228,39 +2231,39 @@
           <a:lstStyle>
             <a:lvl1pPr marL="0" indent="0">
               <a:buNone/>
-              <a:defRPr sz="2519"/>
+              <a:defRPr sz="1680"/>
             </a:lvl1pPr>
-            <a:lvl2pPr marL="359954" indent="0">
+            <a:lvl2pPr marL="240030" indent="0">
               <a:buNone/>
-              <a:defRPr sz="2204"/>
+              <a:defRPr sz="1470"/>
             </a:lvl2pPr>
-            <a:lvl3pPr marL="719907" indent="0">
+            <a:lvl3pPr marL="480060" indent="0">
               <a:buNone/>
-              <a:defRPr sz="1890"/>
+              <a:defRPr sz="1260"/>
             </a:lvl3pPr>
-            <a:lvl4pPr marL="1079861" indent="0">
+            <a:lvl4pPr marL="720090" indent="0">
               <a:buNone/>
-              <a:defRPr sz="1575"/>
+              <a:defRPr sz="1050"/>
             </a:lvl4pPr>
-            <a:lvl5pPr marL="1439814" indent="0">
+            <a:lvl5pPr marL="960120" indent="0">
               <a:buNone/>
-              <a:defRPr sz="1575"/>
+              <a:defRPr sz="1050"/>
             </a:lvl5pPr>
-            <a:lvl6pPr marL="1799768" indent="0">
+            <a:lvl6pPr marL="1200150" indent="0">
               <a:buNone/>
-              <a:defRPr sz="1575"/>
+              <a:defRPr sz="1050"/>
             </a:lvl6pPr>
-            <a:lvl7pPr marL="2159721" indent="0">
+            <a:lvl7pPr marL="1440180" indent="0">
               <a:buNone/>
-              <a:defRPr sz="1575"/>
+              <a:defRPr sz="1050"/>
             </a:lvl7pPr>
-            <a:lvl8pPr marL="2519675" indent="0">
+            <a:lvl8pPr marL="1680210" indent="0">
               <a:buNone/>
-              <a:defRPr sz="1575"/>
+              <a:defRPr sz="1050"/>
             </a:lvl8pPr>
-            <a:lvl9pPr marL="2879628" indent="0">
+            <a:lvl9pPr marL="1920240" indent="0">
               <a:buNone/>
-              <a:defRPr sz="1575"/>
+              <a:defRPr sz="1050"/>
             </a:lvl9pPr>
           </a:lstStyle>
           <a:p>
@@ -2284,8 +2287,8 @@
         </p:nvSpPr>
         <p:spPr>
           <a:xfrm>
-            <a:off x="495890" y="2872740"/>
-            <a:ext cx="2321966" cy="5322106"/>
+            <a:off x="682328" y="1080135"/>
+            <a:ext cx="3194943" cy="2001084"/>
           </a:xfrm>
         </p:spPr>
         <p:txBody>
@@ -2293,39 +2296,39 @@
           <a:lstStyle>
             <a:lvl1pPr marL="0" indent="0">
               <a:buNone/>
-              <a:defRPr sz="1260"/>
+              <a:defRPr sz="840"/>
             </a:lvl1pPr>
-            <a:lvl2pPr marL="359954" indent="0">
+            <a:lvl2pPr marL="240030" indent="0">
               <a:buNone/>
-              <a:defRPr sz="1102"/>
+              <a:defRPr sz="735"/>
             </a:lvl2pPr>
-            <a:lvl3pPr marL="719907" indent="0">
+            <a:lvl3pPr marL="480060" indent="0">
               <a:buNone/>
-              <a:defRPr sz="945"/>
+              <a:defRPr sz="630"/>
             </a:lvl3pPr>
-            <a:lvl4pPr marL="1079861" indent="0">
+            <a:lvl4pPr marL="720090" indent="0">
               <a:buNone/>
-              <a:defRPr sz="787"/>
+              <a:defRPr sz="525"/>
             </a:lvl4pPr>
-            <a:lvl5pPr marL="1439814" indent="0">
+            <a:lvl5pPr marL="960120" indent="0">
               <a:buNone/>
-              <a:defRPr sz="787"/>
+              <a:defRPr sz="525"/>
             </a:lvl5pPr>
-            <a:lvl6pPr marL="1799768" indent="0">
+            <a:lvl6pPr marL="1200150" indent="0">
               <a:buNone/>
-              <a:defRPr sz="787"/>
+              <a:defRPr sz="525"/>
             </a:lvl6pPr>
-            <a:lvl7pPr marL="2159721" indent="0">
+            <a:lvl7pPr marL="1440180" indent="0">
               <a:buNone/>
-              <a:defRPr sz="787"/>
+              <a:defRPr sz="525"/>
             </a:lvl7pPr>
-            <a:lvl8pPr marL="2519675" indent="0">
+            <a:lvl8pPr marL="1680210" indent="0">
               <a:buNone/>
-              <a:defRPr sz="787"/>
+              <a:defRPr sz="525"/>
             </a:lvl8pPr>
-            <a:lvl9pPr marL="2879628" indent="0">
+            <a:lvl9pPr marL="1920240" indent="0">
               <a:buNone/>
-              <a:defRPr sz="787"/>
+              <a:defRPr sz="525"/>
             </a:lvl9pPr>
           </a:lstStyle>
           <a:p>
@@ -2354,7 +2357,7 @@
           <a:p>
             <a:fld id="{24C44D4F-D6DB-48D1-8C0A-431A4767C007}" type="datetimeFigureOut">
               <a:rPr lang="zh-TW" altLang="en-US" smtClean="0"/>
-              <a:t>2026/5/6</a:t>
+              <a:t>2026/5/21</a:t>
             </a:fld>
             <a:endParaRPr lang="zh-TW" altLang="en-US"/>
           </a:p>
@@ -2405,7 +2408,7 @@
     </p:spTree>
     <p:extLst>
       <p:ext uri="{BB962C8B-B14F-4D97-AF65-F5344CB8AC3E}">
-        <p14:creationId xmlns:p14="http://schemas.microsoft.com/office/powerpoint/2010/main" val="641831909"/>
+        <p14:creationId xmlns:p14="http://schemas.microsoft.com/office/powerpoint/2010/main" val="2401973340"/>
       </p:ext>
     </p:extLst>
   </p:cSld>
@@ -2449,8 +2452,8 @@
         </p:nvSpPr>
         <p:spPr>
           <a:xfrm>
-            <a:off x="494953" y="509825"/>
-            <a:ext cx="6209407" cy="1850879"/>
+            <a:off x="681038" y="191691"/>
+            <a:ext cx="8543925" cy="695921"/>
           </a:xfrm>
           <a:prstGeom prst="rect">
             <a:avLst/>
@@ -2482,8 +2485,8 @@
         </p:nvSpPr>
         <p:spPr>
           <a:xfrm>
-            <a:off x="494953" y="2549113"/>
-            <a:ext cx="6209407" cy="6075757"/>
+            <a:off x="681038" y="958453"/>
+            <a:ext cx="8543925" cy="2284452"/>
           </a:xfrm>
           <a:prstGeom prst="rect">
             <a:avLst/>
@@ -2544,8 +2547,8 @@
         </p:nvSpPr>
         <p:spPr>
           <a:xfrm>
-            <a:off x="494953" y="8875350"/>
-            <a:ext cx="1619845" cy="509823"/>
+            <a:off x="681038" y="3337084"/>
+            <a:ext cx="2228850" cy="191691"/>
           </a:xfrm>
           <a:prstGeom prst="rect">
             <a:avLst/>
@@ -2555,7 +2558,7 @@
           <a:bodyPr vert="horz" lIns="91440" tIns="45720" rIns="91440" bIns="45720" rtlCol="0" anchor="ctr"/>
           <a:lstStyle>
             <a:lvl1pPr algn="l">
-              <a:defRPr sz="945">
+              <a:defRPr sz="630">
                 <a:solidFill>
                   <a:schemeClr val="tx1">
                     <a:tint val="75000"/>
@@ -2567,7 +2570,7 @@
           <a:p>
             <a:fld id="{24C44D4F-D6DB-48D1-8C0A-431A4767C007}" type="datetimeFigureOut">
               <a:rPr lang="zh-TW" altLang="en-US" smtClean="0"/>
-              <a:t>2026/5/6</a:t>
+              <a:t>2026/5/21</a:t>
             </a:fld>
             <a:endParaRPr lang="zh-TW" altLang="en-US"/>
           </a:p>
@@ -2585,8 +2588,8 @@
         </p:nvSpPr>
         <p:spPr>
           <a:xfrm>
-            <a:off x="2384773" y="8875350"/>
-            <a:ext cx="2429768" cy="509823"/>
+            <a:off x="3281363" y="3337084"/>
+            <a:ext cx="3343275" cy="191691"/>
           </a:xfrm>
           <a:prstGeom prst="rect">
             <a:avLst/>
@@ -2596,7 +2599,7 @@
           <a:bodyPr vert="horz" lIns="91440" tIns="45720" rIns="91440" bIns="45720" rtlCol="0" anchor="ctr"/>
           <a:lstStyle>
             <a:lvl1pPr algn="ctr">
-              <a:defRPr sz="945">
+              <a:defRPr sz="630">
                 <a:solidFill>
                   <a:schemeClr val="tx1">
                     <a:tint val="75000"/>
@@ -2622,8 +2625,8 @@
         </p:nvSpPr>
         <p:spPr>
           <a:xfrm>
-            <a:off x="5084515" y="8875350"/>
-            <a:ext cx="1619845" cy="509823"/>
+            <a:off x="6996113" y="3337084"/>
+            <a:ext cx="2228850" cy="191691"/>
           </a:xfrm>
           <a:prstGeom prst="rect">
             <a:avLst/>
@@ -2633,7 +2636,7 @@
           <a:bodyPr vert="horz" lIns="91440" tIns="45720" rIns="91440" bIns="45720" rtlCol="0" anchor="ctr"/>
           <a:lstStyle>
             <a:lvl1pPr algn="r">
-              <a:defRPr sz="945">
+              <a:defRPr sz="630">
                 <a:solidFill>
                   <a:schemeClr val="tx1">
                     <a:tint val="75000"/>
@@ -2654,27 +2657,27 @@
     </p:spTree>
     <p:extLst>
       <p:ext uri="{BB962C8B-B14F-4D97-AF65-F5344CB8AC3E}">
-        <p14:creationId xmlns:p14="http://schemas.microsoft.com/office/powerpoint/2010/main" val="198746047"/>
+        <p14:creationId xmlns:p14="http://schemas.microsoft.com/office/powerpoint/2010/main" val="3437566236"/>
       </p:ext>
     </p:extLst>
   </p:cSld>
   <p:clrMap bg1="lt1" tx1="dk1" bg2="lt2" tx2="dk2" accent1="accent1" accent2="accent2" accent3="accent3" accent4="accent4" accent5="accent5" accent6="accent6" hlink="hlink" folHlink="folHlink"/>
   <p:sldLayoutIdLst>
-    <p:sldLayoutId id="2147483697" r:id="rId1"/>
-    <p:sldLayoutId id="2147483698" r:id="rId2"/>
-    <p:sldLayoutId id="2147483699" r:id="rId3"/>
-    <p:sldLayoutId id="2147483700" r:id="rId4"/>
-    <p:sldLayoutId id="2147483701" r:id="rId5"/>
-    <p:sldLayoutId id="2147483702" r:id="rId6"/>
-    <p:sldLayoutId id="2147483703" r:id="rId7"/>
-    <p:sldLayoutId id="2147483704" r:id="rId8"/>
-    <p:sldLayoutId id="2147483705" r:id="rId9"/>
-    <p:sldLayoutId id="2147483706" r:id="rId10"/>
-    <p:sldLayoutId id="2147483707" r:id="rId11"/>
+    <p:sldLayoutId id="2147483757" r:id="rId1"/>
+    <p:sldLayoutId id="2147483758" r:id="rId2"/>
+    <p:sldLayoutId id="2147483759" r:id="rId3"/>
+    <p:sldLayoutId id="2147483760" r:id="rId4"/>
+    <p:sldLayoutId id="2147483761" r:id="rId5"/>
+    <p:sldLayoutId id="2147483762" r:id="rId6"/>
+    <p:sldLayoutId id="2147483763" r:id="rId7"/>
+    <p:sldLayoutId id="2147483764" r:id="rId8"/>
+    <p:sldLayoutId id="2147483765" r:id="rId9"/>
+    <p:sldLayoutId id="2147483766" r:id="rId10"/>
+    <p:sldLayoutId id="2147483767" r:id="rId11"/>
   </p:sldLayoutIdLst>
   <p:txStyles>
     <p:titleStyle>
-      <a:lvl1pPr algn="l" defTabSz="719907" rtl="0" eaLnBrk="1" latinLnBrk="0" hangingPunct="1">
+      <a:lvl1pPr algn="l" defTabSz="480060" rtl="0" eaLnBrk="1" latinLnBrk="0" hangingPunct="1">
         <a:lnSpc>
           <a:spcPct val="90000"/>
         </a:lnSpc>
@@ -2682,7 +2685,7 @@
           <a:spcPct val="0"/>
         </a:spcBef>
         <a:buNone/>
-        <a:defRPr sz="3464" kern="1200">
+        <a:defRPr sz="2310" kern="1200">
           <a:solidFill>
             <a:schemeClr val="tx1"/>
           </a:solidFill>
@@ -2693,16 +2696,16 @@
       </a:lvl1pPr>
     </p:titleStyle>
     <p:bodyStyle>
-      <a:lvl1pPr marL="179977" indent="-179977" algn="l" defTabSz="719907" rtl="0" eaLnBrk="1" latinLnBrk="0" hangingPunct="1">
+      <a:lvl1pPr marL="120015" indent="-120015" algn="l" defTabSz="480060" rtl="0" eaLnBrk="1" latinLnBrk="0" hangingPunct="1">
         <a:lnSpc>
           <a:spcPct val="90000"/>
         </a:lnSpc>
         <a:spcBef>
-          <a:spcPts val="787"/>
+          <a:spcPts val="525"/>
         </a:spcBef>
         <a:buFont typeface="Arial" panose="020B0604020202020204" pitchFamily="34" charset="0"/>
         <a:buChar char="•"/>
-        <a:defRPr sz="2204" kern="1200">
+        <a:defRPr sz="1470" kern="1200">
           <a:solidFill>
             <a:schemeClr val="tx1"/>
           </a:solidFill>
@@ -2711,16 +2714,16 @@
           <a:cs typeface="+mn-cs"/>
         </a:defRPr>
       </a:lvl1pPr>
-      <a:lvl2pPr marL="539930" indent="-179977" algn="l" defTabSz="719907" rtl="0" eaLnBrk="1" latinLnBrk="0" hangingPunct="1">
+      <a:lvl2pPr marL="360045" indent="-120015" algn="l" defTabSz="480060" rtl="0" eaLnBrk="1" latinLnBrk="0" hangingPunct="1">
         <a:lnSpc>
           <a:spcPct val="90000"/>
         </a:lnSpc>
         <a:spcBef>
-          <a:spcPts val="394"/>
+          <a:spcPts val="263"/>
         </a:spcBef>
         <a:buFont typeface="Arial" panose="020B0604020202020204" pitchFamily="34" charset="0"/>
         <a:buChar char="•"/>
-        <a:defRPr sz="1890" kern="1200">
+        <a:defRPr sz="1260" kern="1200">
           <a:solidFill>
             <a:schemeClr val="tx1"/>
           </a:solidFill>
@@ -2729,16 +2732,16 @@
           <a:cs typeface="+mn-cs"/>
         </a:defRPr>
       </a:lvl2pPr>
-      <a:lvl3pPr marL="899884" indent="-179977" algn="l" defTabSz="719907" rtl="0" eaLnBrk="1" latinLnBrk="0" hangingPunct="1">
+      <a:lvl3pPr marL="600075" indent="-120015" algn="l" defTabSz="480060" rtl="0" eaLnBrk="1" latinLnBrk="0" hangingPunct="1">
         <a:lnSpc>
           <a:spcPct val="90000"/>
         </a:lnSpc>
         <a:spcBef>
-          <a:spcPts val="394"/>
+          <a:spcPts val="263"/>
         </a:spcBef>
         <a:buFont typeface="Arial" panose="020B0604020202020204" pitchFamily="34" charset="0"/>
         <a:buChar char="•"/>
-        <a:defRPr sz="1575" kern="1200">
+        <a:defRPr sz="1050" kern="1200">
           <a:solidFill>
             <a:schemeClr val="tx1"/>
           </a:solidFill>
@@ -2747,16 +2750,16 @@
           <a:cs typeface="+mn-cs"/>
         </a:defRPr>
       </a:lvl3pPr>
-      <a:lvl4pPr marL="1259837" indent="-179977" algn="l" defTabSz="719907" rtl="0" eaLnBrk="1" latinLnBrk="0" hangingPunct="1">
+      <a:lvl4pPr marL="840105" indent="-120015" algn="l" defTabSz="480060" rtl="0" eaLnBrk="1" latinLnBrk="0" hangingPunct="1">
         <a:lnSpc>
           <a:spcPct val="90000"/>
         </a:lnSpc>
         <a:spcBef>
-          <a:spcPts val="394"/>
+          <a:spcPts val="263"/>
         </a:spcBef>
         <a:buFont typeface="Arial" panose="020B0604020202020204" pitchFamily="34" charset="0"/>
         <a:buChar char="•"/>
-        <a:defRPr sz="1417" kern="1200">
+        <a:defRPr sz="945" kern="1200">
           <a:solidFill>
             <a:schemeClr val="tx1"/>
           </a:solidFill>
@@ -2765,16 +2768,16 @@
           <a:cs typeface="+mn-cs"/>
         </a:defRPr>
       </a:lvl4pPr>
-      <a:lvl5pPr marL="1619791" indent="-179977" algn="l" defTabSz="719907" rtl="0" eaLnBrk="1" latinLnBrk="0" hangingPunct="1">
+      <a:lvl5pPr marL="1080135" indent="-120015" algn="l" defTabSz="480060" rtl="0" eaLnBrk="1" latinLnBrk="0" hangingPunct="1">
         <a:lnSpc>
           <a:spcPct val="90000"/>
         </a:lnSpc>
         <a:spcBef>
-          <a:spcPts val="394"/>
+          <a:spcPts val="263"/>
         </a:spcBef>
         <a:buFont typeface="Arial" panose="020B0604020202020204" pitchFamily="34" charset="0"/>
         <a:buChar char="•"/>
-        <a:defRPr sz="1417" kern="1200">
+        <a:defRPr sz="945" kern="1200">
           <a:solidFill>
             <a:schemeClr val="tx1"/>
           </a:solidFill>
@@ -2783,16 +2786,16 @@
           <a:cs typeface="+mn-cs"/>
         </a:defRPr>
       </a:lvl5pPr>
-      <a:lvl6pPr marL="1979745" indent="-179977" algn="l" defTabSz="719907" rtl="0" eaLnBrk="1" latinLnBrk="0" hangingPunct="1">
+      <a:lvl6pPr marL="1320165" indent="-120015" algn="l" defTabSz="480060" rtl="0" eaLnBrk="1" latinLnBrk="0" hangingPunct="1">
         <a:lnSpc>
           <a:spcPct val="90000"/>
         </a:lnSpc>
         <a:spcBef>
-          <a:spcPts val="394"/>
+          <a:spcPts val="263"/>
         </a:spcBef>
         <a:buFont typeface="Arial" panose="020B0604020202020204" pitchFamily="34" charset="0"/>
         <a:buChar char="•"/>
-        <a:defRPr sz="1417" kern="1200">
+        <a:defRPr sz="945" kern="1200">
           <a:solidFill>
             <a:schemeClr val="tx1"/>
           </a:solidFill>
@@ -2801,16 +2804,16 @@
           <a:cs typeface="+mn-cs"/>
         </a:defRPr>
       </a:lvl6pPr>
-      <a:lvl7pPr marL="2339698" indent="-179977" algn="l" defTabSz="719907" rtl="0" eaLnBrk="1" latinLnBrk="0" hangingPunct="1">
+      <a:lvl7pPr marL="1560195" indent="-120015" algn="l" defTabSz="480060" rtl="0" eaLnBrk="1" latinLnBrk="0" hangingPunct="1">
         <a:lnSpc>
           <a:spcPct val="90000"/>
         </a:lnSpc>
         <a:spcBef>
-          <a:spcPts val="394"/>
+          <a:spcPts val="263"/>
         </a:spcBef>
         <a:buFont typeface="Arial" panose="020B0604020202020204" pitchFamily="34" charset="0"/>
         <a:buChar char="•"/>
-        <a:defRPr sz="1417" kern="1200">
+        <a:defRPr sz="945" kern="1200">
           <a:solidFill>
             <a:schemeClr val="tx1"/>
           </a:solidFill>
@@ -2819,16 +2822,16 @@
           <a:cs typeface="+mn-cs"/>
         </a:defRPr>
       </a:lvl7pPr>
-      <a:lvl8pPr marL="2699652" indent="-179977" algn="l" defTabSz="719907" rtl="0" eaLnBrk="1" latinLnBrk="0" hangingPunct="1">
+      <a:lvl8pPr marL="1800225" indent="-120015" algn="l" defTabSz="480060" rtl="0" eaLnBrk="1" latinLnBrk="0" hangingPunct="1">
         <a:lnSpc>
           <a:spcPct val="90000"/>
         </a:lnSpc>
         <a:spcBef>
-          <a:spcPts val="394"/>
+          <a:spcPts val="263"/>
         </a:spcBef>
         <a:buFont typeface="Arial" panose="020B0604020202020204" pitchFamily="34" charset="0"/>
         <a:buChar char="•"/>
-        <a:defRPr sz="1417" kern="1200">
+        <a:defRPr sz="945" kern="1200">
           <a:solidFill>
             <a:schemeClr val="tx1"/>
           </a:solidFill>
@@ -2837,16 +2840,16 @@
           <a:cs typeface="+mn-cs"/>
         </a:defRPr>
       </a:lvl8pPr>
-      <a:lvl9pPr marL="3059605" indent="-179977" algn="l" defTabSz="719907" rtl="0" eaLnBrk="1" latinLnBrk="0" hangingPunct="1">
+      <a:lvl9pPr marL="2040255" indent="-120015" algn="l" defTabSz="480060" rtl="0" eaLnBrk="1" latinLnBrk="0" hangingPunct="1">
         <a:lnSpc>
           <a:spcPct val="90000"/>
         </a:lnSpc>
         <a:spcBef>
-          <a:spcPts val="394"/>
+          <a:spcPts val="263"/>
         </a:spcBef>
         <a:buFont typeface="Arial" panose="020B0604020202020204" pitchFamily="34" charset="0"/>
         <a:buChar char="•"/>
-        <a:defRPr sz="1417" kern="1200">
+        <a:defRPr sz="945" kern="1200">
           <a:solidFill>
             <a:schemeClr val="tx1"/>
           </a:solidFill>
@@ -2860,8 +2863,8 @@
       <a:defPPr>
         <a:defRPr lang="en-US"/>
       </a:defPPr>
-      <a:lvl1pPr marL="0" algn="l" defTabSz="719907" rtl="0" eaLnBrk="1" latinLnBrk="0" hangingPunct="1">
-        <a:defRPr sz="1417" kern="1200">
+      <a:lvl1pPr marL="0" algn="l" defTabSz="480060" rtl="0" eaLnBrk="1" latinLnBrk="0" hangingPunct="1">
+        <a:defRPr sz="945" kern="1200">
           <a:solidFill>
             <a:schemeClr val="tx1"/>
           </a:solidFill>
@@ -2870,8 +2873,8 @@
           <a:cs typeface="+mn-cs"/>
         </a:defRPr>
       </a:lvl1pPr>
-      <a:lvl2pPr marL="359954" algn="l" defTabSz="719907" rtl="0" eaLnBrk="1" latinLnBrk="0" hangingPunct="1">
-        <a:defRPr sz="1417" kern="1200">
+      <a:lvl2pPr marL="240030" algn="l" defTabSz="480060" rtl="0" eaLnBrk="1" latinLnBrk="0" hangingPunct="1">
+        <a:defRPr sz="945" kern="1200">
           <a:solidFill>
             <a:schemeClr val="tx1"/>
           </a:solidFill>
@@ -2880,8 +2883,8 @@
           <a:cs typeface="+mn-cs"/>
         </a:defRPr>
       </a:lvl2pPr>
-      <a:lvl3pPr marL="719907" algn="l" defTabSz="719907" rtl="0" eaLnBrk="1" latinLnBrk="0" hangingPunct="1">
-        <a:defRPr sz="1417" kern="1200">
+      <a:lvl3pPr marL="480060" algn="l" defTabSz="480060" rtl="0" eaLnBrk="1" latinLnBrk="0" hangingPunct="1">
+        <a:defRPr sz="945" kern="1200">
           <a:solidFill>
             <a:schemeClr val="tx1"/>
           </a:solidFill>
@@ -2890,8 +2893,8 @@
           <a:cs typeface="+mn-cs"/>
         </a:defRPr>
       </a:lvl3pPr>
-      <a:lvl4pPr marL="1079861" algn="l" defTabSz="719907" rtl="0" eaLnBrk="1" latinLnBrk="0" hangingPunct="1">
-        <a:defRPr sz="1417" kern="1200">
+      <a:lvl4pPr marL="720090" algn="l" defTabSz="480060" rtl="0" eaLnBrk="1" latinLnBrk="0" hangingPunct="1">
+        <a:defRPr sz="945" kern="1200">
           <a:solidFill>
             <a:schemeClr val="tx1"/>
           </a:solidFill>
@@ -2900,8 +2903,8 @@
           <a:cs typeface="+mn-cs"/>
         </a:defRPr>
       </a:lvl4pPr>
-      <a:lvl5pPr marL="1439814" algn="l" defTabSz="719907" rtl="0" eaLnBrk="1" latinLnBrk="0" hangingPunct="1">
-        <a:defRPr sz="1417" kern="1200">
+      <a:lvl5pPr marL="960120" algn="l" defTabSz="480060" rtl="0" eaLnBrk="1" latinLnBrk="0" hangingPunct="1">
+        <a:defRPr sz="945" kern="1200">
           <a:solidFill>
             <a:schemeClr val="tx1"/>
           </a:solidFill>
@@ -2910,8 +2913,8 @@
           <a:cs typeface="+mn-cs"/>
         </a:defRPr>
       </a:lvl5pPr>
-      <a:lvl6pPr marL="1799768" algn="l" defTabSz="719907" rtl="0" eaLnBrk="1" latinLnBrk="0" hangingPunct="1">
-        <a:defRPr sz="1417" kern="1200">
+      <a:lvl6pPr marL="1200150" algn="l" defTabSz="480060" rtl="0" eaLnBrk="1" latinLnBrk="0" hangingPunct="1">
+        <a:defRPr sz="945" kern="1200">
           <a:solidFill>
             <a:schemeClr val="tx1"/>
           </a:solidFill>
@@ -2920,8 +2923,8 @@
           <a:cs typeface="+mn-cs"/>
         </a:defRPr>
       </a:lvl6pPr>
-      <a:lvl7pPr marL="2159721" algn="l" defTabSz="719907" rtl="0" eaLnBrk="1" latinLnBrk="0" hangingPunct="1">
-        <a:defRPr sz="1417" kern="1200">
+      <a:lvl7pPr marL="1440180" algn="l" defTabSz="480060" rtl="0" eaLnBrk="1" latinLnBrk="0" hangingPunct="1">
+        <a:defRPr sz="945" kern="1200">
           <a:solidFill>
             <a:schemeClr val="tx1"/>
           </a:solidFill>
@@ -2930,8 +2933,8 @@
           <a:cs typeface="+mn-cs"/>
         </a:defRPr>
       </a:lvl7pPr>
-      <a:lvl8pPr marL="2519675" algn="l" defTabSz="719907" rtl="0" eaLnBrk="1" latinLnBrk="0" hangingPunct="1">
-        <a:defRPr sz="1417" kern="1200">
+      <a:lvl8pPr marL="1680210" algn="l" defTabSz="480060" rtl="0" eaLnBrk="1" latinLnBrk="0" hangingPunct="1">
+        <a:defRPr sz="945" kern="1200">
           <a:solidFill>
             <a:schemeClr val="tx1"/>
           </a:solidFill>
@@ -2940,8 +2943,8 @@
           <a:cs typeface="+mn-cs"/>
         </a:defRPr>
       </a:lvl8pPr>
-      <a:lvl9pPr marL="2879628" algn="l" defTabSz="719907" rtl="0" eaLnBrk="1" latinLnBrk="0" hangingPunct="1">
-        <a:defRPr sz="1417" kern="1200">
+      <a:lvl9pPr marL="1920240" algn="l" defTabSz="480060" rtl="0" eaLnBrk="1" latinLnBrk="0" hangingPunct="1">
+        <a:defRPr sz="945" kern="1200">
           <a:solidFill>
             <a:schemeClr val="tx1"/>
           </a:solidFill>
@@ -2999,8 +3002,8 @@
         </p:blipFill>
         <p:spPr>
           <a:xfrm>
-            <a:off x="-294163" y="4371181"/>
-            <a:ext cx="8269763" cy="1730376"/>
+            <a:off x="3672608" y="1663201"/>
+            <a:ext cx="2719322" cy="568995"/>
           </a:xfrm>
           <a:prstGeom prst="rect">
             <a:avLst/>
@@ -3034,8 +3037,8 @@
         </p:blipFill>
         <p:spPr>
           <a:xfrm>
-            <a:off x="8581231" y="4777581"/>
-            <a:ext cx="535304" cy="1667510"/>
+            <a:off x="10360412" y="1796833"/>
+            <a:ext cx="176023" cy="548322"/>
           </a:xfrm>
           <a:prstGeom prst="rect">
             <a:avLst/>
@@ -3056,7 +3059,7 @@
 </file>
 
 <file path=ppt/slides/slide2.xml><?xml version="1.0" encoding="utf-8"?>
-<p:sld xmlns:a="http://schemas.openxmlformats.org/drawingml/2006/main" xmlns:r="http://schemas.openxmlformats.org/officeDocument/2006/relationships" xmlns:p="http://schemas.openxmlformats.org/presentationml/2006/main">
+<p:sld xmlns:a="http://schemas.openxmlformats.org/drawingml/2006/main" xmlns:r="http://schemas.openxmlformats.org/officeDocument/2006/relationships" xmlns:p="http://schemas.openxmlformats.org/presentationml/2006/main" show="0">
   <p:cSld>
     <p:spTree>
       <p:nvGrpSpPr>
@@ -3074,10 +3077,10 @@
       </p:grpSpPr>
       <p:grpSp>
         <p:nvGrpSpPr>
-          <p:cNvPr id="2" name="群組 1">
+          <p:cNvPr id="3" name="群組 2">
             <a:extLst>
               <a:ext uri="{FF2B5EF4-FFF2-40B4-BE49-F238E27FC236}">
-                <a16:creationId xmlns:a16="http://schemas.microsoft.com/office/drawing/2014/main" id="{4E15F7B3-1138-4FED-9C31-20E81EDB5952}"/>
+                <a16:creationId xmlns:a16="http://schemas.microsoft.com/office/drawing/2014/main" id="{7B48B429-CC76-40FA-B26B-37A791F78423}"/>
               </a:ext>
             </a:extLst>
           </p:cNvPr>
@@ -3086,10 +3089,10 @@
         </p:nvGrpSpPr>
         <p:grpSpPr>
           <a:xfrm>
-            <a:off x="159770" y="9739"/>
-            <a:ext cx="6879772" cy="9556329"/>
-            <a:chOff x="159770" y="-594360"/>
-            <a:chExt cx="6879772" cy="9556329"/>
+            <a:off x="3716733" y="90491"/>
+            <a:ext cx="2472543" cy="3419475"/>
+            <a:chOff x="-152398" y="1"/>
+            <a:chExt cx="7162798" cy="9906000"/>
           </a:xfrm>
         </p:grpSpPr>
         <p:sp>
@@ -3106,14 +3109,30 @@
           </p:nvSpPr>
           <p:spPr>
             <a:xfrm>
-              <a:off x="159770" y="-594360"/>
-              <a:ext cx="6879772" cy="9556329"/>
+              <a:off x="0" y="1"/>
+              <a:ext cx="6858000" cy="9906000"/>
             </a:xfrm>
             <a:prstGeom prst="roundRect">
               <a:avLst>
                 <a:gd name="adj" fmla="val 7772"/>
               </a:avLst>
             </a:prstGeom>
+            <a:gradFill flip="none" rotWithShape="1">
+              <a:gsLst>
+                <a:gs pos="0">
+                  <a:schemeClr val="bg1">
+                    <a:lumMod val="85000"/>
+                  </a:schemeClr>
+                </a:gs>
+                <a:gs pos="100000">
+                  <a:schemeClr val="bg1">
+                    <a:lumMod val="95000"/>
+                  </a:schemeClr>
+                </a:gs>
+              </a:gsLst>
+              <a:lin ang="16200000" scaled="1"/>
+              <a:tileRect/>
+            </a:gradFill>
           </p:spPr>
           <p:style>
             <a:lnRef idx="1">
@@ -3130,7 +3149,7 @@
             </a:fontRef>
           </p:style>
           <p:txBody>
-            <a:bodyPr rot="0" spcFirstLastPara="0" vertOverflow="overflow" horzOverflow="overflow" vert="horz" wrap="square" lIns="58066" tIns="29033" rIns="58066" bIns="29033" numCol="1" spcCol="0" rtlCol="0" fromWordArt="0" anchor="ctr" anchorCtr="0" forceAA="0" compatLnSpc="1">
+            <a:bodyPr rot="0" spcFirstLastPara="0" vertOverflow="overflow" horzOverflow="overflow" vert="horz" wrap="square" lIns="19094" tIns="9547" rIns="19094" bIns="9547" numCol="1" spcCol="0" rtlCol="0" fromWordArt="0" anchor="ctr" anchorCtr="0" forceAA="0" compatLnSpc="1">
               <a:prstTxWarp prst="textNoShape">
                 <a:avLst/>
               </a:prstTxWarp>
@@ -3139,7 +3158,7 @@
             <a:lstStyle/>
             <a:p>
               <a:pPr algn="ctr"/>
-              <a:endParaRPr lang="zh-TW" altLang="en-US" sz="1143" dirty="0"/>
+              <a:endParaRPr lang="zh-TW" altLang="en-US" sz="376" dirty="0"/>
             </a:p>
           </p:txBody>
         </p:sp>
@@ -3159,8 +3178,8 @@
               </p:nvSpPr>
               <p:spPr>
                 <a:xfrm>
-                  <a:off x="3130617" y="6317459"/>
-                  <a:ext cx="938079" cy="369332"/>
+                  <a:off x="2982199" y="6985507"/>
+                  <a:ext cx="893606" cy="575088"/>
                 </a:xfrm>
                 <a:prstGeom prst="rect">
                   <a:avLst/>
@@ -3181,7 +3200,7 @@
                       </m:oMathParaPr>
                       <m:oMath xmlns:m="http://schemas.openxmlformats.org/officeDocument/2006/math">
                         <m:r>
-                          <a:rPr lang="en-US" altLang="zh-TW" i="1">
+                          <a:rPr lang="en-US" altLang="zh-TW" sz="690" i="1">
                             <a:latin typeface="Cambria Math" panose="02040503050406030204" pitchFamily="18" charset="0"/>
                           </a:rPr>
                           <m:t>|</m:t>
@@ -3191,14 +3210,14 @@
                             <m:begChr m:val=""/>
                             <m:endChr m:val="⟩"/>
                             <m:ctrlPr>
-                              <a:rPr lang="en-US" altLang="zh-TW" i="1">
+                              <a:rPr lang="en-US" altLang="zh-TW" sz="690" i="1">
                                 <a:latin typeface="Cambria Math" panose="02040503050406030204" pitchFamily="18" charset="0"/>
                               </a:rPr>
                             </m:ctrlPr>
                           </m:dPr>
                           <m:e>
                             <m:r>
-                              <a:rPr lang="en-US" altLang="zh-TW" i="1">
+                              <a:rPr lang="en-US" altLang="zh-TW" sz="690" i="1">
                                 <a:latin typeface="Cambria Math" panose="02040503050406030204" pitchFamily="18" charset="0"/>
                               </a:rPr>
                               <m:t>−1, 1</m:t>
@@ -3208,7 +3227,10 @@
                       </m:oMath>
                     </m:oMathPara>
                   </a14:m>
-                  <a:endParaRPr lang="zh-TW" altLang="en-US" dirty="0"/>
+                  <a:endParaRPr lang="zh-TW" altLang="en-US" sz="690" dirty="0">
+                    <a:latin typeface="Times New Roman" panose="02020603050405020304" pitchFamily="18" charset="0"/>
+                    <a:cs typeface="Times New Roman" panose="02020603050405020304" pitchFamily="18" charset="0"/>
+                  </a:endParaRPr>
                 </a:p>
               </p:txBody>
             </p:sp>
@@ -3230,8 +3252,8 @@
               </p:nvSpPr>
               <p:spPr>
                 <a:xfrm>
-                  <a:off x="3130617" y="6317459"/>
-                  <a:ext cx="938079" cy="369332"/>
+                  <a:off x="2982199" y="6985507"/>
+                  <a:ext cx="893606" cy="575088"/>
                 </a:xfrm>
                 <a:prstGeom prst="rect">
                   <a:avLst/>
@@ -3239,7 +3261,7 @@
                 <a:blipFill>
                   <a:blip r:embed="rId2"/>
                   <a:stretch>
-                    <a:fillRect t="-119672" r="-49020" b="-183607"/>
+                    <a:fillRect t="-66667" r="-92157" b="-112121"/>
                   </a:stretch>
                 </a:blipFill>
               </p:spPr>
@@ -3274,8 +3296,8 @@
               </p:nvSpPr>
               <p:spPr>
                 <a:xfrm>
-                  <a:off x="3130617" y="2977691"/>
-                  <a:ext cx="938079" cy="369332"/>
+                  <a:off x="2982199" y="3804072"/>
+                  <a:ext cx="893606" cy="575088"/>
                 </a:xfrm>
                 <a:prstGeom prst="rect">
                   <a:avLst/>
@@ -3296,7 +3318,7 @@
                       </m:oMathParaPr>
                       <m:oMath xmlns:m="http://schemas.openxmlformats.org/officeDocument/2006/math">
                         <m:r>
-                          <a:rPr lang="en-US" altLang="zh-TW" i="1">
+                          <a:rPr lang="en-US" altLang="zh-TW" sz="690" i="1">
                             <a:latin typeface="Cambria Math" panose="02040503050406030204" pitchFamily="18" charset="0"/>
                           </a:rPr>
                           <m:t>|</m:t>
@@ -3306,14 +3328,14 @@
                             <m:begChr m:val=""/>
                             <m:endChr m:val="⟩"/>
                             <m:ctrlPr>
-                              <a:rPr lang="en-US" altLang="zh-TW" i="1">
+                              <a:rPr lang="en-US" altLang="zh-TW" sz="690" i="1">
                                 <a:latin typeface="Cambria Math" panose="02040503050406030204" pitchFamily="18" charset="0"/>
                               </a:rPr>
                             </m:ctrlPr>
                           </m:dPr>
                           <m:e>
                             <m:r>
-                              <a:rPr lang="en-US" altLang="zh-TW" i="1">
+                              <a:rPr lang="en-US" altLang="zh-TW" sz="690" i="1">
                                 <a:latin typeface="Cambria Math" panose="02040503050406030204" pitchFamily="18" charset="0"/>
                               </a:rPr>
                               <m:t>1, −1</m:t>
@@ -3323,7 +3345,10 @@
                       </m:oMath>
                     </m:oMathPara>
                   </a14:m>
-                  <a:endParaRPr lang="zh-TW" altLang="en-US" dirty="0"/>
+                  <a:endParaRPr lang="zh-TW" altLang="en-US" sz="690" dirty="0">
+                    <a:latin typeface="Times New Roman" panose="02020603050405020304" pitchFamily="18" charset="0"/>
+                    <a:cs typeface="Times New Roman" panose="02020603050405020304" pitchFamily="18" charset="0"/>
+                  </a:endParaRPr>
                 </a:p>
               </p:txBody>
             </p:sp>
@@ -3345,8 +3370,8 @@
               </p:nvSpPr>
               <p:spPr>
                 <a:xfrm>
-                  <a:off x="3130617" y="2977691"/>
-                  <a:ext cx="938079" cy="369332"/>
+                  <a:off x="2982199" y="3804072"/>
+                  <a:ext cx="893606" cy="575088"/>
                 </a:xfrm>
                 <a:prstGeom prst="rect">
                   <a:avLst/>
@@ -3354,7 +3379,7 @@
                 <a:blipFill>
                   <a:blip r:embed="rId3"/>
                   <a:stretch>
-                    <a:fillRect t="-121667" r="-49020" b="-188333"/>
+                    <a:fillRect t="-66667" r="-92157" b="-112121"/>
                   </a:stretch>
                 </a:blipFill>
               </p:spPr>
@@ -3389,8 +3414,8 @@
               </p:nvSpPr>
               <p:spPr>
                 <a:xfrm>
-                  <a:off x="2252912" y="974480"/>
-                  <a:ext cx="2693488" cy="369332"/>
+                  <a:off x="2146103" y="1692631"/>
+                  <a:ext cx="2565793" cy="575088"/>
                 </a:xfrm>
                 <a:prstGeom prst="rect">
                   <a:avLst/>
@@ -3413,26 +3438,26 @@
                         <m:d>
                           <m:dPr>
                             <m:ctrlPr>
-                              <a:rPr lang="en-US" altLang="zh-TW" i="1">
+                              <a:rPr lang="en-US" altLang="zh-TW" sz="690" i="1">
                                 <a:latin typeface="Cambria Math" panose="02040503050406030204" pitchFamily="18" charset="0"/>
                               </a:rPr>
                             </m:ctrlPr>
                           </m:dPr>
                           <m:e>
                             <m:r>
-                              <a:rPr lang="en-US" altLang="zh-TW" i="1">
+                              <a:rPr lang="en-US" altLang="zh-TW" sz="690" i="1">
                                 <a:latin typeface="Cambria Math" panose="02040503050406030204" pitchFamily="18" charset="0"/>
                               </a:rPr>
                               <m:t>𝛼</m:t>
                             </m:r>
                             <m:r>
-                              <a:rPr lang="en-US" altLang="zh-TW" i="1">
+                              <a:rPr lang="en-US" altLang="zh-TW" sz="690" i="1">
                                 <a:latin typeface="Cambria Math" panose="02040503050406030204" pitchFamily="18" charset="0"/>
                               </a:rPr>
                               <m:t>, </m:t>
                             </m:r>
                             <m:r>
-                              <a:rPr lang="en-US" altLang="zh-TW" i="1">
+                              <a:rPr lang="en-US" altLang="zh-TW" sz="690" i="1">
                                 <a:latin typeface="Cambria Math" panose="02040503050406030204" pitchFamily="18" charset="0"/>
                               </a:rPr>
                               <m:t>𝛽</m:t>
@@ -3440,7 +3465,7 @@
                           </m:e>
                         </m:d>
                         <m:r>
-                          <a:rPr lang="en-US" altLang="zh-TW" i="1">
+                          <a:rPr lang="en-US" altLang="zh-TW" sz="690" i="1">
                             <a:latin typeface="Cambria Math" panose="02040503050406030204" pitchFamily="18" charset="0"/>
                           </a:rPr>
                           <m:t>=</m:t>
@@ -3448,14 +3473,14 @@
                         <m:d>
                           <m:dPr>
                             <m:ctrlPr>
-                              <a:rPr lang="en-US" altLang="zh-TW" i="1">
+                              <a:rPr lang="en-US" altLang="zh-TW" sz="690" i="1">
                                 <a:latin typeface="Cambria Math" panose="02040503050406030204" pitchFamily="18" charset="0"/>
                               </a:rPr>
                             </m:ctrlPr>
                           </m:dPr>
                           <m:e>
                             <m:r>
-                              <a:rPr lang="en-US" altLang="zh-TW" i="1">
+                              <a:rPr lang="en-US" altLang="zh-TW" sz="690" i="1">
                                 <a:latin typeface="Cambria Math" panose="02040503050406030204" pitchFamily="18" charset="0"/>
                               </a:rPr>
                               <m:t>0, </m:t>
@@ -3464,8 +3489,9 @@
                               <m:rPr>
                                 <m:nor/>
                               </m:rPr>
-                              <a:rPr lang="en-US" altLang="zh-TW">
-                                <a:latin typeface="Cambria Math" panose="02040503050406030204" pitchFamily="18" charset="0"/>
+                              <a:rPr lang="en-US" altLang="zh-TW" sz="690">
+                                <a:latin typeface="Times New Roman" panose="02020603050405020304" pitchFamily="18" charset="0"/>
+                                <a:cs typeface="Times New Roman" panose="02020603050405020304" pitchFamily="18" charset="0"/>
                               </a:rPr>
                               <m:t>0</m:t>
                             </m:r>
@@ -3474,7 +3500,10 @@
                       </m:oMath>
                     </m:oMathPara>
                   </a14:m>
-                  <a:endParaRPr lang="zh-TW" altLang="en-US" dirty="0"/>
+                  <a:endParaRPr lang="zh-TW" altLang="en-US" sz="690" dirty="0">
+                    <a:latin typeface="Times New Roman" panose="02020603050405020304" pitchFamily="18" charset="0"/>
+                    <a:cs typeface="Times New Roman" panose="02020603050405020304" pitchFamily="18" charset="0"/>
+                  </a:endParaRPr>
                 </a:p>
               </p:txBody>
             </p:sp>
@@ -3496,8 +3525,8 @@
               </p:nvSpPr>
               <p:spPr>
                 <a:xfrm>
-                  <a:off x="2252912" y="974480"/>
-                  <a:ext cx="2693488" cy="369332"/>
+                  <a:off x="2146103" y="1692631"/>
+                  <a:ext cx="2565793" cy="575088"/>
                 </a:xfrm>
                 <a:prstGeom prst="rect">
                   <a:avLst/>
@@ -3505,7 +3534,7 @@
                 <a:blipFill>
                   <a:blip r:embed="rId4"/>
                   <a:stretch>
-                    <a:fillRect b="-11475"/>
+                    <a:fillRect/>
                   </a:stretch>
                 </a:blipFill>
               </p:spPr>
@@ -3540,8 +3569,8 @@
               </p:nvSpPr>
               <p:spPr>
                 <a:xfrm>
-                  <a:off x="569618" y="3823292"/>
-                  <a:ext cx="1327215" cy="369332"/>
+                  <a:off x="542615" y="4406385"/>
+                  <a:ext cx="1264292" cy="875634"/>
                 </a:xfrm>
                 <a:prstGeom prst="rect">
                   <a:avLst/>
@@ -3564,26 +3593,26 @@
                         <m:d>
                           <m:dPr>
                             <m:ctrlPr>
-                              <a:rPr lang="en-US" altLang="zh-TW" i="1">
+                              <a:rPr lang="en-US" altLang="zh-TW" sz="690" i="1">
                                 <a:latin typeface="Cambria Math" panose="02040503050406030204" pitchFamily="18" charset="0"/>
                               </a:rPr>
                             </m:ctrlPr>
                           </m:dPr>
                           <m:e>
                             <m:r>
-                              <a:rPr lang="en-US" altLang="zh-TW" i="1">
+                              <a:rPr lang="en-US" altLang="zh-TW" sz="690" i="1">
                                 <a:latin typeface="Cambria Math" panose="02040503050406030204" pitchFamily="18" charset="0"/>
                               </a:rPr>
                               <m:t>0, </m:t>
                             </m:r>
                             <m:r>
-                              <a:rPr lang="en-US" altLang="zh-TW" i="1">
+                              <a:rPr lang="en-US" altLang="zh-TW" sz="690" i="1">
                                 <a:latin typeface="Cambria Math" panose="02040503050406030204" pitchFamily="18" charset="0"/>
                               </a:rPr>
                               <m:t>𝜋</m:t>
                             </m:r>
                             <m:r>
-                              <a:rPr lang="en-US" altLang="zh-TW" i="1">
+                              <a:rPr lang="en-US" altLang="zh-TW" sz="690" i="1">
                                 <a:latin typeface="Cambria Math" panose="02040503050406030204" pitchFamily="18" charset="0"/>
                               </a:rPr>
                               <m:t>/2</m:t>
@@ -3593,7 +3622,10 @@
                       </m:oMath>
                     </m:oMathPara>
                   </a14:m>
-                  <a:endParaRPr lang="zh-TW" altLang="en-US" dirty="0"/>
+                  <a:endParaRPr lang="zh-TW" altLang="en-US" sz="690" dirty="0">
+                    <a:latin typeface="Times New Roman" panose="02020603050405020304" pitchFamily="18" charset="0"/>
+                    <a:cs typeface="Times New Roman" panose="02020603050405020304" pitchFamily="18" charset="0"/>
+                  </a:endParaRPr>
                 </a:p>
               </p:txBody>
             </p:sp>
@@ -3615,8 +3647,8 @@
               </p:nvSpPr>
               <p:spPr>
                 <a:xfrm>
-                  <a:off x="569618" y="3823292"/>
-                  <a:ext cx="1327215" cy="369332"/>
+                  <a:off x="542615" y="4406385"/>
+                  <a:ext cx="1264292" cy="875634"/>
                 </a:xfrm>
                 <a:prstGeom prst="rect">
                   <a:avLst/>
@@ -3624,7 +3656,7 @@
                 <a:blipFill>
                   <a:blip r:embed="rId5"/>
                   <a:stretch>
-                    <a:fillRect b="-13115"/>
+                    <a:fillRect l="-5556" t="-44000" r="-16667" b="-74000"/>
                   </a:stretch>
                 </a:blipFill>
               </p:spPr>
@@ -3659,8 +3691,8 @@
               </p:nvSpPr>
               <p:spPr>
                 <a:xfrm>
-                  <a:off x="5328663" y="3853883"/>
-                  <a:ext cx="1327215" cy="369332"/>
+                  <a:off x="5076038" y="4435526"/>
+                  <a:ext cx="1264292" cy="875634"/>
                 </a:xfrm>
                 <a:prstGeom prst="rect">
                   <a:avLst/>
@@ -3683,32 +3715,32 @@
                         <m:d>
                           <m:dPr>
                             <m:ctrlPr>
-                              <a:rPr lang="en-US" altLang="zh-TW" i="1">
+                              <a:rPr lang="en-US" altLang="zh-TW" sz="690" i="1">
                                 <a:latin typeface="Cambria Math" panose="02040503050406030204" pitchFamily="18" charset="0"/>
                               </a:rPr>
                             </m:ctrlPr>
                           </m:dPr>
                           <m:e>
                             <m:r>
-                              <a:rPr lang="en-US" altLang="zh-TW" i="1">
+                              <a:rPr lang="en-US" altLang="zh-TW" sz="690" i="1">
                                 <a:latin typeface="Cambria Math" panose="02040503050406030204" pitchFamily="18" charset="0"/>
                               </a:rPr>
                               <m:t>𝜋</m:t>
                             </m:r>
                             <m:r>
-                              <a:rPr lang="en-US" altLang="zh-TW" i="1">
+                              <a:rPr lang="en-US" altLang="zh-TW" sz="690" i="1">
                                 <a:latin typeface="Cambria Math" panose="02040503050406030204" pitchFamily="18" charset="0"/>
                               </a:rPr>
                               <m:t>,</m:t>
                             </m:r>
                             <m:r>
-                              <a:rPr lang="en-US" altLang="zh-TW" i="1">
+                              <a:rPr lang="en-US" altLang="zh-TW" sz="690" i="1">
                                 <a:latin typeface="Cambria Math" panose="02040503050406030204" pitchFamily="18" charset="0"/>
                               </a:rPr>
                               <m:t>𝜋</m:t>
                             </m:r>
                             <m:r>
-                              <a:rPr lang="en-US" altLang="zh-TW" i="1">
+                              <a:rPr lang="en-US" altLang="zh-TW" sz="690" i="1">
                                 <a:latin typeface="Cambria Math" panose="02040503050406030204" pitchFamily="18" charset="0"/>
                               </a:rPr>
                               <m:t>/2</m:t>
@@ -3718,7 +3750,10 @@
                       </m:oMath>
                     </m:oMathPara>
                   </a14:m>
-                  <a:endParaRPr lang="zh-TW" altLang="en-US" dirty="0"/>
+                  <a:endParaRPr lang="zh-TW" altLang="en-US" sz="690" dirty="0">
+                    <a:latin typeface="Times New Roman" panose="02020603050405020304" pitchFamily="18" charset="0"/>
+                    <a:cs typeface="Times New Roman" panose="02020603050405020304" pitchFamily="18" charset="0"/>
+                  </a:endParaRPr>
                 </a:p>
               </p:txBody>
             </p:sp>
@@ -3740,8 +3775,8 @@
               </p:nvSpPr>
               <p:spPr>
                 <a:xfrm>
-                  <a:off x="5328663" y="3853883"/>
-                  <a:ext cx="1327215" cy="369332"/>
+                  <a:off x="5076038" y="4435526"/>
+                  <a:ext cx="1264292" cy="875634"/>
                 </a:xfrm>
                 <a:prstGeom prst="rect">
                   <a:avLst/>
@@ -3749,7 +3784,7 @@
                 <a:blipFill>
                   <a:blip r:embed="rId6"/>
                   <a:stretch>
-                    <a:fillRect b="-13115"/>
+                    <a:fillRect l="-8451" t="-44000" r="-15493" b="-74000"/>
                   </a:stretch>
                 </a:blipFill>
               </p:spPr>
@@ -3784,8 +3819,8 @@
               </p:nvSpPr>
               <p:spPr>
                 <a:xfrm>
-                  <a:off x="2936049" y="6834921"/>
-                  <a:ext cx="1327215" cy="369332"/>
+                  <a:off x="2796853" y="7478435"/>
+                  <a:ext cx="1264292" cy="575088"/>
                 </a:xfrm>
                 <a:prstGeom prst="rect">
                   <a:avLst/>
@@ -3808,20 +3843,20 @@
                         <m:d>
                           <m:dPr>
                             <m:ctrlPr>
-                              <a:rPr lang="en-US" altLang="zh-TW" i="1">
+                              <a:rPr lang="en-US" altLang="zh-TW" sz="690" i="1">
                                 <a:latin typeface="Cambria Math" panose="02040503050406030204" pitchFamily="18" charset="0"/>
                               </a:rPr>
                             </m:ctrlPr>
                           </m:dPr>
                           <m:e>
                             <m:r>
-                              <a:rPr lang="en-US" altLang="zh-TW" i="1">
+                              <a:rPr lang="en-US" altLang="zh-TW" sz="690" i="1">
                                 <a:latin typeface="Cambria Math" panose="02040503050406030204" pitchFamily="18" charset="0"/>
                               </a:rPr>
                               <m:t>0, </m:t>
                             </m:r>
                             <m:r>
-                              <a:rPr lang="en-US" altLang="zh-TW" i="1">
+                              <a:rPr lang="en-US" altLang="zh-TW" sz="690" i="1">
                                 <a:latin typeface="Cambria Math" panose="02040503050406030204" pitchFamily="18" charset="0"/>
                               </a:rPr>
                               <m:t>𝜋</m:t>
@@ -3831,7 +3866,10 @@
                       </m:oMath>
                     </m:oMathPara>
                   </a14:m>
-                  <a:endParaRPr lang="zh-TW" altLang="en-US" dirty="0"/>
+                  <a:endParaRPr lang="zh-TW" altLang="en-US" sz="690" dirty="0">
+                    <a:latin typeface="Times New Roman" panose="02020603050405020304" pitchFamily="18" charset="0"/>
+                    <a:cs typeface="Times New Roman" panose="02020603050405020304" pitchFamily="18" charset="0"/>
+                  </a:endParaRPr>
                 </a:p>
               </p:txBody>
             </p:sp>
@@ -3853,8 +3891,8 @@
               </p:nvSpPr>
               <p:spPr>
                 <a:xfrm>
-                  <a:off x="2936049" y="6834921"/>
-                  <a:ext cx="1327215" cy="369332"/>
+                  <a:off x="2796853" y="7478435"/>
+                  <a:ext cx="1264292" cy="575088"/>
                 </a:xfrm>
                 <a:prstGeom prst="rect">
                   <a:avLst/>
@@ -3895,8 +3933,8 @@
           </p:nvSpPr>
           <p:spPr>
             <a:xfrm>
-              <a:off x="717179" y="-524297"/>
-              <a:ext cx="5764954" cy="523220"/>
+              <a:off x="-152398" y="279425"/>
+              <a:ext cx="7162798" cy="1098535"/>
             </a:xfrm>
             <a:prstGeom prst="rect">
               <a:avLst/>
@@ -3911,13 +3949,13 @@
             <a:p>
               <a:pPr algn="ctr"/>
               <a:r>
-                <a:rPr lang="en-US" altLang="zh-TW" sz="2800" dirty="0">
+                <a:rPr lang="en-US" altLang="zh-TW" sz="932" dirty="0">
                   <a:latin typeface="Times New Roman" panose="02020603050405020304" pitchFamily="18" charset="0"/>
                   <a:cs typeface="Times New Roman" panose="02020603050405020304" pitchFamily="18" charset="0"/>
                 </a:rPr>
-                <a:t>Valley-mixed excitons transition rate</a:t>
+                <a:t>Normalized valley-mixed excitons transition rate</a:t>
               </a:r>
-              <a:endParaRPr lang="zh-TW" altLang="en-US" sz="2800" dirty="0">
+              <a:endParaRPr lang="zh-TW" altLang="en-US" sz="932" dirty="0">
                 <a:latin typeface="Times New Roman" panose="02020603050405020304" pitchFamily="18" charset="0"/>
                 <a:cs typeface="Times New Roman" panose="02020603050405020304" pitchFamily="18" charset="0"/>
               </a:endParaRPr>
@@ -3961,8 +3999,8 @@
           </p:blipFill>
           <p:spPr>
             <a:xfrm>
-              <a:off x="4415439" y="1299145"/>
-              <a:ext cx="535304" cy="1667510"/>
+              <a:off x="4291832" y="2036989"/>
+              <a:ext cx="575443" cy="1792545"/>
             </a:xfrm>
             <a:prstGeom prst="rect">
               <a:avLst/>
@@ -3996,8 +4034,8 @@
           </p:blipFill>
           <p:spPr>
             <a:xfrm>
-              <a:off x="2815350" y="7182494"/>
-              <a:ext cx="1568613" cy="1578752"/>
+              <a:off x="2568860" y="7839465"/>
+              <a:ext cx="1677851" cy="1688696"/>
             </a:xfrm>
             <a:prstGeom prst="rect">
               <a:avLst/>
@@ -4031,8 +4069,8 @@
           </p:blipFill>
           <p:spPr>
             <a:xfrm>
-              <a:off x="467361" y="4204976"/>
-              <a:ext cx="1581648" cy="1578752"/>
+              <a:off x="330904" y="4809887"/>
+              <a:ext cx="1691794" cy="1688696"/>
             </a:xfrm>
             <a:prstGeom prst="rect">
               <a:avLst/>
@@ -4066,8 +4104,8 @@
           </p:blipFill>
           <p:spPr>
             <a:xfrm>
-              <a:off x="5238000" y="4218871"/>
-              <a:ext cx="1575131" cy="1578752"/>
+              <a:off x="4875371" y="4823124"/>
+              <a:ext cx="1684823" cy="1688696"/>
             </a:xfrm>
             <a:prstGeom prst="rect">
               <a:avLst/>
@@ -4101,8 +4139,8 @@
           </p:blipFill>
           <p:spPr>
             <a:xfrm>
-              <a:off x="2804387" y="1346262"/>
-              <a:ext cx="1590539" cy="1578752"/>
+              <a:off x="2557134" y="2086702"/>
+              <a:ext cx="1701303" cy="1688695"/>
             </a:xfrm>
             <a:prstGeom prst="rect">
               <a:avLst/>
@@ -4125,8 +4163,8 @@
               </p:nvSpPr>
               <p:spPr>
                 <a:xfrm>
-                  <a:off x="3723293" y="2495706"/>
-                  <a:ext cx="710192" cy="369332"/>
+                  <a:off x="3546777" y="3306839"/>
+                  <a:ext cx="676524" cy="575088"/>
                 </a:xfrm>
                 <a:prstGeom prst="rect">
                   <a:avLst/>
@@ -4149,7 +4187,7 @@
                         <m:sSub>
                           <m:sSubPr>
                             <m:ctrlPr>
-                              <a:rPr lang="en-US" altLang="zh-TW" i="1">
+                              <a:rPr lang="en-US" altLang="zh-TW" sz="690" i="1">
                                 <a:solidFill>
                                   <a:schemeClr val="bg1"/>
                                 </a:solidFill>
@@ -4159,7 +4197,7 @@
                           </m:sSubPr>
                           <m:e>
                             <m:r>
-                              <a:rPr lang="en-US" altLang="zh-TW" i="1">
+                              <a:rPr lang="en-US" altLang="zh-TW" sz="690" i="1">
                                 <a:solidFill>
                                   <a:schemeClr val="bg1"/>
                                 </a:solidFill>
@@ -4168,7 +4206,7 @@
                               <m:t>0.1</m:t>
                             </m:r>
                             <m:r>
-                              <a:rPr lang="en-US" altLang="zh-TW" i="1">
+                              <a:rPr lang="en-US" altLang="zh-TW" sz="690" i="1">
                                 <a:solidFill>
                                   <a:schemeClr val="bg1"/>
                                 </a:solidFill>
@@ -4179,7 +4217,7 @@
                           </m:e>
                           <m:sub>
                             <m:r>
-                              <a:rPr lang="en-US" altLang="zh-TW" i="1">
+                              <a:rPr lang="en-US" altLang="zh-TW" sz="690" i="1">
                                 <a:solidFill>
                                   <a:schemeClr val="bg1"/>
                                 </a:solidFill>
@@ -4192,7 +4230,10 @@
                       </m:oMath>
                     </m:oMathPara>
                   </a14:m>
-                  <a:endParaRPr lang="en-US" altLang="zh-TW" dirty="0"/>
+                  <a:endParaRPr lang="en-US" altLang="zh-TW" sz="690" dirty="0">
+                    <a:latin typeface="Times New Roman" panose="02020603050405020304" pitchFamily="18" charset="0"/>
+                    <a:cs typeface="Times New Roman" panose="02020603050405020304" pitchFamily="18" charset="0"/>
+                  </a:endParaRPr>
                 </a:p>
               </p:txBody>
             </p:sp>
@@ -4214,8 +4255,8 @@
               </p:nvSpPr>
               <p:spPr>
                 <a:xfrm>
-                  <a:off x="3723293" y="2495706"/>
-                  <a:ext cx="710192" cy="369332"/>
+                  <a:off x="3546777" y="3306839"/>
+                  <a:ext cx="676524" cy="575088"/>
                 </a:xfrm>
                 <a:prstGeom prst="rect">
                   <a:avLst/>
@@ -4223,7 +4264,7 @@
                 <a:blipFill>
                   <a:blip r:embed="rId10"/>
                   <a:stretch>
-                    <a:fillRect b="-9836"/>
+                    <a:fillRect r="-34211"/>
                   </a:stretch>
                 </a:blipFill>
               </p:spPr>
@@ -4256,10 +4297,10 @@
           </p:nvGrpSpPr>
           <p:grpSpPr>
             <a:xfrm>
-              <a:off x="3470104" y="1665898"/>
-              <a:ext cx="609101" cy="642390"/>
-              <a:chOff x="6583398" y="1501875"/>
-              <a:chExt cx="1650677" cy="1740889"/>
+              <a:off x="3286540" y="2506845"/>
+              <a:ext cx="580224" cy="835202"/>
+              <a:chOff x="6529203" y="1366387"/>
+              <a:chExt cx="1650677" cy="2376065"/>
             </a:xfrm>
           </p:grpSpPr>
           <p:grpSp>
@@ -4335,10 +4376,12 @@
                 <a:lstStyle/>
                 <a:p>
                   <a:pPr algn="ctr"/>
-                  <a:endParaRPr lang="zh-TW" altLang="en-US" sz="1143">
+                  <a:endParaRPr lang="zh-TW" altLang="en-US" sz="690">
                     <a:solidFill>
                       <a:schemeClr val="bg1"/>
                     </a:solidFill>
+                    <a:latin typeface="Times New Roman" panose="02020603050405020304" pitchFamily="18" charset="0"/>
+                    <a:cs typeface="Times New Roman" panose="02020603050405020304" pitchFamily="18" charset="0"/>
                   </a:endParaRPr>
                 </a:p>
               </p:txBody>
@@ -4396,17 +4439,19 @@
                 <a:lstStyle/>
                 <a:p>
                   <a:pPr algn="ctr"/>
-                  <a:endParaRPr lang="zh-TW" altLang="en-US" sz="1143" dirty="0">
+                  <a:endParaRPr lang="zh-TW" altLang="en-US" sz="690" dirty="0">
                     <a:solidFill>
                       <a:schemeClr val="bg1"/>
                     </a:solidFill>
+                    <a:latin typeface="Times New Roman" panose="02020603050405020304" pitchFamily="18" charset="0"/>
+                    <a:cs typeface="Times New Roman" panose="02020603050405020304" pitchFamily="18" charset="0"/>
                   </a:endParaRPr>
                 </a:p>
               </p:txBody>
             </p:sp>
           </p:grpSp>
-          <mc:AlternateContent xmlns:mc="http://schemas.openxmlformats.org/markup-compatibility/2006" xmlns:a14="http://schemas.microsoft.com/office/drawing/2010/main">
-            <mc:Choice Requires="a14">
+          <mc:AlternateContent xmlns:mc="http://schemas.openxmlformats.org/markup-compatibility/2006">
+            <mc:Choice xmlns:a14="http://schemas.microsoft.com/office/drawing/2010/main" Requires="a14">
               <p:sp>
                 <p:nvSpPr>
                   <p:cNvPr id="97" name="文字方塊 96">
@@ -4421,8 +4466,8 @@
                 </p:nvSpPr>
                 <p:spPr>
                   <a:xfrm>
-                    <a:off x="6583398" y="1501875"/>
-                    <a:ext cx="1161960" cy="1060325"/>
+                    <a:off x="6529203" y="1366387"/>
+                    <a:ext cx="1161957" cy="1705298"/>
                   </a:xfrm>
                   <a:prstGeom prst="rect">
                     <a:avLst/>
@@ -4445,14 +4490,14 @@
                           <m:sSub>
                             <m:sSubPr>
                               <m:ctrlPr>
-                                <a:rPr lang="en-US" altLang="zh-TW" i="1">
+                                <a:rPr lang="en-US" altLang="zh-TW" sz="690" i="1">
                                   <a:latin typeface="Cambria Math" panose="02040503050406030204" pitchFamily="18" charset="0"/>
                                 </a:rPr>
                               </m:ctrlPr>
                             </m:sSubPr>
                             <m:e>
                               <m:r>
-                                <a:rPr lang="en-US" altLang="zh-TW" i="1">
+                                <a:rPr lang="en-US" altLang="zh-TW" sz="690" i="1">
                                   <a:latin typeface="Cambria Math" panose="02040503050406030204" pitchFamily="18" charset="0"/>
                                 </a:rPr>
                                 <m:t>𝑄</m:t>
@@ -4460,7 +4505,7 @@
                             </m:e>
                             <m:sub>
                               <m:r>
-                                <a:rPr lang="en-US" altLang="zh-TW" i="1">
+                                <a:rPr lang="en-US" altLang="zh-TW" sz="690" i="1">
                                   <a:latin typeface="Cambria Math" panose="02040503050406030204" pitchFamily="18" charset="0"/>
                                 </a:rPr>
                                 <m:t>𝑦</m:t>
@@ -4470,12 +4515,15 @@
                         </m:oMath>
                       </m:oMathPara>
                     </a14:m>
-                    <a:endParaRPr lang="en-US" altLang="zh-TW" dirty="0"/>
+                    <a:endParaRPr lang="en-US" altLang="zh-TW" sz="690" dirty="0">
+                      <a:latin typeface="Times New Roman" panose="02020603050405020304" pitchFamily="18" charset="0"/>
+                      <a:cs typeface="Times New Roman" panose="02020603050405020304" pitchFamily="18" charset="0"/>
+                    </a:endParaRPr>
                   </a:p>
                 </p:txBody>
               </p:sp>
             </mc:Choice>
-            <mc:Fallback xmlns="">
+            <mc:Fallback>
               <p:sp>
                 <p:nvSpPr>
                   <p:cNvPr id="97" name="文字方塊 96">
@@ -4492,16 +4540,16 @@
                 </p:nvSpPr>
                 <p:spPr>
                   <a:xfrm>
-                    <a:off x="6583398" y="1501875"/>
-                    <a:ext cx="1161960" cy="1060325"/>
+                    <a:off x="6529203" y="1366387"/>
+                    <a:ext cx="1161957" cy="1705298"/>
                   </a:xfrm>
                   <a:prstGeom prst="rect">
                     <a:avLst/>
                   </a:prstGeom>
                   <a:blipFill>
-                    <a:blip r:embed="rId20"/>
+                    <a:blip r:embed="rId11"/>
                     <a:stretch>
-                      <a:fillRect l="-2817" b="-6250"/>
+                      <a:fillRect r="-29167"/>
                     </a:stretch>
                   </a:blipFill>
                 </p:spPr>
@@ -4520,8 +4568,8 @@
               </p:sp>
             </mc:Fallback>
           </mc:AlternateContent>
-          <mc:AlternateContent xmlns:mc="http://schemas.openxmlformats.org/markup-compatibility/2006" xmlns:a14="http://schemas.microsoft.com/office/drawing/2010/main">
-            <mc:Choice Requires="a14">
+          <mc:AlternateContent xmlns:mc="http://schemas.openxmlformats.org/markup-compatibility/2006">
+            <mc:Choice xmlns:a14="http://schemas.microsoft.com/office/drawing/2010/main" Requires="a14">
               <p:sp>
                 <p:nvSpPr>
                   <p:cNvPr id="98" name="文字方塊 97">
@@ -4536,8 +4584,8 @@
                 </p:nvSpPr>
                 <p:spPr>
                   <a:xfrm>
-                    <a:off x="7165985" y="2241867"/>
-                    <a:ext cx="1068090" cy="1000897"/>
+                    <a:off x="7111793" y="2106383"/>
+                    <a:ext cx="1068087" cy="1636069"/>
                   </a:xfrm>
                   <a:prstGeom prst="rect">
                     <a:avLst/>
@@ -4560,14 +4608,14 @@
                           <m:sSub>
                             <m:sSubPr>
                               <m:ctrlPr>
-                                <a:rPr lang="en-US" altLang="zh-TW" i="1">
+                                <a:rPr lang="en-US" altLang="zh-TW" sz="690" i="1">
                                   <a:latin typeface="Cambria Math" panose="02040503050406030204" pitchFamily="18" charset="0"/>
                                 </a:rPr>
                               </m:ctrlPr>
                             </m:sSubPr>
                             <m:e>
                               <m:r>
-                                <a:rPr lang="en-US" altLang="zh-TW" i="1">
+                                <a:rPr lang="en-US" altLang="zh-TW" sz="690" i="1">
                                   <a:latin typeface="Cambria Math" panose="02040503050406030204" pitchFamily="18" charset="0"/>
                                 </a:rPr>
                                 <m:t>𝑄</m:t>
@@ -4575,7 +4623,7 @@
                             </m:e>
                             <m:sub>
                               <m:r>
-                                <a:rPr lang="en-US" altLang="zh-TW" i="1">
+                                <a:rPr lang="en-US" altLang="zh-TW" sz="690" i="1">
                                   <a:latin typeface="Cambria Math" panose="02040503050406030204" pitchFamily="18" charset="0"/>
                                 </a:rPr>
                                 <m:t>𝑥</m:t>
@@ -4585,12 +4633,15 @@
                         </m:oMath>
                       </m:oMathPara>
                     </a14:m>
-                    <a:endParaRPr lang="en-US" altLang="zh-TW" dirty="0"/>
+                    <a:endParaRPr lang="en-US" altLang="zh-TW" sz="690" dirty="0">
+                      <a:latin typeface="Times New Roman" panose="02020603050405020304" pitchFamily="18" charset="0"/>
+                      <a:cs typeface="Times New Roman" panose="02020603050405020304" pitchFamily="18" charset="0"/>
+                    </a:endParaRPr>
                   </a:p>
                 </p:txBody>
               </p:sp>
             </mc:Choice>
-            <mc:Fallback xmlns="">
+            <mc:Fallback>
               <p:sp>
                 <p:nvSpPr>
                   <p:cNvPr id="98" name="文字方塊 97">
@@ -4607,16 +4658,16 @@
                 </p:nvSpPr>
                 <p:spPr>
                   <a:xfrm>
-                    <a:off x="7165985" y="2241867"/>
-                    <a:ext cx="1068090" cy="1000897"/>
+                    <a:off x="7111793" y="2106383"/>
+                    <a:ext cx="1068087" cy="1636069"/>
                   </a:xfrm>
                   <a:prstGeom prst="rect">
                     <a:avLst/>
                   </a:prstGeom>
                   <a:blipFill>
-                    <a:blip r:embed="rId21"/>
+                    <a:blip r:embed="rId12"/>
                     <a:stretch>
-                      <a:fillRect l="-3125" b="-9836"/>
+                      <a:fillRect r="-38095"/>
                     </a:stretch>
                   </a:blipFill>
                 </p:spPr>
@@ -4651,7 +4702,7 @@
             <p:nvPr/>
           </p:nvPicPr>
           <p:blipFill>
-            <a:blip r:embed="rId22">
+            <a:blip r:embed="rId13">
               <a:clrChange>
                 <a:clrFrom>
                   <a:srgbClr val="FFFFFF"/>
@@ -4669,8 +4720,8 @@
           </p:blipFill>
           <p:spPr>
             <a:xfrm>
-              <a:off x="2322512" y="52407"/>
-              <a:ext cx="2554288" cy="589786"/>
+              <a:off x="2212405" y="828787"/>
+              <a:ext cx="2433192" cy="561825"/>
             </a:xfrm>
             <a:prstGeom prst="rect">
               <a:avLst/>
@@ -4693,8 +4744,8 @@
               </p:nvSpPr>
               <p:spPr>
                 <a:xfrm>
-                  <a:off x="4342695" y="2628538"/>
-                  <a:ext cx="538983" cy="353943"/>
+                  <a:off x="4208252" y="3452424"/>
+                  <a:ext cx="513430" cy="575088"/>
                 </a:xfrm>
                 <a:prstGeom prst="rect">
                   <a:avLst/>
@@ -4718,7 +4769,7 @@
                           <m:rPr>
                             <m:sty m:val="p"/>
                           </m:rPr>
-                          <a:rPr lang="en-US" altLang="zh-TW" sz="1700">
+                          <a:rPr lang="en-US" altLang="zh-TW" sz="690">
                             <a:solidFill>
                               <a:schemeClr val="bg1"/>
                             </a:solidFill>
@@ -4727,7 +4778,7 @@
                           <m:t>a</m:t>
                         </m:r>
                         <m:r>
-                          <a:rPr lang="en-US" altLang="zh-TW" sz="1700">
+                          <a:rPr lang="en-US" altLang="zh-TW" sz="690">
                             <a:solidFill>
                               <a:schemeClr val="bg1"/>
                             </a:solidFill>
@@ -4739,7 +4790,7 @@
                           <m:rPr>
                             <m:sty m:val="p"/>
                           </m:rPr>
-                          <a:rPr lang="en-US" altLang="zh-TW" sz="1700">
+                          <a:rPr lang="en-US" altLang="zh-TW" sz="690">
                             <a:solidFill>
                               <a:schemeClr val="bg1"/>
                             </a:solidFill>
@@ -4748,7 +4799,7 @@
                           <m:t>u</m:t>
                         </m:r>
                         <m:r>
-                          <a:rPr lang="en-US" altLang="zh-TW" sz="1700">
+                          <a:rPr lang="en-US" altLang="zh-TW" sz="690">
                             <a:solidFill>
                               <a:schemeClr val="bg1"/>
                             </a:solidFill>
@@ -4759,10 +4810,12 @@
                       </m:oMath>
                     </m:oMathPara>
                   </a14:m>
-                  <a:endParaRPr lang="zh-TW" altLang="en-US" sz="1700" dirty="0">
+                  <a:endParaRPr lang="zh-TW" altLang="en-US" sz="690" dirty="0">
                     <a:solidFill>
                       <a:schemeClr val="bg1"/>
                     </a:solidFill>
+                    <a:latin typeface="Times New Roman" panose="02020603050405020304" pitchFamily="18" charset="0"/>
+                    <a:cs typeface="Times New Roman" panose="02020603050405020304" pitchFamily="18" charset="0"/>
                   </a:endParaRPr>
                 </a:p>
               </p:txBody>
@@ -4785,16 +4838,16 @@
               </p:nvSpPr>
               <p:spPr>
                 <a:xfrm>
-                  <a:off x="4342695" y="2628538"/>
-                  <a:ext cx="538983" cy="353943"/>
+                  <a:off x="4208252" y="3452424"/>
+                  <a:ext cx="513430" cy="575088"/>
                 </a:xfrm>
                 <a:prstGeom prst="rect">
                   <a:avLst/>
                 </a:prstGeom>
                 <a:blipFill>
-                  <a:blip r:embed="rId23"/>
+                  <a:blip r:embed="rId14"/>
                   <a:stretch>
-                    <a:fillRect/>
+                    <a:fillRect r="-34483"/>
                   </a:stretch>
                 </a:blipFill>
               </p:spPr>
@@ -4827,8 +4880,8 @@
           </p:nvGrpSpPr>
           <p:grpSpPr>
             <a:xfrm>
-              <a:off x="2163415" y="3321513"/>
-              <a:ext cx="2919455" cy="3036650"/>
+              <a:off x="2060850" y="4131594"/>
+              <a:ext cx="2781047" cy="2892685"/>
               <a:chOff x="3213282" y="4585869"/>
               <a:chExt cx="2919455" cy="3036650"/>
             </a:xfrm>
@@ -4926,7 +4979,10 @@
                 <a:lstStyle/>
                 <a:p>
                   <a:pPr algn="ctr"/>
-                  <a:endParaRPr lang="en-US" dirty="0"/>
+                  <a:endParaRPr lang="en-US" sz="690" dirty="0">
+                    <a:latin typeface="Times New Roman" panose="02020603050405020304" pitchFamily="18" charset="0"/>
+                    <a:cs typeface="Times New Roman" panose="02020603050405020304" pitchFamily="18" charset="0"/>
+                  </a:endParaRPr>
                 </a:p>
               </p:txBody>
             </p:sp>
@@ -5004,7 +5060,10 @@
                 <a:lstStyle/>
                 <a:p>
                   <a:pPr algn="ctr"/>
-                  <a:endParaRPr lang="en-US" dirty="0"/>
+                  <a:endParaRPr lang="en-US" sz="690" dirty="0">
+                    <a:latin typeface="Times New Roman" panose="02020603050405020304" pitchFamily="18" charset="0"/>
+                    <a:cs typeface="Times New Roman" panose="02020603050405020304" pitchFamily="18" charset="0"/>
+                  </a:endParaRPr>
                 </a:p>
               </p:txBody>
             </p:sp>
@@ -5081,7 +5140,10 @@
                 <a:lstStyle/>
                 <a:p>
                   <a:pPr algn="ctr"/>
-                  <a:endParaRPr lang="en-US" dirty="0"/>
+                  <a:endParaRPr lang="en-US" sz="690" dirty="0">
+                    <a:latin typeface="Times New Roman" panose="02020603050405020304" pitchFamily="18" charset="0"/>
+                    <a:cs typeface="Times New Roman" panose="02020603050405020304" pitchFamily="18" charset="0"/>
+                  </a:endParaRPr>
                 </a:p>
               </p:txBody>
             </p:sp>
@@ -5152,7 +5214,10 @@
                 <a:lstStyle/>
                 <a:p>
                   <a:pPr algn="ctr"/>
-                  <a:endParaRPr lang="en-US" dirty="0"/>
+                  <a:endParaRPr lang="en-US" sz="690" dirty="0">
+                    <a:latin typeface="Times New Roman" panose="02020603050405020304" pitchFamily="18" charset="0"/>
+                    <a:cs typeface="Times New Roman" panose="02020603050405020304" pitchFamily="18" charset="0"/>
+                  </a:endParaRPr>
                 </a:p>
               </p:txBody>
             </p:sp>
@@ -5207,7 +5272,10 @@
                 <a:lstStyle/>
                 <a:p>
                   <a:pPr algn="ctr"/>
-                  <a:endParaRPr lang="en-US"/>
+                  <a:endParaRPr lang="en-US" sz="690">
+                    <a:latin typeface="Times New Roman" panose="02020603050405020304" pitchFamily="18" charset="0"/>
+                    <a:cs typeface="Times New Roman" panose="02020603050405020304" pitchFamily="18" charset="0"/>
+                  </a:endParaRPr>
                 </a:p>
               </p:txBody>
             </p:sp>
@@ -5262,12 +5330,15 @@
                 <a:lstStyle/>
                 <a:p>
                   <a:pPr algn="ctr"/>
-                  <a:endParaRPr lang="en-US" dirty="0"/>
+                  <a:endParaRPr lang="en-US" sz="690" dirty="0">
+                    <a:latin typeface="Times New Roman" panose="02020603050405020304" pitchFamily="18" charset="0"/>
+                    <a:cs typeface="Times New Roman" panose="02020603050405020304" pitchFamily="18" charset="0"/>
+                  </a:endParaRPr>
                 </a:p>
               </p:txBody>
             </p:sp>
-            <mc:AlternateContent xmlns:mc="http://schemas.openxmlformats.org/markup-compatibility/2006" xmlns:a14="http://schemas.microsoft.com/office/drawing/2010/main">
-              <mc:Choice Requires="a14">
+            <mc:AlternateContent xmlns:mc="http://schemas.openxmlformats.org/markup-compatibility/2006">
+              <mc:Choice xmlns:a14="http://schemas.microsoft.com/office/drawing/2010/main" Requires="a14">
                 <p:sp>
                   <p:nvSpPr>
                     <p:cNvPr id="82" name="TextBox 11">
@@ -5282,8 +5353,8 @@
                   </p:nvSpPr>
                   <p:spPr>
                     <a:xfrm>
-                      <a:off x="4440286" y="3358991"/>
-                      <a:ext cx="321505" cy="523220"/>
+                      <a:off x="4440287" y="3358991"/>
+                      <a:ext cx="321506" cy="603709"/>
                     </a:xfrm>
                     <a:prstGeom prst="rect">
                       <a:avLst/>
@@ -5304,7 +5375,7 @@
                           </m:oMathParaPr>
                           <m:oMath xmlns:m="http://schemas.openxmlformats.org/officeDocument/2006/math">
                             <m:r>
-                              <a:rPr lang="en-US" sz="2800" i="1">
+                              <a:rPr lang="en-US" sz="690" i="1">
                                 <a:latin typeface="Cambria Math" panose="02040503050406030204" pitchFamily="18" charset="0"/>
                               </a:rPr>
                               <m:t>𝑥</m:t>
@@ -5312,18 +5383,21 @@
                           </m:oMath>
                         </m:oMathPara>
                       </a14:m>
-                      <a:endParaRPr lang="en-US" sz="2800" dirty="0"/>
+                      <a:endParaRPr lang="en-US" sz="690" dirty="0">
+                        <a:latin typeface="Times New Roman" panose="02020603050405020304" pitchFamily="18" charset="0"/>
+                        <a:cs typeface="Times New Roman" panose="02020603050405020304" pitchFamily="18" charset="0"/>
+                      </a:endParaRPr>
                     </a:p>
                   </p:txBody>
                 </p:sp>
               </mc:Choice>
-              <mc:Fallback xmlns="">
+              <mc:Fallback>
                 <p:sp>
                   <p:nvSpPr>
-                    <p:cNvPr id="13" name="TextBox 11">
+                    <p:cNvPr id="82" name="TextBox 11">
                       <a:extLst>
                         <a:ext uri="{FF2B5EF4-FFF2-40B4-BE49-F238E27FC236}">
-                          <a16:creationId xmlns:a16="http://schemas.microsoft.com/office/drawing/2014/main" id="{B7A5A3D7-6CE8-4726-9BEB-8C30B332BFDE}"/>
+                          <a16:creationId xmlns:a16="http://schemas.microsoft.com/office/drawing/2014/main" id="{CF23301A-BE1D-4CBC-A75A-592918295E89}"/>
                         </a:ext>
                       </a:extLst>
                     </p:cNvPr>
@@ -5334,16 +5408,16 @@
                   </p:nvSpPr>
                   <p:spPr>
                     <a:xfrm>
-                      <a:off x="4440286" y="3358991"/>
-                      <a:ext cx="321505" cy="523220"/>
+                      <a:off x="4440287" y="3358991"/>
+                      <a:ext cx="321506" cy="603709"/>
                     </a:xfrm>
                     <a:prstGeom prst="rect">
                       <a:avLst/>
                     </a:prstGeom>
                     <a:blipFill>
-                      <a:blip r:embed="rId24"/>
+                      <a:blip r:embed="rId15"/>
                       <a:stretch>
-                        <a:fillRect/>
+                        <a:fillRect r="-11765"/>
                       </a:stretch>
                     </a:blipFill>
                   </p:spPr>
@@ -5439,12 +5513,15 @@
                 <a:lstStyle/>
                 <a:p>
                   <a:pPr algn="ctr"/>
-                  <a:endParaRPr lang="en-US" dirty="0"/>
+                  <a:endParaRPr lang="en-US" sz="690" dirty="0">
+                    <a:latin typeface="Times New Roman" panose="02020603050405020304" pitchFamily="18" charset="0"/>
+                    <a:cs typeface="Times New Roman" panose="02020603050405020304" pitchFamily="18" charset="0"/>
+                  </a:endParaRPr>
                 </a:p>
               </p:txBody>
             </p:sp>
-            <mc:AlternateContent xmlns:mc="http://schemas.openxmlformats.org/markup-compatibility/2006" xmlns:a14="http://schemas.microsoft.com/office/drawing/2010/main">
-              <mc:Choice Requires="a14">
+            <mc:AlternateContent xmlns:mc="http://schemas.openxmlformats.org/markup-compatibility/2006">
+              <mc:Choice xmlns:a14="http://schemas.microsoft.com/office/drawing/2010/main" Requires="a14">
                 <p:sp>
                   <p:nvSpPr>
                     <p:cNvPr id="84" name="TextBox 12">
@@ -5459,8 +5536,8 @@
                   </p:nvSpPr>
                   <p:spPr>
                     <a:xfrm>
-                      <a:off x="5682303" y="3497725"/>
-                      <a:ext cx="321505" cy="523220"/>
+                      <a:off x="5682302" y="3497726"/>
+                      <a:ext cx="321506" cy="603709"/>
                     </a:xfrm>
                     <a:prstGeom prst="rect">
                       <a:avLst/>
@@ -5481,7 +5558,7 @@
                           </m:oMathParaPr>
                           <m:oMath xmlns:m="http://schemas.openxmlformats.org/officeDocument/2006/math">
                             <m:r>
-                              <a:rPr lang="en-US" sz="2800" i="1">
+                              <a:rPr lang="en-US" sz="690" i="1">
                                 <a:latin typeface="Cambria Math" panose="02040503050406030204" pitchFamily="18" charset="0"/>
                               </a:rPr>
                               <m:t>𝑦</m:t>
@@ -5489,18 +5566,21 @@
                           </m:oMath>
                         </m:oMathPara>
                       </a14:m>
-                      <a:endParaRPr lang="en-US" sz="2800" dirty="0"/>
+                      <a:endParaRPr lang="en-US" sz="690" dirty="0">
+                        <a:latin typeface="Times New Roman" panose="02020603050405020304" pitchFamily="18" charset="0"/>
+                        <a:cs typeface="Times New Roman" panose="02020603050405020304" pitchFamily="18" charset="0"/>
+                      </a:endParaRPr>
                     </a:p>
                   </p:txBody>
                 </p:sp>
               </mc:Choice>
-              <mc:Fallback xmlns="">
+              <mc:Fallback>
                 <p:sp>
                   <p:nvSpPr>
-                    <p:cNvPr id="15" name="TextBox 12">
+                    <p:cNvPr id="84" name="TextBox 12">
                       <a:extLst>
                         <a:ext uri="{FF2B5EF4-FFF2-40B4-BE49-F238E27FC236}">
-                          <a16:creationId xmlns:a16="http://schemas.microsoft.com/office/drawing/2014/main" id="{C30F96C9-2DED-45AF-B673-D98C394280FB}"/>
+                          <a16:creationId xmlns:a16="http://schemas.microsoft.com/office/drawing/2014/main" id="{2BCF2717-7AC2-4DE7-89D1-C847A18AE962}"/>
                         </a:ext>
                       </a:extLst>
                     </p:cNvPr>
@@ -5511,16 +5591,16 @@
                   </p:nvSpPr>
                   <p:spPr>
                     <a:xfrm>
-                      <a:off x="5682303" y="3497725"/>
-                      <a:ext cx="321505" cy="523220"/>
+                      <a:off x="5682302" y="3497726"/>
+                      <a:ext cx="321506" cy="603709"/>
                     </a:xfrm>
                     <a:prstGeom prst="rect">
                       <a:avLst/>
                     </a:prstGeom>
                     <a:blipFill>
-                      <a:blip r:embed="rId25"/>
+                      <a:blip r:embed="rId16"/>
                       <a:stretch>
-                        <a:fillRect/>
+                        <a:fillRect r="-29412"/>
                       </a:stretch>
                     </a:blipFill>
                   </p:spPr>
@@ -5539,8 +5619,8 @@
                 </p:sp>
               </mc:Fallback>
             </mc:AlternateContent>
-            <mc:AlternateContent xmlns:mc="http://schemas.openxmlformats.org/markup-compatibility/2006" xmlns:a14="http://schemas.microsoft.com/office/drawing/2010/main">
-              <mc:Choice Requires="a14">
+            <mc:AlternateContent xmlns:mc="http://schemas.openxmlformats.org/markup-compatibility/2006">
+              <mc:Choice xmlns:a14="http://schemas.microsoft.com/office/drawing/2010/main" Requires="a14">
                 <p:sp>
                   <p:nvSpPr>
                     <p:cNvPr id="85" name="TextBox 13">
@@ -5555,8 +5635,8 @@
                   </p:nvSpPr>
                   <p:spPr>
                     <a:xfrm>
-                      <a:off x="5200614" y="2429547"/>
-                      <a:ext cx="321505" cy="523220"/>
+                      <a:off x="5200614" y="2429548"/>
+                      <a:ext cx="321506" cy="603709"/>
                     </a:xfrm>
                     <a:prstGeom prst="rect">
                       <a:avLst/>
@@ -5577,7 +5657,7 @@
                           </m:oMathParaPr>
                           <m:oMath xmlns:m="http://schemas.openxmlformats.org/officeDocument/2006/math">
                             <m:r>
-                              <a:rPr lang="en-US" sz="2800" i="1">
+                              <a:rPr lang="en-US" sz="690" i="1">
                                 <a:latin typeface="Cambria Math" panose="02040503050406030204" pitchFamily="18" charset="0"/>
                               </a:rPr>
                               <m:t>𝑧</m:t>
@@ -5585,18 +5665,21 @@
                           </m:oMath>
                         </m:oMathPara>
                       </a14:m>
-                      <a:endParaRPr lang="en-US" sz="2800" dirty="0"/>
+                      <a:endParaRPr lang="en-US" sz="690" dirty="0">
+                        <a:latin typeface="Times New Roman" panose="02020603050405020304" pitchFamily="18" charset="0"/>
+                        <a:cs typeface="Times New Roman" panose="02020603050405020304" pitchFamily="18" charset="0"/>
+                      </a:endParaRPr>
                     </a:p>
                   </p:txBody>
                 </p:sp>
               </mc:Choice>
-              <mc:Fallback xmlns="">
+              <mc:Fallback>
                 <p:sp>
                   <p:nvSpPr>
-                    <p:cNvPr id="16" name="TextBox 13">
+                    <p:cNvPr id="85" name="TextBox 13">
                       <a:extLst>
                         <a:ext uri="{FF2B5EF4-FFF2-40B4-BE49-F238E27FC236}">
-                          <a16:creationId xmlns:a16="http://schemas.microsoft.com/office/drawing/2014/main" id="{34AEE752-FCEC-49A9-B464-EE05AB88A4CD}"/>
+                          <a16:creationId xmlns:a16="http://schemas.microsoft.com/office/drawing/2014/main" id="{49FBF736-5528-4DB8-8E7A-0345E5CB5AD1}"/>
                         </a:ext>
                       </a:extLst>
                     </p:cNvPr>
@@ -5607,16 +5690,16 @@
                   </p:nvSpPr>
                   <p:spPr>
                     <a:xfrm>
-                      <a:off x="5200614" y="2429547"/>
-                      <a:ext cx="321505" cy="523220"/>
+                      <a:off x="5200614" y="2429548"/>
+                      <a:ext cx="321506" cy="603709"/>
                     </a:xfrm>
                     <a:prstGeom prst="rect">
                       <a:avLst/>
                     </a:prstGeom>
                     <a:blipFill>
-                      <a:blip r:embed="rId26"/>
+                      <a:blip r:embed="rId17"/>
                       <a:stretch>
-                        <a:fillRect/>
+                        <a:fillRect r="-11765"/>
                       </a:stretch>
                     </a:blipFill>
                   </p:spPr>
@@ -5685,7 +5768,10 @@
                 <a:lstStyle/>
                 <a:p>
                   <a:pPr algn="ctr"/>
-                  <a:endParaRPr lang="en-US" dirty="0"/>
+                  <a:endParaRPr lang="en-US" sz="690" dirty="0">
+                    <a:latin typeface="Times New Roman" panose="02020603050405020304" pitchFamily="18" charset="0"/>
+                    <a:cs typeface="Times New Roman" panose="02020603050405020304" pitchFamily="18" charset="0"/>
+                  </a:endParaRPr>
                 </a:p>
               </p:txBody>
             </p:sp>
@@ -5766,7 +5852,10 @@
                 <a:lstStyle/>
                 <a:p>
                   <a:pPr algn="ctr"/>
-                  <a:endParaRPr lang="en-US" dirty="0"/>
+                  <a:endParaRPr lang="en-US" sz="690" dirty="0">
+                    <a:latin typeface="Times New Roman" panose="02020603050405020304" pitchFamily="18" charset="0"/>
+                    <a:cs typeface="Times New Roman" panose="02020603050405020304" pitchFamily="18" charset="0"/>
+                  </a:endParaRPr>
                 </a:p>
               </p:txBody>
             </p:sp>
@@ -5979,7 +6068,10 @@
                 <a:lstStyle/>
                 <a:p>
                   <a:pPr algn="ctr"/>
-                  <a:endParaRPr lang="en-US"/>
+                  <a:endParaRPr lang="en-US" sz="690">
+                    <a:latin typeface="Times New Roman" panose="02020603050405020304" pitchFamily="18" charset="0"/>
+                    <a:cs typeface="Times New Roman" panose="02020603050405020304" pitchFamily="18" charset="0"/>
+                  </a:endParaRPr>
                 </a:p>
               </p:txBody>
             </p:sp>
@@ -6060,7 +6152,10 @@
                 <a:lstStyle/>
                 <a:p>
                   <a:pPr algn="ctr"/>
-                  <a:endParaRPr lang="en-US" dirty="0"/>
+                  <a:endParaRPr lang="en-US" sz="690" dirty="0">
+                    <a:latin typeface="Times New Roman" panose="02020603050405020304" pitchFamily="18" charset="0"/>
+                    <a:cs typeface="Times New Roman" panose="02020603050405020304" pitchFamily="18" charset="0"/>
+                  </a:endParaRPr>
                 </a:p>
               </p:txBody>
             </p:sp>
@@ -6137,16 +6232,18 @@
               <a:lstStyle/>
               <a:p>
                 <a:pPr algn="ctr"/>
-                <a:endParaRPr lang="en-US" dirty="0">
+                <a:endParaRPr lang="en-US" sz="690" dirty="0">
                   <a:solidFill>
                     <a:schemeClr val="tx1"/>
                   </a:solidFill>
+                  <a:latin typeface="Times New Roman" panose="02020603050405020304" pitchFamily="18" charset="0"/>
+                  <a:cs typeface="Times New Roman" panose="02020603050405020304" pitchFamily="18" charset="0"/>
                 </a:endParaRPr>
               </a:p>
             </p:txBody>
           </p:sp>
-          <mc:AlternateContent xmlns:mc="http://schemas.openxmlformats.org/markup-compatibility/2006" xmlns:a14="http://schemas.microsoft.com/office/drawing/2010/main">
-            <mc:Choice Requires="a14">
+          <mc:AlternateContent xmlns:mc="http://schemas.openxmlformats.org/markup-compatibility/2006">
+            <mc:Choice xmlns:a14="http://schemas.microsoft.com/office/drawing/2010/main" Requires="a14">
               <p:sp>
                 <p:nvSpPr>
                   <p:cNvPr id="71" name="TextBox 10">
@@ -6161,8 +6258,8 @@
                 </p:nvSpPr>
                 <p:spPr>
                   <a:xfrm>
-                    <a:off x="3994940" y="6032289"/>
-                    <a:ext cx="321504" cy="523220"/>
+                    <a:off x="3994939" y="6032288"/>
+                    <a:ext cx="321503" cy="603709"/>
                   </a:xfrm>
                   <a:prstGeom prst="rect">
                     <a:avLst/>
@@ -6183,7 +6280,7 @@
                         </m:oMathParaPr>
                         <m:oMath xmlns:m="http://schemas.openxmlformats.org/officeDocument/2006/math">
                           <m:r>
-                            <a:rPr lang="en-US" sz="2800" i="1">
+                            <a:rPr lang="en-US" sz="690" i="1">
                               <a:latin typeface="Cambria Math" panose="02040503050406030204" pitchFamily="18" charset="0"/>
                             </a:rPr>
                             <m:t>𝛼</m:t>
@@ -6191,12 +6288,15 @@
                         </m:oMath>
                       </m:oMathPara>
                     </a14:m>
-                    <a:endParaRPr lang="en-US" sz="2800" dirty="0"/>
+                    <a:endParaRPr lang="en-US" sz="690" dirty="0">
+                      <a:latin typeface="Times New Roman" panose="02020603050405020304" pitchFamily="18" charset="0"/>
+                      <a:cs typeface="Times New Roman" panose="02020603050405020304" pitchFamily="18" charset="0"/>
+                    </a:endParaRPr>
                   </a:p>
                 </p:txBody>
               </p:sp>
             </mc:Choice>
-            <mc:Fallback xmlns="">
+            <mc:Fallback>
               <p:sp>
                 <p:nvSpPr>
                   <p:cNvPr id="71" name="TextBox 10">
@@ -6213,16 +6313,16 @@
                 </p:nvSpPr>
                 <p:spPr>
                   <a:xfrm>
-                    <a:off x="3994940" y="6032289"/>
-                    <a:ext cx="321504" cy="523220"/>
+                    <a:off x="3994939" y="6032288"/>
+                    <a:ext cx="321503" cy="603709"/>
                   </a:xfrm>
                   <a:prstGeom prst="rect">
                     <a:avLst/>
                   </a:prstGeom>
                   <a:blipFill>
-                    <a:blip r:embed="rId27"/>
+                    <a:blip r:embed="rId18"/>
                     <a:stretch>
-                      <a:fillRect/>
+                      <a:fillRect r="-16667"/>
                     </a:stretch>
                   </a:blipFill>
                 </p:spPr>
@@ -6357,16 +6457,18 @@
               <a:lstStyle/>
               <a:p>
                 <a:pPr algn="ctr"/>
-                <a:endParaRPr lang="en-US" dirty="0">
+                <a:endParaRPr lang="en-US" sz="690" dirty="0">
                   <a:solidFill>
                     <a:schemeClr val="tx1"/>
                   </a:solidFill>
+                  <a:latin typeface="Times New Roman" panose="02020603050405020304" pitchFamily="18" charset="0"/>
+                  <a:cs typeface="Times New Roman" panose="02020603050405020304" pitchFamily="18" charset="0"/>
                 </a:endParaRPr>
               </a:p>
             </p:txBody>
           </p:sp>
-          <mc:AlternateContent xmlns:mc="http://schemas.openxmlformats.org/markup-compatibility/2006" xmlns:a14="http://schemas.microsoft.com/office/drawing/2010/main">
-            <mc:Choice Requires="a14">
+          <mc:AlternateContent xmlns:mc="http://schemas.openxmlformats.org/markup-compatibility/2006">
+            <mc:Choice xmlns:a14="http://schemas.microsoft.com/office/drawing/2010/main" Requires="a14">
               <p:sp>
                 <p:nvSpPr>
                   <p:cNvPr id="74" name="TextBox 10">
@@ -6381,8 +6483,8 @@
                 </p:nvSpPr>
                 <p:spPr>
                   <a:xfrm>
-                    <a:off x="4721955" y="5460425"/>
-                    <a:ext cx="321504" cy="523220"/>
+                    <a:off x="4721956" y="5460426"/>
+                    <a:ext cx="321503" cy="603709"/>
                   </a:xfrm>
                   <a:prstGeom prst="rect">
                     <a:avLst/>
@@ -6403,7 +6505,7 @@
                         </m:oMathParaPr>
                         <m:oMath xmlns:m="http://schemas.openxmlformats.org/officeDocument/2006/math">
                           <m:r>
-                            <a:rPr lang="en-US" sz="2800" i="1">
+                            <a:rPr lang="en-US" sz="690" i="1">
                               <a:latin typeface="Cambria Math" panose="02040503050406030204" pitchFamily="18" charset="0"/>
                             </a:rPr>
                             <m:t>𝛽</m:t>
@@ -6411,12 +6513,15 @@
                         </m:oMath>
                       </m:oMathPara>
                     </a14:m>
-                    <a:endParaRPr lang="en-US" sz="2800" dirty="0"/>
+                    <a:endParaRPr lang="en-US" sz="690" dirty="0">
+                      <a:latin typeface="Times New Roman" panose="02020603050405020304" pitchFamily="18" charset="0"/>
+                      <a:cs typeface="Times New Roman" panose="02020603050405020304" pitchFamily="18" charset="0"/>
+                    </a:endParaRPr>
                   </a:p>
                 </p:txBody>
               </p:sp>
             </mc:Choice>
-            <mc:Fallback xmlns="">
+            <mc:Fallback>
               <p:sp>
                 <p:nvSpPr>
                   <p:cNvPr id="74" name="TextBox 10">
@@ -6433,16 +6538,16 @@
                 </p:nvSpPr>
                 <p:spPr>
                   <a:xfrm>
-                    <a:off x="4721955" y="5460425"/>
-                    <a:ext cx="321504" cy="523220"/>
+                    <a:off x="4721956" y="5460426"/>
+                    <a:ext cx="321503" cy="603709"/>
                   </a:xfrm>
                   <a:prstGeom prst="rect">
                     <a:avLst/>
                   </a:prstGeom>
                   <a:blipFill>
-                    <a:blip r:embed="rId28"/>
+                    <a:blip r:embed="rId19"/>
                     <a:stretch>
-                      <a:fillRect/>
+                      <a:fillRect r="-33333"/>
                     </a:stretch>
                   </a:blipFill>
                 </p:spPr>
@@ -6511,6 +6616,3124 @@
     <p:extLst>
       <p:ext uri="{BB962C8B-B14F-4D97-AF65-F5344CB8AC3E}">
         <p14:creationId xmlns:p14="http://schemas.microsoft.com/office/powerpoint/2010/main" val="590401298"/>
+      </p:ext>
+    </p:extLst>
+  </p:cSld>
+  <p:clrMapOvr>
+    <a:masterClrMapping/>
+  </p:clrMapOvr>
+</p:sld>
+</file>
+
+<file path=ppt/slides/slide3.xml><?xml version="1.0" encoding="utf-8"?>
+<p:sld xmlns:a="http://schemas.openxmlformats.org/drawingml/2006/main" xmlns:r="http://schemas.openxmlformats.org/officeDocument/2006/relationships" xmlns:p="http://schemas.openxmlformats.org/presentationml/2006/main">
+  <p:cSld>
+    <p:spTree>
+      <p:nvGrpSpPr>
+        <p:cNvPr id="1" name=""/>
+        <p:cNvGrpSpPr/>
+        <p:nvPr/>
+      </p:nvGrpSpPr>
+      <p:grpSpPr>
+        <a:xfrm>
+          <a:off x="0" y="0"/>
+          <a:ext cx="0" cy="0"/>
+          <a:chOff x="0" y="0"/>
+          <a:chExt cx="0" cy="0"/>
+        </a:xfrm>
+      </p:grpSpPr>
+      <p:grpSp>
+        <p:nvGrpSpPr>
+          <p:cNvPr id="7" name="群組 6">
+            <a:extLst>
+              <a:ext uri="{FF2B5EF4-FFF2-40B4-BE49-F238E27FC236}">
+                <a16:creationId xmlns:a16="http://schemas.microsoft.com/office/drawing/2014/main" id="{E7A360FC-F1F7-4B58-94F0-E983BE774A53}"/>
+              </a:ext>
+            </a:extLst>
+          </p:cNvPr>
+          <p:cNvGrpSpPr/>
+          <p:nvPr/>
+        </p:nvGrpSpPr>
+        <p:grpSpPr>
+          <a:xfrm>
+            <a:off x="64286" y="50154"/>
+            <a:ext cx="9777428" cy="3500142"/>
+            <a:chOff x="64286" y="52553"/>
+            <a:chExt cx="9777428" cy="3500142"/>
+          </a:xfrm>
+        </p:grpSpPr>
+        <p:sp>
+          <p:nvSpPr>
+            <p:cNvPr id="103" name="矩形: 圓角 102">
+              <a:extLst>
+                <a:ext uri="{FF2B5EF4-FFF2-40B4-BE49-F238E27FC236}">
+                  <a16:creationId xmlns:a16="http://schemas.microsoft.com/office/drawing/2014/main" id="{E219AC5D-1719-4ED0-835A-16FA49248039}"/>
+                </a:ext>
+              </a:extLst>
+            </p:cNvPr>
+            <p:cNvSpPr/>
+            <p:nvPr/>
+          </p:nvSpPr>
+          <p:spPr>
+            <a:xfrm>
+              <a:off x="64286" y="52553"/>
+              <a:ext cx="9777428" cy="3500142"/>
+            </a:xfrm>
+            <a:prstGeom prst="roundRect">
+              <a:avLst>
+                <a:gd name="adj" fmla="val 7772"/>
+              </a:avLst>
+            </a:prstGeom>
+            <a:gradFill flip="none" rotWithShape="1">
+              <a:gsLst>
+                <a:gs pos="0">
+                  <a:schemeClr val="bg1">
+                    <a:lumMod val="95000"/>
+                  </a:schemeClr>
+                </a:gs>
+                <a:gs pos="100000">
+                  <a:schemeClr val="bg1">
+                    <a:lumMod val="85000"/>
+                  </a:schemeClr>
+                </a:gs>
+              </a:gsLst>
+              <a:lin ang="5400000" scaled="1"/>
+              <a:tileRect/>
+            </a:gradFill>
+          </p:spPr>
+          <p:style>
+            <a:lnRef idx="1">
+              <a:schemeClr val="accent3"/>
+            </a:lnRef>
+            <a:fillRef idx="2">
+              <a:schemeClr val="accent3"/>
+            </a:fillRef>
+            <a:effectRef idx="1">
+              <a:schemeClr val="accent3"/>
+            </a:effectRef>
+            <a:fontRef idx="minor">
+              <a:schemeClr val="dk1"/>
+            </a:fontRef>
+          </p:style>
+          <p:txBody>
+            <a:bodyPr rot="0" spcFirstLastPara="0" vertOverflow="overflow" horzOverflow="overflow" vert="horz" wrap="square" lIns="45651" tIns="22825" rIns="45651" bIns="22825" numCol="1" spcCol="0" rtlCol="0" fromWordArt="0" anchor="ctr" anchorCtr="0" forceAA="0" compatLnSpc="1">
+              <a:prstTxWarp prst="textNoShape">
+                <a:avLst/>
+              </a:prstTxWarp>
+              <a:noAutofit/>
+            </a:bodyPr>
+            <a:lstStyle/>
+            <a:p>
+              <a:pPr algn="ctr"/>
+              <a:endParaRPr lang="zh-TW" altLang="en-US" sz="899" dirty="0"/>
+            </a:p>
+          </p:txBody>
+        </p:sp>
+        <p:sp>
+          <p:nvSpPr>
+            <p:cNvPr id="116" name="Oval 4">
+              <a:extLst>
+                <a:ext uri="{FF2B5EF4-FFF2-40B4-BE49-F238E27FC236}">
+                  <a16:creationId xmlns:a16="http://schemas.microsoft.com/office/drawing/2014/main" id="{99D913F1-E0EF-46E8-A35D-B978489366CE}"/>
+                </a:ext>
+              </a:extLst>
+            </p:cNvPr>
+            <p:cNvSpPr/>
+            <p:nvPr/>
+          </p:nvSpPr>
+          <p:spPr>
+            <a:xfrm>
+              <a:off x="155134" y="1432871"/>
+              <a:ext cx="1443999" cy="1495797"/>
+            </a:xfrm>
+            <a:prstGeom prst="ellipse">
+              <a:avLst/>
+            </a:prstGeom>
+            <a:gradFill flip="none" rotWithShape="1">
+              <a:gsLst>
+                <a:gs pos="100000">
+                  <a:schemeClr val="accent3">
+                    <a:lumMod val="60000"/>
+                    <a:lumOff val="40000"/>
+                    <a:alpha val="60000"/>
+                  </a:schemeClr>
+                </a:gs>
+                <a:gs pos="55000">
+                  <a:schemeClr val="accent3">
+                    <a:lumMod val="40000"/>
+                    <a:lumOff val="60000"/>
+                    <a:alpha val="60000"/>
+                  </a:schemeClr>
+                </a:gs>
+                <a:gs pos="0">
+                  <a:schemeClr val="bg1">
+                    <a:alpha val="60000"/>
+                  </a:schemeClr>
+                </a:gs>
+              </a:gsLst>
+              <a:path path="circle">
+                <a:fillToRect l="100000" b="100000"/>
+              </a:path>
+              <a:tileRect t="-100000" r="-100000"/>
+            </a:gradFill>
+            <a:ln w="57150">
+              <a:solidFill>
+                <a:srgbClr val="D5D7DA"/>
+              </a:solidFill>
+            </a:ln>
+          </p:spPr>
+          <p:style>
+            <a:lnRef idx="2">
+              <a:schemeClr val="accent1">
+                <a:shade val="50000"/>
+              </a:schemeClr>
+            </a:lnRef>
+            <a:fillRef idx="1">
+              <a:schemeClr val="accent1"/>
+            </a:fillRef>
+            <a:effectRef idx="0">
+              <a:schemeClr val="accent1"/>
+            </a:effectRef>
+            <a:fontRef idx="minor">
+              <a:schemeClr val="lt1"/>
+            </a:fontRef>
+          </p:style>
+          <p:txBody>
+            <a:bodyPr rtlCol="0" anchor="ctr"/>
+            <a:lstStyle/>
+            <a:p>
+              <a:pPr algn="ctr"/>
+              <a:endParaRPr lang="en-US" sz="1600" dirty="0"/>
+            </a:p>
+          </p:txBody>
+        </p:sp>
+        <p:sp>
+          <p:nvSpPr>
+            <p:cNvPr id="46" name="Oval 6">
+              <a:extLst>
+                <a:ext uri="{FF2B5EF4-FFF2-40B4-BE49-F238E27FC236}">
+                  <a16:creationId xmlns:a16="http://schemas.microsoft.com/office/drawing/2014/main" id="{6E546C9C-9F47-4E3C-AFA4-2539DA2722BF}"/>
+                </a:ext>
+              </a:extLst>
+            </p:cNvPr>
+            <p:cNvSpPr/>
+            <p:nvPr/>
+          </p:nvSpPr>
+          <p:spPr>
+            <a:xfrm>
+              <a:off x="155210" y="1433065"/>
+              <a:ext cx="1443600" cy="1497600"/>
+            </a:xfrm>
+            <a:prstGeom prst="ellipse">
+              <a:avLst/>
+            </a:prstGeom>
+            <a:noFill/>
+            <a:ln w="38100">
+              <a:solidFill>
+                <a:srgbClr val="6CAE3F"/>
+              </a:solidFill>
+              <a:prstDash val="solid"/>
+            </a:ln>
+          </p:spPr>
+          <p:style>
+            <a:lnRef idx="2">
+              <a:schemeClr val="accent1">
+                <a:shade val="50000"/>
+              </a:schemeClr>
+            </a:lnRef>
+            <a:fillRef idx="1">
+              <a:schemeClr val="accent1"/>
+            </a:fillRef>
+            <a:effectRef idx="0">
+              <a:schemeClr val="accent1"/>
+            </a:effectRef>
+            <a:fontRef idx="minor">
+              <a:schemeClr val="lt1"/>
+            </a:fontRef>
+          </p:style>
+          <p:txBody>
+            <a:bodyPr rtlCol="0" anchor="ctr"/>
+            <a:lstStyle/>
+            <a:p>
+              <a:pPr algn="ctr"/>
+              <a:endParaRPr lang="en-US" sz="1600" dirty="0"/>
+            </a:p>
+          </p:txBody>
+        </p:sp>
+        <p:sp>
+          <p:nvSpPr>
+            <p:cNvPr id="135" name="文字方塊 134">
+              <a:extLst>
+                <a:ext uri="{FF2B5EF4-FFF2-40B4-BE49-F238E27FC236}">
+                  <a16:creationId xmlns:a16="http://schemas.microsoft.com/office/drawing/2014/main" id="{E70D29FF-92A9-4F55-992C-2250D39FAAA9}"/>
+                </a:ext>
+              </a:extLst>
+            </p:cNvPr>
+            <p:cNvSpPr txBox="1"/>
+            <p:nvPr/>
+          </p:nvSpPr>
+          <p:spPr>
+            <a:xfrm>
+              <a:off x="1729492" y="189942"/>
+              <a:ext cx="5378714" cy="507831"/>
+            </a:xfrm>
+            <a:prstGeom prst="rect">
+              <a:avLst/>
+            </a:prstGeom>
+            <a:noFill/>
+          </p:spPr>
+          <p:txBody>
+            <a:bodyPr wrap="square" rtlCol="0">
+              <a:spAutoFit/>
+            </a:bodyPr>
+            <a:lstStyle/>
+            <a:p>
+              <a:pPr algn="ctr"/>
+              <a:r>
+                <a:rPr lang="en-US" altLang="zh-TW" sz="2700" dirty="0">
+                  <a:latin typeface="Times New Roman" panose="02020603050405020304" pitchFamily="18" charset="0"/>
+                  <a:cs typeface="Times New Roman" panose="02020603050405020304" pitchFamily="18" charset="0"/>
+                </a:rPr>
+                <a:t>Valley-mixed excitons transition rate</a:t>
+              </a:r>
+              <a:endParaRPr lang="zh-TW" altLang="en-US" sz="2700" dirty="0">
+                <a:latin typeface="Times New Roman" panose="02020603050405020304" pitchFamily="18" charset="0"/>
+                <a:cs typeface="Times New Roman" panose="02020603050405020304" pitchFamily="18" charset="0"/>
+              </a:endParaRPr>
+            </a:p>
+          </p:txBody>
+        </p:sp>
+        <p:sp>
+          <p:nvSpPr>
+            <p:cNvPr id="5" name="箭號: 向右 4">
+              <a:extLst>
+                <a:ext uri="{FF2B5EF4-FFF2-40B4-BE49-F238E27FC236}">
+                  <a16:creationId xmlns:a16="http://schemas.microsoft.com/office/drawing/2014/main" id="{AEEADC43-B87A-4694-AABA-86958BDC8DEB}"/>
+                </a:ext>
+              </a:extLst>
+            </p:cNvPr>
+            <p:cNvSpPr/>
+            <p:nvPr/>
+          </p:nvSpPr>
+          <p:spPr>
+            <a:xfrm>
+              <a:off x="2484826" y="2648714"/>
+              <a:ext cx="7283289" cy="627605"/>
+            </a:xfrm>
+            <a:prstGeom prst="rightArrow">
+              <a:avLst/>
+            </a:prstGeom>
+          </p:spPr>
+          <p:style>
+            <a:lnRef idx="0">
+              <a:schemeClr val="accent6"/>
+            </a:lnRef>
+            <a:fillRef idx="3">
+              <a:schemeClr val="accent6"/>
+            </a:fillRef>
+            <a:effectRef idx="3">
+              <a:schemeClr val="accent6"/>
+            </a:effectRef>
+            <a:fontRef idx="minor">
+              <a:schemeClr val="lt1"/>
+            </a:fontRef>
+          </p:style>
+          <p:txBody>
+            <a:bodyPr rot="0" spcFirstLastPara="0" vertOverflow="overflow" horzOverflow="overflow" vert="horz" wrap="square" lIns="71889" tIns="35945" rIns="71889" bIns="35945" numCol="1" spcCol="0" rtlCol="0" fromWordArt="0" anchor="ctr" anchorCtr="0" forceAA="0" compatLnSpc="1">
+              <a:prstTxWarp prst="textNoShape">
+                <a:avLst/>
+              </a:prstTxWarp>
+              <a:noAutofit/>
+            </a:bodyPr>
+            <a:lstStyle/>
+            <a:p>
+              <a:pPr algn="ctr"/>
+              <a:endParaRPr lang="zh-TW" altLang="en-US" sz="2000" dirty="0"/>
+            </a:p>
+          </p:txBody>
+        </p:sp>
+        <mc:AlternateContent xmlns:mc="http://schemas.openxmlformats.org/markup-compatibility/2006">
+          <mc:Choice xmlns:a14="http://schemas.microsoft.com/office/drawing/2010/main" Requires="a14">
+            <p:sp>
+              <p:nvSpPr>
+                <p:cNvPr id="132" name="文字方塊 131">
+                  <a:extLst>
+                    <a:ext uri="{FF2B5EF4-FFF2-40B4-BE49-F238E27FC236}">
+                      <a16:creationId xmlns:a16="http://schemas.microsoft.com/office/drawing/2014/main" id="{059EF753-76E4-4F46-A4B2-3984511FB813}"/>
+                    </a:ext>
+                  </a:extLst>
+                </p:cNvPr>
+                <p:cNvSpPr txBox="1"/>
+                <p:nvPr/>
+              </p:nvSpPr>
+              <p:spPr>
+                <a:xfrm>
+                  <a:off x="2203626" y="978673"/>
+                  <a:ext cx="1206650" cy="400110"/>
+                </a:xfrm>
+                <a:prstGeom prst="rect">
+                  <a:avLst/>
+                </a:prstGeom>
+                <a:noFill/>
+              </p:spPr>
+              <p:txBody>
+                <a:bodyPr wrap="square" rtlCol="0">
+                  <a:spAutoFit/>
+                </a:bodyPr>
+                <a:lstStyle/>
+                <a:p>
+                  <a:pPr algn="ctr"/>
+                  <a14:m>
+                    <m:oMathPara xmlns:m="http://schemas.openxmlformats.org/officeDocument/2006/math">
+                      <m:oMathParaPr>
+                        <m:jc m:val="centerGroup"/>
+                      </m:oMathParaPr>
+                      <m:oMath xmlns:m="http://schemas.openxmlformats.org/officeDocument/2006/math">
+                        <m:r>
+                          <a:rPr lang="en-US" altLang="zh-TW" sz="2000" i="1">
+                            <a:latin typeface="Cambria Math" panose="02040503050406030204" pitchFamily="18" charset="0"/>
+                          </a:rPr>
+                          <m:t>𝛽</m:t>
+                        </m:r>
+                        <m:r>
+                          <a:rPr lang="en-US" altLang="zh-TW" sz="2000" i="1">
+                            <a:latin typeface="Cambria Math" panose="02040503050406030204" pitchFamily="18" charset="0"/>
+                          </a:rPr>
+                          <m:t>=0</m:t>
+                        </m:r>
+                      </m:oMath>
+                    </m:oMathPara>
+                  </a14:m>
+                  <a:endParaRPr lang="zh-TW" altLang="en-US" sz="2000" dirty="0"/>
+                </a:p>
+              </p:txBody>
+            </p:sp>
+          </mc:Choice>
+          <mc:Fallback>
+            <p:sp>
+              <p:nvSpPr>
+                <p:cNvPr id="132" name="文字方塊 131">
+                  <a:extLst>
+                    <a:ext uri="{FF2B5EF4-FFF2-40B4-BE49-F238E27FC236}">
+                      <a16:creationId xmlns:a16="http://schemas.microsoft.com/office/drawing/2014/main" id="{059EF753-76E4-4F46-A4B2-3984511FB813}"/>
+                    </a:ext>
+                  </a:extLst>
+                </p:cNvPr>
+                <p:cNvSpPr txBox="1">
+                  <a:spLocks noRot="1" noChangeAspect="1" noMove="1" noResize="1" noEditPoints="1" noAdjustHandles="1" noChangeArrowheads="1" noChangeShapeType="1" noTextEdit="1"/>
+                </p:cNvSpPr>
+                <p:nvPr/>
+              </p:nvSpPr>
+              <p:spPr>
+                <a:xfrm>
+                  <a:off x="2203626" y="978673"/>
+                  <a:ext cx="1206650" cy="400110"/>
+                </a:xfrm>
+                <a:prstGeom prst="rect">
+                  <a:avLst/>
+                </a:prstGeom>
+                <a:blipFill>
+                  <a:blip r:embed="rId2"/>
+                  <a:stretch>
+                    <a:fillRect b="-13636"/>
+                  </a:stretch>
+                </a:blipFill>
+              </p:spPr>
+              <p:txBody>
+                <a:bodyPr/>
+                <a:lstStyle/>
+                <a:p>
+                  <a:r>
+                    <a:rPr lang="zh-TW" altLang="en-US">
+                      <a:noFill/>
+                    </a:rPr>
+                    <a:t> </a:t>
+                  </a:r>
+                </a:p>
+              </p:txBody>
+            </p:sp>
+          </mc:Fallback>
+        </mc:AlternateContent>
+        <mc:AlternateContent xmlns:mc="http://schemas.openxmlformats.org/markup-compatibility/2006">
+          <mc:Choice xmlns:a14="http://schemas.microsoft.com/office/drawing/2010/main" Requires="a14">
+            <p:sp>
+              <p:nvSpPr>
+                <p:cNvPr id="77" name="文字方塊 76">
+                  <a:extLst>
+                    <a:ext uri="{FF2B5EF4-FFF2-40B4-BE49-F238E27FC236}">
+                      <a16:creationId xmlns:a16="http://schemas.microsoft.com/office/drawing/2014/main" id="{F6089231-4CF6-4B5D-BA6A-147162E12CBA}"/>
+                    </a:ext>
+                  </a:extLst>
+                </p:cNvPr>
+                <p:cNvSpPr txBox="1"/>
+                <p:nvPr/>
+              </p:nvSpPr>
+              <p:spPr>
+                <a:xfrm>
+                  <a:off x="3686831" y="824785"/>
+                  <a:ext cx="1528916" cy="707886"/>
+                </a:xfrm>
+                <a:prstGeom prst="rect">
+                  <a:avLst/>
+                </a:prstGeom>
+                <a:noFill/>
+              </p:spPr>
+              <p:txBody>
+                <a:bodyPr wrap="square" rtlCol="0">
+                  <a:spAutoFit/>
+                </a:bodyPr>
+                <a:lstStyle/>
+                <a:p>
+                  <a:pPr algn="ctr"/>
+                  <a14:m>
+                    <m:oMathPara xmlns:m="http://schemas.openxmlformats.org/officeDocument/2006/math">
+                      <m:oMathParaPr>
+                        <m:jc m:val="centerGroup"/>
+                      </m:oMathParaPr>
+                      <m:oMath xmlns:m="http://schemas.openxmlformats.org/officeDocument/2006/math">
+                        <m:r>
+                          <a:rPr lang="en-US" altLang="zh-TW" sz="2000" i="1">
+                            <a:latin typeface="Cambria Math" panose="02040503050406030204" pitchFamily="18" charset="0"/>
+                          </a:rPr>
+                          <m:t>𝛽</m:t>
+                        </m:r>
+                        <m:r>
+                          <a:rPr lang="en-US" altLang="zh-TW" sz="2000" i="1">
+                            <a:latin typeface="Cambria Math" panose="02040503050406030204" pitchFamily="18" charset="0"/>
+                          </a:rPr>
+                          <m:t>=</m:t>
+                        </m:r>
+                        <m:r>
+                          <a:rPr lang="en-US" altLang="zh-TW" sz="2000" i="1">
+                            <a:latin typeface="Cambria Math" panose="02040503050406030204" pitchFamily="18" charset="0"/>
+                          </a:rPr>
+                          <m:t>𝜋</m:t>
+                        </m:r>
+                        <m:r>
+                          <a:rPr lang="en-US" altLang="zh-TW" sz="2000" i="1">
+                            <a:latin typeface="Cambria Math" panose="02040503050406030204" pitchFamily="18" charset="0"/>
+                          </a:rPr>
+                          <m:t>/2</m:t>
+                        </m:r>
+                      </m:oMath>
+                    </m:oMathPara>
+                  </a14:m>
+                  <a:endParaRPr lang="en-US" altLang="zh-TW" sz="2000" i="1" dirty="0">
+                    <a:latin typeface="Cambria Math" panose="02040503050406030204" pitchFamily="18" charset="0"/>
+                  </a:endParaRPr>
+                </a:p>
+                <a:p>
+                  <a:pPr algn="ctr"/>
+                  <a14:m>
+                    <m:oMathPara xmlns:m="http://schemas.openxmlformats.org/officeDocument/2006/math">
+                      <m:oMathParaPr>
+                        <m:jc m:val="centerGroup"/>
+                      </m:oMathParaPr>
+                      <m:oMath xmlns:m="http://schemas.openxmlformats.org/officeDocument/2006/math">
+                        <m:r>
+                          <a:rPr lang="en-US" altLang="zh-TW" sz="2000" i="1">
+                            <a:latin typeface="Cambria Math" panose="02040503050406030204" pitchFamily="18" charset="0"/>
+                          </a:rPr>
+                          <m:t>𝛼</m:t>
+                        </m:r>
+                        <m:r>
+                          <a:rPr lang="en-US" altLang="zh-TW" sz="2000" i="1">
+                            <a:latin typeface="Cambria Math" panose="02040503050406030204" pitchFamily="18" charset="0"/>
+                          </a:rPr>
+                          <m:t>=0</m:t>
+                        </m:r>
+                      </m:oMath>
+                    </m:oMathPara>
+                  </a14:m>
+                  <a:endParaRPr lang="zh-TW" altLang="en-US" sz="2000" dirty="0"/>
+                </a:p>
+              </p:txBody>
+            </p:sp>
+          </mc:Choice>
+          <mc:Fallback>
+            <p:sp>
+              <p:nvSpPr>
+                <p:cNvPr id="77" name="文字方塊 76">
+                  <a:extLst>
+                    <a:ext uri="{FF2B5EF4-FFF2-40B4-BE49-F238E27FC236}">
+                      <a16:creationId xmlns:a16="http://schemas.microsoft.com/office/drawing/2014/main" id="{F6089231-4CF6-4B5D-BA6A-147162E12CBA}"/>
+                    </a:ext>
+                  </a:extLst>
+                </p:cNvPr>
+                <p:cNvSpPr txBox="1">
+                  <a:spLocks noRot="1" noChangeAspect="1" noMove="1" noResize="1" noEditPoints="1" noAdjustHandles="1" noChangeArrowheads="1" noChangeShapeType="1" noTextEdit="1"/>
+                </p:cNvSpPr>
+                <p:nvPr/>
+              </p:nvSpPr>
+              <p:spPr>
+                <a:xfrm>
+                  <a:off x="3686831" y="824785"/>
+                  <a:ext cx="1528916" cy="707886"/>
+                </a:xfrm>
+                <a:prstGeom prst="rect">
+                  <a:avLst/>
+                </a:prstGeom>
+                <a:blipFill>
+                  <a:blip r:embed="rId3"/>
+                  <a:stretch>
+                    <a:fillRect/>
+                  </a:stretch>
+                </a:blipFill>
+              </p:spPr>
+              <p:txBody>
+                <a:bodyPr/>
+                <a:lstStyle/>
+                <a:p>
+                  <a:r>
+                    <a:rPr lang="zh-TW" altLang="en-US">
+                      <a:noFill/>
+                    </a:rPr>
+                    <a:t> </a:t>
+                  </a:r>
+                </a:p>
+              </p:txBody>
+            </p:sp>
+          </mc:Fallback>
+        </mc:AlternateContent>
+        <mc:AlternateContent xmlns:mc="http://schemas.openxmlformats.org/markup-compatibility/2006">
+          <mc:Choice xmlns:a14="http://schemas.microsoft.com/office/drawing/2010/main" Requires="a14">
+            <p:sp>
+              <p:nvSpPr>
+                <p:cNvPr id="78" name="文字方塊 77">
+                  <a:extLst>
+                    <a:ext uri="{FF2B5EF4-FFF2-40B4-BE49-F238E27FC236}">
+                      <a16:creationId xmlns:a16="http://schemas.microsoft.com/office/drawing/2014/main" id="{4D706AA0-9BC9-4681-ADC6-2C6CB63824D4}"/>
+                    </a:ext>
+                  </a:extLst>
+                </p:cNvPr>
+                <p:cNvSpPr txBox="1"/>
+                <p:nvPr/>
+              </p:nvSpPr>
+              <p:spPr>
+                <a:xfrm>
+                  <a:off x="5429334" y="978673"/>
+                  <a:ext cx="1528916" cy="400110"/>
+                </a:xfrm>
+                <a:prstGeom prst="rect">
+                  <a:avLst/>
+                </a:prstGeom>
+                <a:noFill/>
+              </p:spPr>
+              <p:txBody>
+                <a:bodyPr wrap="square" rtlCol="0">
+                  <a:spAutoFit/>
+                </a:bodyPr>
+                <a:lstStyle/>
+                <a:p>
+                  <a:pPr algn="ctr"/>
+                  <a14:m>
+                    <m:oMathPara xmlns:m="http://schemas.openxmlformats.org/officeDocument/2006/math">
+                      <m:oMathParaPr>
+                        <m:jc m:val="centerGroup"/>
+                      </m:oMathParaPr>
+                      <m:oMath xmlns:m="http://schemas.openxmlformats.org/officeDocument/2006/math">
+                        <m:r>
+                          <a:rPr lang="en-US" altLang="zh-TW" sz="2000" i="1">
+                            <a:latin typeface="Cambria Math" panose="02040503050406030204" pitchFamily="18" charset="0"/>
+                          </a:rPr>
+                          <m:t>𝛽</m:t>
+                        </m:r>
+                        <m:r>
+                          <a:rPr lang="en-US" altLang="zh-TW" sz="2000" i="1">
+                            <a:latin typeface="Cambria Math" panose="02040503050406030204" pitchFamily="18" charset="0"/>
+                          </a:rPr>
+                          <m:t>=</m:t>
+                        </m:r>
+                        <m:r>
+                          <a:rPr lang="en-US" altLang="zh-TW" sz="2000" i="1">
+                            <a:latin typeface="Cambria Math" panose="02040503050406030204" pitchFamily="18" charset="0"/>
+                          </a:rPr>
+                          <m:t>𝜋</m:t>
+                        </m:r>
+                      </m:oMath>
+                    </m:oMathPara>
+                  </a14:m>
+                  <a:endParaRPr lang="zh-TW" altLang="en-US" sz="2000" dirty="0"/>
+                </a:p>
+              </p:txBody>
+            </p:sp>
+          </mc:Choice>
+          <mc:Fallback>
+            <p:sp>
+              <p:nvSpPr>
+                <p:cNvPr id="78" name="文字方塊 77">
+                  <a:extLst>
+                    <a:ext uri="{FF2B5EF4-FFF2-40B4-BE49-F238E27FC236}">
+                      <a16:creationId xmlns:a16="http://schemas.microsoft.com/office/drawing/2014/main" id="{4D706AA0-9BC9-4681-ADC6-2C6CB63824D4}"/>
+                    </a:ext>
+                  </a:extLst>
+                </p:cNvPr>
+                <p:cNvSpPr txBox="1">
+                  <a:spLocks noRot="1" noChangeAspect="1" noMove="1" noResize="1" noEditPoints="1" noAdjustHandles="1" noChangeArrowheads="1" noChangeShapeType="1" noTextEdit="1"/>
+                </p:cNvSpPr>
+                <p:nvPr/>
+              </p:nvSpPr>
+              <p:spPr>
+                <a:xfrm>
+                  <a:off x="5429334" y="978673"/>
+                  <a:ext cx="1528916" cy="400110"/>
+                </a:xfrm>
+                <a:prstGeom prst="rect">
+                  <a:avLst/>
+                </a:prstGeom>
+                <a:blipFill>
+                  <a:blip r:embed="rId4"/>
+                  <a:stretch>
+                    <a:fillRect b="-13636"/>
+                  </a:stretch>
+                </a:blipFill>
+              </p:spPr>
+              <p:txBody>
+                <a:bodyPr/>
+                <a:lstStyle/>
+                <a:p>
+                  <a:r>
+                    <a:rPr lang="zh-TW" altLang="en-US">
+                      <a:noFill/>
+                    </a:rPr>
+                    <a:t> </a:t>
+                  </a:r>
+                </a:p>
+              </p:txBody>
+            </p:sp>
+          </mc:Fallback>
+        </mc:AlternateContent>
+        <mc:AlternateContent xmlns:mc="http://schemas.openxmlformats.org/markup-compatibility/2006">
+          <mc:Choice xmlns:a14="http://schemas.microsoft.com/office/drawing/2010/main" Requires="a14">
+            <p:sp>
+              <p:nvSpPr>
+                <p:cNvPr id="79" name="文字方塊 78">
+                  <a:extLst>
+                    <a:ext uri="{FF2B5EF4-FFF2-40B4-BE49-F238E27FC236}">
+                      <a16:creationId xmlns:a16="http://schemas.microsoft.com/office/drawing/2014/main" id="{4288506E-2488-4EE1-85F4-71FE41A397F2}"/>
+                    </a:ext>
+                  </a:extLst>
+                </p:cNvPr>
+                <p:cNvSpPr txBox="1"/>
+                <p:nvPr/>
+              </p:nvSpPr>
+              <p:spPr>
+                <a:xfrm>
+                  <a:off x="6917995" y="824785"/>
+                  <a:ext cx="1869862" cy="707886"/>
+                </a:xfrm>
+                <a:prstGeom prst="rect">
+                  <a:avLst/>
+                </a:prstGeom>
+                <a:noFill/>
+              </p:spPr>
+              <p:txBody>
+                <a:bodyPr wrap="square" rtlCol="0">
+                  <a:spAutoFit/>
+                </a:bodyPr>
+                <a:lstStyle/>
+                <a:p>
+                  <a:pPr algn="ctr"/>
+                  <a14:m>
+                    <m:oMathPara xmlns:m="http://schemas.openxmlformats.org/officeDocument/2006/math">
+                      <m:oMathParaPr>
+                        <m:jc m:val="centerGroup"/>
+                      </m:oMathParaPr>
+                      <m:oMath xmlns:m="http://schemas.openxmlformats.org/officeDocument/2006/math">
+                        <m:r>
+                          <a:rPr lang="en-US" altLang="zh-TW" sz="2000" i="1">
+                            <a:latin typeface="Cambria Math" panose="02040503050406030204" pitchFamily="18" charset="0"/>
+                          </a:rPr>
+                          <m:t>𝛽</m:t>
+                        </m:r>
+                        <m:r>
+                          <a:rPr lang="en-US" altLang="zh-TW" sz="2000" i="1">
+                            <a:latin typeface="Cambria Math" panose="02040503050406030204" pitchFamily="18" charset="0"/>
+                          </a:rPr>
+                          <m:t>=</m:t>
+                        </m:r>
+                        <m:r>
+                          <a:rPr lang="en-US" altLang="zh-TW" sz="2000" i="1">
+                            <a:latin typeface="Cambria Math" panose="02040503050406030204" pitchFamily="18" charset="0"/>
+                          </a:rPr>
+                          <m:t>𝜋</m:t>
+                        </m:r>
+                        <m:r>
+                          <a:rPr lang="en-US" altLang="zh-TW" sz="2000" i="1">
+                            <a:latin typeface="Cambria Math" panose="02040503050406030204" pitchFamily="18" charset="0"/>
+                          </a:rPr>
+                          <m:t>/2</m:t>
+                        </m:r>
+                      </m:oMath>
+                    </m:oMathPara>
+                  </a14:m>
+                  <a:endParaRPr lang="en-US" altLang="zh-TW" sz="2000" i="1" dirty="0">
+                    <a:latin typeface="Cambria Math" panose="02040503050406030204" pitchFamily="18" charset="0"/>
+                  </a:endParaRPr>
+                </a:p>
+                <a:p>
+                  <a:pPr algn="ctr"/>
+                  <a14:m>
+                    <m:oMathPara xmlns:m="http://schemas.openxmlformats.org/officeDocument/2006/math">
+                      <m:oMathParaPr>
+                        <m:jc m:val="centerGroup"/>
+                      </m:oMathParaPr>
+                      <m:oMath xmlns:m="http://schemas.openxmlformats.org/officeDocument/2006/math">
+                        <m:r>
+                          <a:rPr lang="en-US" altLang="zh-TW" sz="2000" i="1">
+                            <a:latin typeface="Cambria Math" panose="02040503050406030204" pitchFamily="18" charset="0"/>
+                          </a:rPr>
+                          <m:t>𝛼</m:t>
+                        </m:r>
+                        <m:r>
+                          <a:rPr lang="en-US" altLang="zh-TW" sz="2000" i="1">
+                            <a:latin typeface="Cambria Math" panose="02040503050406030204" pitchFamily="18" charset="0"/>
+                          </a:rPr>
+                          <m:t>=</m:t>
+                        </m:r>
+                        <m:r>
+                          <a:rPr lang="en-US" altLang="zh-TW" sz="2000" i="1">
+                            <a:latin typeface="Cambria Math" panose="02040503050406030204" pitchFamily="18" charset="0"/>
+                          </a:rPr>
+                          <m:t>𝜋</m:t>
+                        </m:r>
+                      </m:oMath>
+                    </m:oMathPara>
+                  </a14:m>
+                  <a:endParaRPr lang="zh-TW" altLang="en-US" sz="2000" dirty="0"/>
+                </a:p>
+              </p:txBody>
+            </p:sp>
+          </mc:Choice>
+          <mc:Fallback>
+            <p:sp>
+              <p:nvSpPr>
+                <p:cNvPr id="79" name="文字方塊 78">
+                  <a:extLst>
+                    <a:ext uri="{FF2B5EF4-FFF2-40B4-BE49-F238E27FC236}">
+                      <a16:creationId xmlns:a16="http://schemas.microsoft.com/office/drawing/2014/main" id="{4288506E-2488-4EE1-85F4-71FE41A397F2}"/>
+                    </a:ext>
+                  </a:extLst>
+                </p:cNvPr>
+                <p:cNvSpPr txBox="1">
+                  <a:spLocks noRot="1" noChangeAspect="1" noMove="1" noResize="1" noEditPoints="1" noAdjustHandles="1" noChangeArrowheads="1" noChangeShapeType="1" noTextEdit="1"/>
+                </p:cNvSpPr>
+                <p:nvPr/>
+              </p:nvSpPr>
+              <p:spPr>
+                <a:xfrm>
+                  <a:off x="6917995" y="824785"/>
+                  <a:ext cx="1869862" cy="707886"/>
+                </a:xfrm>
+                <a:prstGeom prst="rect">
+                  <a:avLst/>
+                </a:prstGeom>
+                <a:blipFill>
+                  <a:blip r:embed="rId5"/>
+                  <a:stretch>
+                    <a:fillRect/>
+                  </a:stretch>
+                </a:blipFill>
+              </p:spPr>
+              <p:txBody>
+                <a:bodyPr/>
+                <a:lstStyle/>
+                <a:p>
+                  <a:r>
+                    <a:rPr lang="zh-TW" altLang="en-US">
+                      <a:noFill/>
+                    </a:rPr>
+                    <a:t> </a:t>
+                  </a:r>
+                </a:p>
+              </p:txBody>
+            </p:sp>
+          </mc:Fallback>
+        </mc:AlternateContent>
+        <mc:AlternateContent xmlns:mc="http://schemas.openxmlformats.org/markup-compatibility/2006">
+          <mc:Choice xmlns:a14="http://schemas.microsoft.com/office/drawing/2010/main" Requires="a14">
+            <p:sp>
+              <p:nvSpPr>
+                <p:cNvPr id="109" name="文字方塊 108">
+                  <a:extLst>
+                    <a:ext uri="{FF2B5EF4-FFF2-40B4-BE49-F238E27FC236}">
+                      <a16:creationId xmlns:a16="http://schemas.microsoft.com/office/drawing/2014/main" id="{DD11DB18-DAD7-4F8A-90F2-F185E1B8F1D9}"/>
+                    </a:ext>
+                  </a:extLst>
+                </p:cNvPr>
+                <p:cNvSpPr txBox="1"/>
+                <p:nvPr/>
+              </p:nvSpPr>
+              <p:spPr>
+                <a:xfrm>
+                  <a:off x="446951" y="2998044"/>
+                  <a:ext cx="812954" cy="338554"/>
+                </a:xfrm>
+                <a:prstGeom prst="rect">
+                  <a:avLst/>
+                </a:prstGeom>
+                <a:noFill/>
+              </p:spPr>
+              <p:txBody>
+                <a:bodyPr wrap="square" rtlCol="0">
+                  <a:spAutoFit/>
+                </a:bodyPr>
+                <a:lstStyle/>
+                <a:p>
+                  <a:pPr/>
+                  <a14:m>
+                    <m:oMathPara xmlns:m="http://schemas.openxmlformats.org/officeDocument/2006/math">
+                      <m:oMathParaPr>
+                        <m:jc m:val="centerGroup"/>
+                      </m:oMathParaPr>
+                      <m:oMath xmlns:m="http://schemas.openxmlformats.org/officeDocument/2006/math">
+                        <m:r>
+                          <a:rPr lang="en-US" altLang="zh-TW" sz="1600" i="1">
+                            <a:latin typeface="Cambria Math" panose="02040503050406030204" pitchFamily="18" charset="0"/>
+                          </a:rPr>
+                          <m:t>|</m:t>
+                        </m:r>
+                        <m:d>
+                          <m:dPr>
+                            <m:begChr m:val=""/>
+                            <m:endChr m:val="⟩"/>
+                            <m:ctrlPr>
+                              <a:rPr lang="en-US" altLang="zh-TW" sz="1600" i="1">
+                                <a:latin typeface="Cambria Math" panose="02040503050406030204" pitchFamily="18" charset="0"/>
+                              </a:rPr>
+                            </m:ctrlPr>
+                          </m:dPr>
+                          <m:e>
+                            <m:r>
+                              <a:rPr lang="en-US" altLang="zh-TW" sz="1600" i="1">
+                                <a:latin typeface="Cambria Math" panose="02040503050406030204" pitchFamily="18" charset="0"/>
+                              </a:rPr>
+                              <m:t>−1, </m:t>
+                            </m:r>
+                            <m:r>
+                              <a:rPr lang="en-US" altLang="zh-TW" sz="1600" i="1">
+                                <a:latin typeface="Cambria Math" panose="02040503050406030204" pitchFamily="18" charset="0"/>
+                              </a:rPr>
+                              <m:t>1</m:t>
+                            </m:r>
+                          </m:e>
+                        </m:d>
+                      </m:oMath>
+                    </m:oMathPara>
+                  </a14:m>
+                  <a:endParaRPr lang="zh-TW" altLang="en-US" sz="1600" dirty="0"/>
+                </a:p>
+              </p:txBody>
+            </p:sp>
+          </mc:Choice>
+          <mc:Fallback>
+            <p:sp>
+              <p:nvSpPr>
+                <p:cNvPr id="109" name="文字方塊 108">
+                  <a:extLst>
+                    <a:ext uri="{FF2B5EF4-FFF2-40B4-BE49-F238E27FC236}">
+                      <a16:creationId xmlns:a16="http://schemas.microsoft.com/office/drawing/2014/main" id="{DD11DB18-DAD7-4F8A-90F2-F185E1B8F1D9}"/>
+                    </a:ext>
+                  </a:extLst>
+                </p:cNvPr>
+                <p:cNvSpPr txBox="1">
+                  <a:spLocks noRot="1" noChangeAspect="1" noMove="1" noResize="1" noEditPoints="1" noAdjustHandles="1" noChangeArrowheads="1" noChangeShapeType="1" noTextEdit="1"/>
+                </p:cNvSpPr>
+                <p:nvPr/>
+              </p:nvSpPr>
+              <p:spPr>
+                <a:xfrm>
+                  <a:off x="446951" y="2998044"/>
+                  <a:ext cx="812954" cy="338554"/>
+                </a:xfrm>
+                <a:prstGeom prst="rect">
+                  <a:avLst/>
+                </a:prstGeom>
+                <a:blipFill>
+                  <a:blip r:embed="rId6"/>
+                  <a:stretch>
+                    <a:fillRect t="-108929" r="-46269" b="-167857"/>
+                  </a:stretch>
+                </a:blipFill>
+              </p:spPr>
+              <p:txBody>
+                <a:bodyPr/>
+                <a:lstStyle/>
+                <a:p>
+                  <a:r>
+                    <a:rPr lang="zh-TW" altLang="en-US">
+                      <a:noFill/>
+                    </a:rPr>
+                    <a:t> </a:t>
+                  </a:r>
+                </a:p>
+              </p:txBody>
+            </p:sp>
+          </mc:Fallback>
+        </mc:AlternateContent>
+        <mc:AlternateContent xmlns:mc="http://schemas.openxmlformats.org/markup-compatibility/2006">
+          <mc:Choice xmlns:a14="http://schemas.microsoft.com/office/drawing/2010/main" Requires="a14">
+            <p:sp>
+              <p:nvSpPr>
+                <p:cNvPr id="110" name="文字方塊 109">
+                  <a:extLst>
+                    <a:ext uri="{FF2B5EF4-FFF2-40B4-BE49-F238E27FC236}">
+                      <a16:creationId xmlns:a16="http://schemas.microsoft.com/office/drawing/2014/main" id="{AA0071A4-0DA4-44B4-A41D-67D31117A474}"/>
+                    </a:ext>
+                  </a:extLst>
+                </p:cNvPr>
+                <p:cNvSpPr txBox="1"/>
+                <p:nvPr/>
+              </p:nvSpPr>
+              <p:spPr>
+                <a:xfrm>
+                  <a:off x="463747" y="1052452"/>
+                  <a:ext cx="812954" cy="338554"/>
+                </a:xfrm>
+                <a:prstGeom prst="rect">
+                  <a:avLst/>
+                </a:prstGeom>
+                <a:noFill/>
+              </p:spPr>
+              <p:txBody>
+                <a:bodyPr wrap="square" rtlCol="0">
+                  <a:spAutoFit/>
+                </a:bodyPr>
+                <a:lstStyle/>
+                <a:p>
+                  <a:pPr/>
+                  <a14:m>
+                    <m:oMathPara xmlns:m="http://schemas.openxmlformats.org/officeDocument/2006/math">
+                      <m:oMathParaPr>
+                        <m:jc m:val="centerGroup"/>
+                      </m:oMathParaPr>
+                      <m:oMath xmlns:m="http://schemas.openxmlformats.org/officeDocument/2006/math">
+                        <m:r>
+                          <a:rPr lang="en-US" altLang="zh-TW" sz="1600" i="1">
+                            <a:latin typeface="Cambria Math" panose="02040503050406030204" pitchFamily="18" charset="0"/>
+                          </a:rPr>
+                          <m:t>|</m:t>
+                        </m:r>
+                        <m:d>
+                          <m:dPr>
+                            <m:begChr m:val=""/>
+                            <m:endChr m:val="⟩"/>
+                            <m:ctrlPr>
+                              <a:rPr lang="en-US" altLang="zh-TW" sz="1600" i="1">
+                                <a:latin typeface="Cambria Math" panose="02040503050406030204" pitchFamily="18" charset="0"/>
+                              </a:rPr>
+                            </m:ctrlPr>
+                          </m:dPr>
+                          <m:e>
+                            <m:r>
+                              <a:rPr lang="en-US" altLang="zh-TW" sz="1600" i="1">
+                                <a:latin typeface="Cambria Math" panose="02040503050406030204" pitchFamily="18" charset="0"/>
+                              </a:rPr>
+                              <m:t>1, −1</m:t>
+                            </m:r>
+                          </m:e>
+                        </m:d>
+                      </m:oMath>
+                    </m:oMathPara>
+                  </a14:m>
+                  <a:endParaRPr lang="zh-TW" altLang="en-US" sz="1600" dirty="0"/>
+                </a:p>
+              </p:txBody>
+            </p:sp>
+          </mc:Choice>
+          <mc:Fallback>
+            <p:sp>
+              <p:nvSpPr>
+                <p:cNvPr id="110" name="文字方塊 109">
+                  <a:extLst>
+                    <a:ext uri="{FF2B5EF4-FFF2-40B4-BE49-F238E27FC236}">
+                      <a16:creationId xmlns:a16="http://schemas.microsoft.com/office/drawing/2014/main" id="{AA0071A4-0DA4-44B4-A41D-67D31117A474}"/>
+                    </a:ext>
+                  </a:extLst>
+                </p:cNvPr>
+                <p:cNvSpPr txBox="1">
+                  <a:spLocks noRot="1" noChangeAspect="1" noMove="1" noResize="1" noEditPoints="1" noAdjustHandles="1" noChangeArrowheads="1" noChangeShapeType="1" noTextEdit="1"/>
+                </p:cNvSpPr>
+                <p:nvPr/>
+              </p:nvSpPr>
+              <p:spPr>
+                <a:xfrm>
+                  <a:off x="463747" y="1052452"/>
+                  <a:ext cx="812954" cy="338554"/>
+                </a:xfrm>
+                <a:prstGeom prst="rect">
+                  <a:avLst/>
+                </a:prstGeom>
+                <a:blipFill>
+                  <a:blip r:embed="rId7"/>
+                  <a:stretch>
+                    <a:fillRect t="-108929" r="-47368" b="-167857"/>
+                  </a:stretch>
+                </a:blipFill>
+              </p:spPr>
+              <p:txBody>
+                <a:bodyPr/>
+                <a:lstStyle/>
+                <a:p>
+                  <a:r>
+                    <a:rPr lang="zh-TW" altLang="en-US">
+                      <a:noFill/>
+                    </a:rPr>
+                    <a:t> </a:t>
+                  </a:r>
+                </a:p>
+              </p:txBody>
+            </p:sp>
+          </mc:Fallback>
+        </mc:AlternateContent>
+        <p:sp>
+          <p:nvSpPr>
+            <p:cNvPr id="111" name="Oval 14">
+              <a:extLst>
+                <a:ext uri="{FF2B5EF4-FFF2-40B4-BE49-F238E27FC236}">
+                  <a16:creationId xmlns:a16="http://schemas.microsoft.com/office/drawing/2014/main" id="{3CD4EDBA-AD74-4040-9A38-A7D80DE9B38B}"/>
+                </a:ext>
+              </a:extLst>
+            </p:cNvPr>
+            <p:cNvSpPr/>
+            <p:nvPr/>
+          </p:nvSpPr>
+          <p:spPr>
+            <a:xfrm>
+              <a:off x="793714" y="1348733"/>
+              <a:ext cx="162450" cy="168277"/>
+            </a:xfrm>
+            <a:prstGeom prst="ellipse">
+              <a:avLst/>
+            </a:prstGeom>
+            <a:gradFill flip="none" rotWithShape="1">
+              <a:gsLst>
+                <a:gs pos="0">
+                  <a:srgbClr val="D1D1D1"/>
+                </a:gs>
+                <a:gs pos="23000">
+                  <a:schemeClr val="bg1">
+                    <a:lumMod val="85000"/>
+                  </a:schemeClr>
+                </a:gs>
+                <a:gs pos="69000">
+                  <a:schemeClr val="accent3">
+                    <a:lumMod val="75000"/>
+                  </a:schemeClr>
+                </a:gs>
+                <a:gs pos="97000">
+                  <a:schemeClr val="accent3">
+                    <a:lumMod val="70000"/>
+                  </a:schemeClr>
+                </a:gs>
+              </a:gsLst>
+              <a:path path="circle">
+                <a:fillToRect l="50000" t="50000" r="50000" b="50000"/>
+              </a:path>
+              <a:tileRect/>
+            </a:gradFill>
+            <a:ln>
+              <a:solidFill>
+                <a:schemeClr val="tx1"/>
+              </a:solidFill>
+            </a:ln>
+          </p:spPr>
+          <p:style>
+            <a:lnRef idx="2">
+              <a:schemeClr val="accent1">
+                <a:shade val="50000"/>
+              </a:schemeClr>
+            </a:lnRef>
+            <a:fillRef idx="1">
+              <a:schemeClr val="accent1"/>
+            </a:fillRef>
+            <a:effectRef idx="0">
+              <a:schemeClr val="accent1"/>
+            </a:effectRef>
+            <a:fontRef idx="minor">
+              <a:schemeClr val="lt1"/>
+            </a:fontRef>
+          </p:style>
+          <p:txBody>
+            <a:bodyPr rtlCol="0" anchor="ctr"/>
+            <a:lstStyle/>
+            <a:p>
+              <a:pPr algn="ctr"/>
+              <a:endParaRPr lang="en-US" sz="2000" dirty="0"/>
+            </a:p>
+          </p:txBody>
+        </p:sp>
+        <p:sp>
+          <p:nvSpPr>
+            <p:cNvPr id="117" name="Oval 15">
+              <a:extLst>
+                <a:ext uri="{FF2B5EF4-FFF2-40B4-BE49-F238E27FC236}">
+                  <a16:creationId xmlns:a16="http://schemas.microsoft.com/office/drawing/2014/main" id="{CB037210-0447-4066-A0B0-0A3DC0DCF8F5}"/>
+                </a:ext>
+              </a:extLst>
+            </p:cNvPr>
+            <p:cNvSpPr/>
+            <p:nvPr/>
+          </p:nvSpPr>
+          <p:spPr>
+            <a:xfrm>
+              <a:off x="793714" y="2843690"/>
+              <a:ext cx="162450" cy="168277"/>
+            </a:xfrm>
+            <a:prstGeom prst="ellipse">
+              <a:avLst/>
+            </a:prstGeom>
+            <a:gradFill flip="none" rotWithShape="1">
+              <a:gsLst>
+                <a:gs pos="17000">
+                  <a:srgbClr val="D1D1D1"/>
+                </a:gs>
+                <a:gs pos="0">
+                  <a:schemeClr val="bg1">
+                    <a:lumMod val="85000"/>
+                  </a:schemeClr>
+                </a:gs>
+                <a:gs pos="60000">
+                  <a:schemeClr val="accent3">
+                    <a:lumMod val="75000"/>
+                  </a:schemeClr>
+                </a:gs>
+                <a:gs pos="97000">
+                  <a:schemeClr val="accent3">
+                    <a:lumMod val="70000"/>
+                  </a:schemeClr>
+                </a:gs>
+              </a:gsLst>
+              <a:path path="circle">
+                <a:fillToRect l="50000" t="50000" r="50000" b="50000"/>
+              </a:path>
+              <a:tileRect/>
+            </a:gradFill>
+            <a:ln>
+              <a:solidFill>
+                <a:schemeClr val="tx1"/>
+              </a:solidFill>
+            </a:ln>
+          </p:spPr>
+          <p:style>
+            <a:lnRef idx="2">
+              <a:schemeClr val="accent1">
+                <a:shade val="50000"/>
+              </a:schemeClr>
+            </a:lnRef>
+            <a:fillRef idx="1">
+              <a:schemeClr val="accent1"/>
+            </a:fillRef>
+            <a:effectRef idx="0">
+              <a:schemeClr val="accent1"/>
+            </a:effectRef>
+            <a:fontRef idx="minor">
+              <a:schemeClr val="lt1"/>
+            </a:fontRef>
+          </p:style>
+          <p:txBody>
+            <a:bodyPr rtlCol="0" anchor="ctr"/>
+            <a:lstStyle/>
+            <a:p>
+              <a:pPr algn="ctr"/>
+              <a:endParaRPr lang="en-US" sz="1600" dirty="0"/>
+            </a:p>
+          </p:txBody>
+        </p:sp>
+        <p:sp>
+          <p:nvSpPr>
+            <p:cNvPr id="119" name="SHO">
+              <a:extLst>
+                <a:ext uri="{FF2B5EF4-FFF2-40B4-BE49-F238E27FC236}">
+                  <a16:creationId xmlns:a16="http://schemas.microsoft.com/office/drawing/2014/main" id="{5B497D02-F77C-4F12-8A46-854E68955ECA}"/>
+                </a:ext>
+              </a:extLst>
+            </p:cNvPr>
+            <p:cNvSpPr/>
+            <p:nvPr/>
+          </p:nvSpPr>
+          <p:spPr>
+            <a:xfrm rot="16200000">
+              <a:off x="563595" y="1459270"/>
+              <a:ext cx="622693" cy="1443999"/>
+            </a:xfrm>
+            <a:prstGeom prst="arc">
+              <a:avLst>
+                <a:gd name="adj1" fmla="val 5396867"/>
+                <a:gd name="adj2" fmla="val 5395779"/>
+              </a:avLst>
+            </a:prstGeom>
+            <a:gradFill flip="none" rotWithShape="1">
+              <a:gsLst>
+                <a:gs pos="0">
+                  <a:schemeClr val="bg1">
+                    <a:lumMod val="65000"/>
+                  </a:schemeClr>
+                </a:gs>
+                <a:gs pos="47000">
+                  <a:schemeClr val="bg1">
+                    <a:lumMod val="50000"/>
+                  </a:schemeClr>
+                </a:gs>
+                <a:gs pos="97000">
+                  <a:srgbClr val="5E5E5E"/>
+                </a:gs>
+              </a:gsLst>
+              <a:path path="circle">
+                <a:fillToRect l="50000" t="50000" r="50000" b="50000"/>
+              </a:path>
+              <a:tileRect/>
+            </a:gradFill>
+            <a:ln w="31750">
+              <a:noFill/>
+            </a:ln>
+          </p:spPr>
+          <p:style>
+            <a:lnRef idx="1">
+              <a:schemeClr val="accent1"/>
+            </a:lnRef>
+            <a:fillRef idx="0">
+              <a:schemeClr val="accent1"/>
+            </a:fillRef>
+            <a:effectRef idx="0">
+              <a:schemeClr val="accent1"/>
+            </a:effectRef>
+            <a:fontRef idx="minor">
+              <a:schemeClr val="tx1"/>
+            </a:fontRef>
+          </p:style>
+          <p:txBody>
+            <a:bodyPr rtlCol="0" anchor="ctr"/>
+            <a:lstStyle/>
+            <a:p>
+              <a:pPr algn="ctr"/>
+              <a:endParaRPr lang="en-US" sz="1600" dirty="0"/>
+            </a:p>
+          </p:txBody>
+        </p:sp>
+        <p:sp>
+          <p:nvSpPr>
+            <p:cNvPr id="122" name="SVO">
+              <a:extLst>
+                <a:ext uri="{FF2B5EF4-FFF2-40B4-BE49-F238E27FC236}">
+                  <a16:creationId xmlns:a16="http://schemas.microsoft.com/office/drawing/2014/main" id="{8B75E00D-C581-45A8-8785-C8CD8ED5D499}"/>
+                </a:ext>
+              </a:extLst>
+            </p:cNvPr>
+            <p:cNvSpPr/>
+            <p:nvPr/>
+          </p:nvSpPr>
+          <p:spPr>
+            <a:xfrm>
+              <a:off x="513040" y="1433372"/>
+              <a:ext cx="722000" cy="1495797"/>
+            </a:xfrm>
+            <a:prstGeom prst="ellipse">
+              <a:avLst/>
+            </a:prstGeom>
+            <a:noFill/>
+            <a:ln w="25400">
+              <a:solidFill>
+                <a:schemeClr val="bg1">
+                  <a:lumMod val="50000"/>
+                </a:schemeClr>
+              </a:solidFill>
+              <a:prstDash val="dash"/>
+            </a:ln>
+          </p:spPr>
+          <p:style>
+            <a:lnRef idx="2">
+              <a:schemeClr val="accent1">
+                <a:shade val="50000"/>
+              </a:schemeClr>
+            </a:lnRef>
+            <a:fillRef idx="1">
+              <a:schemeClr val="accent1"/>
+            </a:fillRef>
+            <a:effectRef idx="0">
+              <a:schemeClr val="accent1"/>
+            </a:effectRef>
+            <a:fontRef idx="minor">
+              <a:schemeClr val="lt1"/>
+            </a:fontRef>
+          </p:style>
+          <p:txBody>
+            <a:bodyPr rtlCol="0" anchor="ctr"/>
+            <a:lstStyle/>
+            <a:p>
+              <a:pPr algn="ctr"/>
+              <a:endParaRPr lang="en-US" sz="1600"/>
+            </a:p>
+          </p:txBody>
+        </p:sp>
+        <p:sp>
+          <p:nvSpPr>
+            <p:cNvPr id="124" name="Oval 6">
+              <a:extLst>
+                <a:ext uri="{FF2B5EF4-FFF2-40B4-BE49-F238E27FC236}">
+                  <a16:creationId xmlns:a16="http://schemas.microsoft.com/office/drawing/2014/main" id="{40DEA46A-5F13-4763-9AB9-C9EB3D202420}"/>
+                </a:ext>
+              </a:extLst>
+            </p:cNvPr>
+            <p:cNvSpPr/>
+            <p:nvPr/>
+          </p:nvSpPr>
+          <p:spPr>
+            <a:xfrm rot="16200000">
+              <a:off x="563595" y="1459270"/>
+              <a:ext cx="622693" cy="1443999"/>
+            </a:xfrm>
+            <a:prstGeom prst="ellipse">
+              <a:avLst/>
+            </a:prstGeom>
+            <a:noFill/>
+            <a:ln w="38100">
+              <a:solidFill>
+                <a:schemeClr val="tx1">
+                  <a:alpha val="60000"/>
+                </a:schemeClr>
+              </a:solidFill>
+              <a:prstDash val="solid"/>
+            </a:ln>
+          </p:spPr>
+          <p:style>
+            <a:lnRef idx="2">
+              <a:schemeClr val="accent1">
+                <a:shade val="50000"/>
+              </a:schemeClr>
+            </a:lnRef>
+            <a:fillRef idx="1">
+              <a:schemeClr val="accent1"/>
+            </a:fillRef>
+            <a:effectRef idx="0">
+              <a:schemeClr val="accent1"/>
+            </a:effectRef>
+            <a:fontRef idx="minor">
+              <a:schemeClr val="lt1"/>
+            </a:fontRef>
+          </p:style>
+          <p:txBody>
+            <a:bodyPr rtlCol="0" anchor="ctr"/>
+            <a:lstStyle/>
+            <a:p>
+              <a:pPr algn="ctr"/>
+              <a:endParaRPr lang="en-US" sz="1600" dirty="0"/>
+            </a:p>
+          </p:txBody>
+        </p:sp>
+        <mc:AlternateContent xmlns:mc="http://schemas.openxmlformats.org/markup-compatibility/2006">
+          <mc:Choice xmlns:a14="http://schemas.microsoft.com/office/drawing/2010/main" Requires="a14">
+            <p:sp>
+              <p:nvSpPr>
+                <p:cNvPr id="125" name="TextBox 11">
+                  <a:extLst>
+                    <a:ext uri="{FF2B5EF4-FFF2-40B4-BE49-F238E27FC236}">
+                      <a16:creationId xmlns:a16="http://schemas.microsoft.com/office/drawing/2014/main" id="{115660D2-D291-4CC2-9F64-AC685B91012F}"/>
+                    </a:ext>
+                  </a:extLst>
+                </p:cNvPr>
+                <p:cNvSpPr txBox="1"/>
+                <p:nvPr/>
+              </p:nvSpPr>
+              <p:spPr>
+                <a:xfrm>
+                  <a:off x="325242" y="2002917"/>
+                  <a:ext cx="176928" cy="338554"/>
+                </a:xfrm>
+                <a:prstGeom prst="rect">
+                  <a:avLst/>
+                </a:prstGeom>
+                <a:noFill/>
+              </p:spPr>
+              <p:txBody>
+                <a:bodyPr wrap="square" rtlCol="0">
+                  <a:spAutoFit/>
+                </a:bodyPr>
+                <a:lstStyle/>
+                <a:p>
+                  <a:pPr/>
+                  <a14:m>
+                    <m:oMathPara xmlns:m="http://schemas.openxmlformats.org/officeDocument/2006/math">
+                      <m:oMathParaPr>
+                        <m:jc m:val="centerGroup"/>
+                      </m:oMathParaPr>
+                      <m:oMath xmlns:m="http://schemas.openxmlformats.org/officeDocument/2006/math">
+                        <m:r>
+                          <a:rPr lang="en-US" sz="1600" i="1">
+                            <a:latin typeface="Cambria Math" panose="02040503050406030204" pitchFamily="18" charset="0"/>
+                          </a:rPr>
+                          <m:t>𝑥</m:t>
+                        </m:r>
+                      </m:oMath>
+                    </m:oMathPara>
+                  </a14:m>
+                  <a:endParaRPr lang="en-US" sz="1600" dirty="0"/>
+                </a:p>
+              </p:txBody>
+            </p:sp>
+          </mc:Choice>
+          <mc:Fallback>
+            <p:sp>
+              <p:nvSpPr>
+                <p:cNvPr id="125" name="TextBox 11">
+                  <a:extLst>
+                    <a:ext uri="{FF2B5EF4-FFF2-40B4-BE49-F238E27FC236}">
+                      <a16:creationId xmlns:a16="http://schemas.microsoft.com/office/drawing/2014/main" id="{115660D2-D291-4CC2-9F64-AC685B91012F}"/>
+                    </a:ext>
+                  </a:extLst>
+                </p:cNvPr>
+                <p:cNvSpPr txBox="1">
+                  <a:spLocks noRot="1" noChangeAspect="1" noMove="1" noResize="1" noEditPoints="1" noAdjustHandles="1" noChangeArrowheads="1" noChangeShapeType="1" noTextEdit="1"/>
+                </p:cNvSpPr>
+                <p:nvPr/>
+              </p:nvSpPr>
+              <p:spPr>
+                <a:xfrm>
+                  <a:off x="325242" y="2002917"/>
+                  <a:ext cx="176928" cy="338554"/>
+                </a:xfrm>
+                <a:prstGeom prst="rect">
+                  <a:avLst/>
+                </a:prstGeom>
+                <a:blipFill>
+                  <a:blip r:embed="rId8"/>
+                  <a:stretch>
+                    <a:fillRect r="-41379"/>
+                  </a:stretch>
+                </a:blipFill>
+              </p:spPr>
+              <p:txBody>
+                <a:bodyPr/>
+                <a:lstStyle/>
+                <a:p>
+                  <a:r>
+                    <a:rPr lang="zh-TW" altLang="en-US">
+                      <a:noFill/>
+                    </a:rPr>
+                    <a:t> </a:t>
+                  </a:r>
+                </a:p>
+              </p:txBody>
+            </p:sp>
+          </mc:Fallback>
+        </mc:AlternateContent>
+        <p:sp>
+          <p:nvSpPr>
+            <p:cNvPr id="126" name="Oval 22">
+              <a:extLst>
+                <a:ext uri="{FF2B5EF4-FFF2-40B4-BE49-F238E27FC236}">
+                  <a16:creationId xmlns:a16="http://schemas.microsoft.com/office/drawing/2014/main" id="{FDB9E581-2160-41C0-A18D-E850D2ED97B1}"/>
+                </a:ext>
+              </a:extLst>
+            </p:cNvPr>
+            <p:cNvSpPr/>
+            <p:nvPr/>
+          </p:nvSpPr>
+          <p:spPr>
+            <a:xfrm>
+              <a:off x="792768" y="2843690"/>
+              <a:ext cx="162450" cy="168277"/>
+            </a:xfrm>
+            <a:prstGeom prst="ellipse">
+              <a:avLst/>
+            </a:prstGeom>
+            <a:gradFill flip="none" rotWithShape="1">
+              <a:gsLst>
+                <a:gs pos="100000">
+                  <a:schemeClr val="tx1">
+                    <a:lumMod val="85000"/>
+                    <a:lumOff val="15000"/>
+                  </a:schemeClr>
+                </a:gs>
+                <a:gs pos="50000">
+                  <a:schemeClr val="tx1">
+                    <a:lumMod val="65000"/>
+                    <a:lumOff val="35000"/>
+                    <a:tint val="44500"/>
+                    <a:satMod val="160000"/>
+                  </a:schemeClr>
+                </a:gs>
+                <a:gs pos="0">
+                  <a:schemeClr val="tx1">
+                    <a:lumMod val="65000"/>
+                    <a:lumOff val="35000"/>
+                    <a:tint val="23500"/>
+                    <a:satMod val="160000"/>
+                  </a:schemeClr>
+                </a:gs>
+              </a:gsLst>
+              <a:path path="circle">
+                <a:fillToRect l="50000" t="50000" r="50000" b="50000"/>
+              </a:path>
+              <a:tileRect/>
+            </a:gradFill>
+            <a:ln>
+              <a:solidFill>
+                <a:schemeClr val="tx1"/>
+              </a:solidFill>
+            </a:ln>
+          </p:spPr>
+          <p:style>
+            <a:lnRef idx="2">
+              <a:schemeClr val="accent1">
+                <a:shade val="50000"/>
+              </a:schemeClr>
+            </a:lnRef>
+            <a:fillRef idx="1">
+              <a:schemeClr val="accent1"/>
+            </a:fillRef>
+            <a:effectRef idx="0">
+              <a:schemeClr val="accent1"/>
+            </a:effectRef>
+            <a:fontRef idx="minor">
+              <a:schemeClr val="lt1"/>
+            </a:fontRef>
+          </p:style>
+          <p:txBody>
+            <a:bodyPr rtlCol="0" anchor="ctr"/>
+            <a:lstStyle/>
+            <a:p>
+              <a:pPr algn="ctr"/>
+              <a:endParaRPr lang="en-US" sz="1600" dirty="0"/>
+            </a:p>
+          </p:txBody>
+        </p:sp>
+        <mc:AlternateContent xmlns:mc="http://schemas.openxmlformats.org/markup-compatibility/2006">
+          <mc:Choice xmlns:a14="http://schemas.microsoft.com/office/drawing/2010/main" Requires="a14">
+            <p:sp>
+              <p:nvSpPr>
+                <p:cNvPr id="127" name="TextBox 12">
+                  <a:extLst>
+                    <a:ext uri="{FF2B5EF4-FFF2-40B4-BE49-F238E27FC236}">
+                      <a16:creationId xmlns:a16="http://schemas.microsoft.com/office/drawing/2014/main" id="{3BFF9703-6F9D-4BE1-800D-35E8D1FA7574}"/>
+                    </a:ext>
+                  </a:extLst>
+                </p:cNvPr>
+                <p:cNvSpPr txBox="1"/>
+                <p:nvPr/>
+              </p:nvSpPr>
+              <p:spPr>
+                <a:xfrm>
+                  <a:off x="980165" y="2098314"/>
+                  <a:ext cx="176928" cy="338554"/>
+                </a:xfrm>
+                <a:prstGeom prst="rect">
+                  <a:avLst/>
+                </a:prstGeom>
+                <a:noFill/>
+              </p:spPr>
+              <p:txBody>
+                <a:bodyPr wrap="square" rtlCol="0">
+                  <a:spAutoFit/>
+                </a:bodyPr>
+                <a:lstStyle/>
+                <a:p>
+                  <a:pPr/>
+                  <a14:m>
+                    <m:oMathPara xmlns:m="http://schemas.openxmlformats.org/officeDocument/2006/math">
+                      <m:oMathParaPr>
+                        <m:jc m:val="centerGroup"/>
+                      </m:oMathParaPr>
+                      <m:oMath xmlns:m="http://schemas.openxmlformats.org/officeDocument/2006/math">
+                        <m:r>
+                          <a:rPr lang="en-US" sz="1600" i="1">
+                            <a:latin typeface="Cambria Math" panose="02040503050406030204" pitchFamily="18" charset="0"/>
+                          </a:rPr>
+                          <m:t>𝑦</m:t>
+                        </m:r>
+                      </m:oMath>
+                    </m:oMathPara>
+                  </a14:m>
+                  <a:endParaRPr lang="en-US" sz="1600" dirty="0"/>
+                </a:p>
+              </p:txBody>
+            </p:sp>
+          </mc:Choice>
+          <mc:Fallback>
+            <p:sp>
+              <p:nvSpPr>
+                <p:cNvPr id="127" name="TextBox 12">
+                  <a:extLst>
+                    <a:ext uri="{FF2B5EF4-FFF2-40B4-BE49-F238E27FC236}">
+                      <a16:creationId xmlns:a16="http://schemas.microsoft.com/office/drawing/2014/main" id="{3BFF9703-6F9D-4BE1-800D-35E8D1FA7574}"/>
+                    </a:ext>
+                  </a:extLst>
+                </p:cNvPr>
+                <p:cNvSpPr txBox="1">
+                  <a:spLocks noRot="1" noChangeAspect="1" noMove="1" noResize="1" noEditPoints="1" noAdjustHandles="1" noChangeArrowheads="1" noChangeShapeType="1" noTextEdit="1"/>
+                </p:cNvSpPr>
+                <p:nvPr/>
+              </p:nvSpPr>
+              <p:spPr>
+                <a:xfrm>
+                  <a:off x="980165" y="2098314"/>
+                  <a:ext cx="176928" cy="338554"/>
+                </a:xfrm>
+                <a:prstGeom prst="rect">
+                  <a:avLst/>
+                </a:prstGeom>
+                <a:blipFill>
+                  <a:blip r:embed="rId9"/>
+                  <a:stretch>
+                    <a:fillRect r="-51724" b="-3636"/>
+                  </a:stretch>
+                </a:blipFill>
+              </p:spPr>
+              <p:txBody>
+                <a:bodyPr/>
+                <a:lstStyle/>
+                <a:p>
+                  <a:r>
+                    <a:rPr lang="zh-TW" altLang="en-US">
+                      <a:noFill/>
+                    </a:rPr>
+                    <a:t> </a:t>
+                  </a:r>
+                </a:p>
+              </p:txBody>
+            </p:sp>
+          </mc:Fallback>
+        </mc:AlternateContent>
+        <mc:AlternateContent xmlns:mc="http://schemas.openxmlformats.org/markup-compatibility/2006">
+          <mc:Choice xmlns:a14="http://schemas.microsoft.com/office/drawing/2010/main" Requires="a14">
+            <p:sp>
+              <p:nvSpPr>
+                <p:cNvPr id="129" name="TextBox 13">
+                  <a:extLst>
+                    <a:ext uri="{FF2B5EF4-FFF2-40B4-BE49-F238E27FC236}">
+                      <a16:creationId xmlns:a16="http://schemas.microsoft.com/office/drawing/2014/main" id="{006DB87D-4747-446D-A81F-C70C343CD78F}"/>
+                    </a:ext>
+                  </a:extLst>
+                </p:cNvPr>
+                <p:cNvSpPr txBox="1"/>
+                <p:nvPr/>
+              </p:nvSpPr>
+              <p:spPr>
+                <a:xfrm>
+                  <a:off x="736042" y="1468572"/>
+                  <a:ext cx="256967" cy="338554"/>
+                </a:xfrm>
+                <a:prstGeom prst="rect">
+                  <a:avLst/>
+                </a:prstGeom>
+                <a:noFill/>
+              </p:spPr>
+              <p:txBody>
+                <a:bodyPr wrap="square" rtlCol="0">
+                  <a:spAutoFit/>
+                </a:bodyPr>
+                <a:lstStyle/>
+                <a:p>
+                  <a:pPr/>
+                  <a14:m>
+                    <m:oMathPara xmlns:m="http://schemas.openxmlformats.org/officeDocument/2006/math">
+                      <m:oMathParaPr>
+                        <m:jc m:val="centerGroup"/>
+                      </m:oMathParaPr>
+                      <m:oMath xmlns:m="http://schemas.openxmlformats.org/officeDocument/2006/math">
+                        <m:r>
+                          <a:rPr lang="en-US" sz="1600" i="1">
+                            <a:latin typeface="Cambria Math" panose="02040503050406030204" pitchFamily="18" charset="0"/>
+                          </a:rPr>
+                          <m:t>𝑧</m:t>
+                        </m:r>
+                      </m:oMath>
+                    </m:oMathPara>
+                  </a14:m>
+                  <a:endParaRPr lang="en-US" sz="1600" dirty="0"/>
+                </a:p>
+              </p:txBody>
+            </p:sp>
+          </mc:Choice>
+          <mc:Fallback>
+            <p:sp>
+              <p:nvSpPr>
+                <p:cNvPr id="129" name="TextBox 13">
+                  <a:extLst>
+                    <a:ext uri="{FF2B5EF4-FFF2-40B4-BE49-F238E27FC236}">
+                      <a16:creationId xmlns:a16="http://schemas.microsoft.com/office/drawing/2014/main" id="{006DB87D-4747-446D-A81F-C70C343CD78F}"/>
+                    </a:ext>
+                  </a:extLst>
+                </p:cNvPr>
+                <p:cNvSpPr txBox="1">
+                  <a:spLocks noRot="1" noChangeAspect="1" noMove="1" noResize="1" noEditPoints="1" noAdjustHandles="1" noChangeArrowheads="1" noChangeShapeType="1" noTextEdit="1"/>
+                </p:cNvSpPr>
+                <p:nvPr/>
+              </p:nvSpPr>
+              <p:spPr>
+                <a:xfrm>
+                  <a:off x="736042" y="1468572"/>
+                  <a:ext cx="256967" cy="338554"/>
+                </a:xfrm>
+                <a:prstGeom prst="rect">
+                  <a:avLst/>
+                </a:prstGeom>
+                <a:blipFill>
+                  <a:blip r:embed="rId10"/>
+                  <a:stretch>
+                    <a:fillRect/>
+                  </a:stretch>
+                </a:blipFill>
+              </p:spPr>
+              <p:txBody>
+                <a:bodyPr/>
+                <a:lstStyle/>
+                <a:p>
+                  <a:r>
+                    <a:rPr lang="zh-TW" altLang="en-US">
+                      <a:noFill/>
+                    </a:rPr>
+                    <a:t> </a:t>
+                  </a:r>
+                </a:p>
+              </p:txBody>
+            </p:sp>
+          </mc:Fallback>
+        </mc:AlternateContent>
+        <p:sp>
+          <p:nvSpPr>
+            <p:cNvPr id="131" name="DVO">
+              <a:extLst>
+                <a:ext uri="{FF2B5EF4-FFF2-40B4-BE49-F238E27FC236}">
+                  <a16:creationId xmlns:a16="http://schemas.microsoft.com/office/drawing/2014/main" id="{A7087ED3-BF64-4F25-B648-EC2D61488357}"/>
+                </a:ext>
+              </a:extLst>
+            </p:cNvPr>
+            <p:cNvSpPr/>
+            <p:nvPr/>
+          </p:nvSpPr>
+          <p:spPr>
+            <a:xfrm flipH="1">
+              <a:off x="513040" y="1433372"/>
+              <a:ext cx="722000" cy="1495797"/>
+            </a:xfrm>
+            <a:prstGeom prst="arc">
+              <a:avLst>
+                <a:gd name="adj1" fmla="val 5396867"/>
+                <a:gd name="adj2" fmla="val 16170484"/>
+              </a:avLst>
+            </a:prstGeom>
+            <a:ln w="25400">
+              <a:solidFill>
+                <a:schemeClr val="bg1">
+                  <a:lumMod val="50000"/>
+                </a:schemeClr>
+              </a:solidFill>
+            </a:ln>
+          </p:spPr>
+          <p:style>
+            <a:lnRef idx="1">
+              <a:schemeClr val="accent1"/>
+            </a:lnRef>
+            <a:fillRef idx="0">
+              <a:schemeClr val="accent1"/>
+            </a:fillRef>
+            <a:effectRef idx="0">
+              <a:schemeClr val="accent1"/>
+            </a:effectRef>
+            <a:fontRef idx="minor">
+              <a:schemeClr val="tx1"/>
+            </a:fontRef>
+          </p:style>
+          <p:txBody>
+            <a:bodyPr rtlCol="0" anchor="ctr"/>
+            <a:lstStyle/>
+            <a:p>
+              <a:pPr algn="ctr"/>
+              <a:endParaRPr lang="en-US" sz="1600" dirty="0"/>
+            </a:p>
+          </p:txBody>
+        </p:sp>
+        <p:sp>
+          <p:nvSpPr>
+            <p:cNvPr id="133" name="Oval 23">
+              <a:extLst>
+                <a:ext uri="{FF2B5EF4-FFF2-40B4-BE49-F238E27FC236}">
+                  <a16:creationId xmlns:a16="http://schemas.microsoft.com/office/drawing/2014/main" id="{AAB0988F-6DF2-4205-B847-B52E2279E14D}"/>
+                </a:ext>
+              </a:extLst>
+            </p:cNvPr>
+            <p:cNvSpPr/>
+            <p:nvPr/>
+          </p:nvSpPr>
+          <p:spPr>
+            <a:xfrm>
+              <a:off x="1515624" y="2097132"/>
+              <a:ext cx="162450" cy="168277"/>
+            </a:xfrm>
+            <a:prstGeom prst="ellipse">
+              <a:avLst/>
+            </a:prstGeom>
+            <a:gradFill flip="none" rotWithShape="1">
+              <a:gsLst>
+                <a:gs pos="100000">
+                  <a:schemeClr val="tx1">
+                    <a:lumMod val="85000"/>
+                    <a:lumOff val="15000"/>
+                  </a:schemeClr>
+                </a:gs>
+                <a:gs pos="50000">
+                  <a:schemeClr val="tx1">
+                    <a:lumMod val="65000"/>
+                    <a:lumOff val="35000"/>
+                    <a:tint val="44500"/>
+                    <a:satMod val="160000"/>
+                  </a:schemeClr>
+                </a:gs>
+                <a:gs pos="0">
+                  <a:schemeClr val="tx1">
+                    <a:lumMod val="65000"/>
+                    <a:lumOff val="35000"/>
+                    <a:tint val="23500"/>
+                    <a:satMod val="160000"/>
+                  </a:schemeClr>
+                </a:gs>
+              </a:gsLst>
+              <a:path path="circle">
+                <a:fillToRect l="50000" t="50000" r="50000" b="50000"/>
+              </a:path>
+              <a:tileRect/>
+            </a:gradFill>
+            <a:ln>
+              <a:solidFill>
+                <a:schemeClr val="tx1"/>
+              </a:solidFill>
+            </a:ln>
+          </p:spPr>
+          <p:style>
+            <a:lnRef idx="2">
+              <a:schemeClr val="accent1">
+                <a:shade val="50000"/>
+              </a:schemeClr>
+            </a:lnRef>
+            <a:fillRef idx="1">
+              <a:schemeClr val="accent1"/>
+            </a:fillRef>
+            <a:effectRef idx="0">
+              <a:schemeClr val="accent1"/>
+            </a:effectRef>
+            <a:fontRef idx="minor">
+              <a:schemeClr val="lt1"/>
+            </a:fontRef>
+          </p:style>
+          <p:txBody>
+            <a:bodyPr rtlCol="0" anchor="ctr"/>
+            <a:lstStyle/>
+            <a:p>
+              <a:pPr algn="ctr"/>
+              <a:endParaRPr lang="en-US" sz="1600" dirty="0"/>
+            </a:p>
+          </p:txBody>
+        </p:sp>
+        <p:cxnSp>
+          <p:nvCxnSpPr>
+            <p:cNvPr id="134" name="Straight Arrow Connector 7">
+              <a:extLst>
+                <a:ext uri="{FF2B5EF4-FFF2-40B4-BE49-F238E27FC236}">
+                  <a16:creationId xmlns:a16="http://schemas.microsoft.com/office/drawing/2014/main" id="{B8669B19-14BD-412B-AA85-E424E7F9D367}"/>
+                </a:ext>
+              </a:extLst>
+            </p:cNvPr>
+            <p:cNvCxnSpPr>
+              <a:cxnSpLocks/>
+            </p:cNvCxnSpPr>
+            <p:nvPr/>
+          </p:nvCxnSpPr>
+          <p:spPr>
+            <a:xfrm flipV="1">
+              <a:off x="871010" y="1733187"/>
+              <a:ext cx="1697" cy="445890"/>
+            </a:xfrm>
+            <a:prstGeom prst="straightConnector1">
+              <a:avLst/>
+            </a:prstGeom>
+            <a:ln w="12700">
+              <a:solidFill>
+                <a:schemeClr val="tx1"/>
+              </a:solidFill>
+              <a:tailEnd type="triangle" w="med" len="lg"/>
+            </a:ln>
+          </p:spPr>
+          <p:style>
+            <a:lnRef idx="1">
+              <a:schemeClr val="accent1"/>
+            </a:lnRef>
+            <a:fillRef idx="0">
+              <a:schemeClr val="accent1"/>
+            </a:fillRef>
+            <a:effectRef idx="0">
+              <a:schemeClr val="accent1"/>
+            </a:effectRef>
+            <a:fontRef idx="minor">
+              <a:schemeClr val="tx1"/>
+            </a:fontRef>
+          </p:style>
+        </p:cxnSp>
+        <p:cxnSp>
+          <p:nvCxnSpPr>
+            <p:cNvPr id="137" name="Straight Arrow Connector 19">
+              <a:extLst>
+                <a:ext uri="{FF2B5EF4-FFF2-40B4-BE49-F238E27FC236}">
+                  <a16:creationId xmlns:a16="http://schemas.microsoft.com/office/drawing/2014/main" id="{947FE6BA-9C08-4366-95B1-A0157D7B9A70}"/>
+                </a:ext>
+              </a:extLst>
+            </p:cNvPr>
+            <p:cNvCxnSpPr>
+              <a:cxnSpLocks/>
+            </p:cNvCxnSpPr>
+            <p:nvPr/>
+          </p:nvCxnSpPr>
+          <p:spPr>
+            <a:xfrm>
+              <a:off x="873993" y="2176894"/>
+              <a:ext cx="195802" cy="156763"/>
+            </a:xfrm>
+            <a:prstGeom prst="straightConnector1">
+              <a:avLst/>
+            </a:prstGeom>
+            <a:ln w="12700">
+              <a:solidFill>
+                <a:schemeClr val="tx1"/>
+              </a:solidFill>
+              <a:tailEnd type="triangle" w="med" len="lg"/>
+            </a:ln>
+          </p:spPr>
+          <p:style>
+            <a:lnRef idx="1">
+              <a:schemeClr val="accent1"/>
+            </a:lnRef>
+            <a:fillRef idx="0">
+              <a:schemeClr val="accent1"/>
+            </a:fillRef>
+            <a:effectRef idx="0">
+              <a:schemeClr val="accent1"/>
+            </a:effectRef>
+            <a:fontRef idx="minor">
+              <a:schemeClr val="tx1"/>
+            </a:fontRef>
+          </p:style>
+        </p:cxnSp>
+        <p:cxnSp>
+          <p:nvCxnSpPr>
+            <p:cNvPr id="139" name="Straight Arrow Connector 18">
+              <a:extLst>
+                <a:ext uri="{FF2B5EF4-FFF2-40B4-BE49-F238E27FC236}">
+                  <a16:creationId xmlns:a16="http://schemas.microsoft.com/office/drawing/2014/main" id="{FE4F41C0-1AC6-44D1-B3C5-B077CB032720}"/>
+                </a:ext>
+              </a:extLst>
+            </p:cNvPr>
+            <p:cNvCxnSpPr>
+              <a:cxnSpLocks/>
+            </p:cNvCxnSpPr>
+            <p:nvPr/>
+          </p:nvCxnSpPr>
+          <p:spPr>
+            <a:xfrm rot="16200000" flipH="1" flipV="1">
+              <a:off x="702671" y="2005417"/>
+              <a:ext cx="0" cy="342950"/>
+            </a:xfrm>
+            <a:prstGeom prst="straightConnector1">
+              <a:avLst/>
+            </a:prstGeom>
+            <a:ln w="12700">
+              <a:solidFill>
+                <a:schemeClr val="tx1"/>
+              </a:solidFill>
+              <a:tailEnd type="triangle" w="med" len="lg"/>
+            </a:ln>
+          </p:spPr>
+          <p:style>
+            <a:lnRef idx="1">
+              <a:schemeClr val="accent1"/>
+            </a:lnRef>
+            <a:fillRef idx="0">
+              <a:schemeClr val="accent1"/>
+            </a:fillRef>
+            <a:effectRef idx="0">
+              <a:schemeClr val="accent1"/>
+            </a:effectRef>
+            <a:fontRef idx="minor">
+              <a:schemeClr val="tx1"/>
+            </a:fontRef>
+          </p:style>
+        </p:cxnSp>
+        <p:sp>
+          <p:nvSpPr>
+            <p:cNvPr id="140" name="Oval 20">
+              <a:extLst>
+                <a:ext uri="{FF2B5EF4-FFF2-40B4-BE49-F238E27FC236}">
+                  <a16:creationId xmlns:a16="http://schemas.microsoft.com/office/drawing/2014/main" id="{E471D011-C8B6-4BBA-AD16-FD575F82BA6D}"/>
+                </a:ext>
+              </a:extLst>
+            </p:cNvPr>
+            <p:cNvSpPr/>
+            <p:nvPr/>
+          </p:nvSpPr>
+          <p:spPr>
+            <a:xfrm>
+              <a:off x="71460" y="2097132"/>
+              <a:ext cx="162450" cy="168277"/>
+            </a:xfrm>
+            <a:prstGeom prst="ellipse">
+              <a:avLst/>
+            </a:prstGeom>
+            <a:gradFill flip="none" rotWithShape="1">
+              <a:gsLst>
+                <a:gs pos="100000">
+                  <a:schemeClr val="tx1">
+                    <a:lumMod val="85000"/>
+                    <a:lumOff val="15000"/>
+                  </a:schemeClr>
+                </a:gs>
+                <a:gs pos="50000">
+                  <a:schemeClr val="tx1">
+                    <a:lumMod val="65000"/>
+                    <a:lumOff val="35000"/>
+                    <a:tint val="44500"/>
+                    <a:satMod val="160000"/>
+                  </a:schemeClr>
+                </a:gs>
+                <a:gs pos="0">
+                  <a:schemeClr val="tx1">
+                    <a:lumMod val="65000"/>
+                    <a:lumOff val="35000"/>
+                    <a:tint val="23500"/>
+                    <a:satMod val="160000"/>
+                  </a:schemeClr>
+                </a:gs>
+              </a:gsLst>
+              <a:path path="circle">
+                <a:fillToRect l="50000" t="50000" r="50000" b="50000"/>
+              </a:path>
+              <a:tileRect/>
+            </a:gradFill>
+            <a:ln>
+              <a:solidFill>
+                <a:schemeClr val="tx1"/>
+              </a:solidFill>
+            </a:ln>
+          </p:spPr>
+          <p:style>
+            <a:lnRef idx="2">
+              <a:schemeClr val="accent1">
+                <a:shade val="50000"/>
+              </a:schemeClr>
+            </a:lnRef>
+            <a:fillRef idx="1">
+              <a:schemeClr val="accent1"/>
+            </a:fillRef>
+            <a:effectRef idx="0">
+              <a:schemeClr val="accent1"/>
+            </a:effectRef>
+            <a:fontRef idx="minor">
+              <a:schemeClr val="lt1"/>
+            </a:fontRef>
+          </p:style>
+          <p:txBody>
+            <a:bodyPr rtlCol="0" anchor="ctr"/>
+            <a:lstStyle/>
+            <a:p>
+              <a:pPr algn="ctr"/>
+              <a:endParaRPr lang="en-US" sz="1600"/>
+            </a:p>
+          </p:txBody>
+        </p:sp>
+        <p:sp>
+          <p:nvSpPr>
+            <p:cNvPr id="141" name="Oval 22">
+              <a:extLst>
+                <a:ext uri="{FF2B5EF4-FFF2-40B4-BE49-F238E27FC236}">
+                  <a16:creationId xmlns:a16="http://schemas.microsoft.com/office/drawing/2014/main" id="{11F7A701-4E70-4E57-A7EC-008773ED045B}"/>
+                </a:ext>
+              </a:extLst>
+            </p:cNvPr>
+            <p:cNvSpPr/>
+            <p:nvPr/>
+          </p:nvSpPr>
+          <p:spPr>
+            <a:xfrm>
+              <a:off x="793950" y="1340859"/>
+              <a:ext cx="162450" cy="168277"/>
+            </a:xfrm>
+            <a:prstGeom prst="ellipse">
+              <a:avLst/>
+            </a:prstGeom>
+            <a:gradFill flip="none" rotWithShape="1">
+              <a:gsLst>
+                <a:gs pos="100000">
+                  <a:schemeClr val="tx1">
+                    <a:lumMod val="85000"/>
+                    <a:lumOff val="15000"/>
+                  </a:schemeClr>
+                </a:gs>
+                <a:gs pos="50000">
+                  <a:schemeClr val="tx1">
+                    <a:lumMod val="65000"/>
+                    <a:lumOff val="35000"/>
+                    <a:tint val="44500"/>
+                    <a:satMod val="160000"/>
+                  </a:schemeClr>
+                </a:gs>
+                <a:gs pos="0">
+                  <a:schemeClr val="tx1">
+                    <a:lumMod val="65000"/>
+                    <a:lumOff val="35000"/>
+                    <a:tint val="23500"/>
+                    <a:satMod val="160000"/>
+                  </a:schemeClr>
+                </a:gs>
+              </a:gsLst>
+              <a:path path="circle">
+                <a:fillToRect l="50000" t="50000" r="50000" b="50000"/>
+              </a:path>
+              <a:tileRect/>
+            </a:gradFill>
+            <a:ln>
+              <a:solidFill>
+                <a:schemeClr val="tx1"/>
+              </a:solidFill>
+            </a:ln>
+          </p:spPr>
+          <p:style>
+            <a:lnRef idx="2">
+              <a:schemeClr val="accent1">
+                <a:shade val="50000"/>
+              </a:schemeClr>
+            </a:lnRef>
+            <a:fillRef idx="1">
+              <a:schemeClr val="accent1"/>
+            </a:fillRef>
+            <a:effectRef idx="0">
+              <a:schemeClr val="accent1"/>
+            </a:effectRef>
+            <a:fontRef idx="minor">
+              <a:schemeClr val="lt1"/>
+            </a:fontRef>
+          </p:style>
+          <p:txBody>
+            <a:bodyPr rtlCol="0" anchor="ctr"/>
+            <a:lstStyle/>
+            <a:p>
+              <a:pPr algn="ctr"/>
+              <a:endParaRPr lang="en-US" sz="2000" dirty="0"/>
+            </a:p>
+          </p:txBody>
+        </p:sp>
+        <p:sp>
+          <p:nvSpPr>
+            <p:cNvPr id="142" name="Partial Circle 9">
+              <a:extLst>
+                <a:ext uri="{FF2B5EF4-FFF2-40B4-BE49-F238E27FC236}">
+                  <a16:creationId xmlns:a16="http://schemas.microsoft.com/office/drawing/2014/main" id="{9AC64BA0-CAFE-4602-90B9-B3DBAB87A7D6}"/>
+                </a:ext>
+              </a:extLst>
+            </p:cNvPr>
+            <p:cNvSpPr>
+              <a:spLocks noChangeAspect="1"/>
+            </p:cNvSpPr>
+            <p:nvPr/>
+          </p:nvSpPr>
+          <p:spPr>
+            <a:xfrm rot="16200000" flipH="1">
+              <a:off x="808607" y="2082740"/>
+              <a:ext cx="102408" cy="197724"/>
+            </a:xfrm>
+            <a:prstGeom prst="pie">
+              <a:avLst>
+                <a:gd name="adj1" fmla="val 16258856"/>
+                <a:gd name="adj2" fmla="val 19252600"/>
+              </a:avLst>
+            </a:prstGeom>
+            <a:gradFill flip="none" rotWithShape="1">
+              <a:gsLst>
+                <a:gs pos="0">
+                  <a:schemeClr val="tx1"/>
+                </a:gs>
+                <a:gs pos="50000">
+                  <a:schemeClr val="tx1">
+                    <a:lumMod val="50000"/>
+                    <a:lumOff val="50000"/>
+                  </a:schemeClr>
+                </a:gs>
+                <a:gs pos="100000">
+                  <a:schemeClr val="bg1">
+                    <a:lumMod val="50000"/>
+                  </a:schemeClr>
+                </a:gs>
+              </a:gsLst>
+              <a:lin ang="2700000" scaled="1"/>
+              <a:tileRect/>
+            </a:gradFill>
+            <a:ln w="19050">
+              <a:solidFill>
+                <a:schemeClr val="tx1"/>
+              </a:solidFill>
+            </a:ln>
+          </p:spPr>
+          <p:style>
+            <a:lnRef idx="2">
+              <a:schemeClr val="accent1">
+                <a:shade val="50000"/>
+              </a:schemeClr>
+            </a:lnRef>
+            <a:fillRef idx="1">
+              <a:schemeClr val="accent1"/>
+            </a:fillRef>
+            <a:effectRef idx="0">
+              <a:schemeClr val="accent1"/>
+            </a:effectRef>
+            <a:fontRef idx="minor">
+              <a:schemeClr val="lt1"/>
+            </a:fontRef>
+          </p:style>
+          <p:txBody>
+            <a:bodyPr rtlCol="0" anchor="ctr"/>
+            <a:lstStyle/>
+            <a:p>
+              <a:pPr algn="ctr"/>
+              <a:endParaRPr lang="en-US" sz="1600" dirty="0">
+                <a:solidFill>
+                  <a:schemeClr val="tx1"/>
+                </a:solidFill>
+              </a:endParaRPr>
+            </a:p>
+          </p:txBody>
+        </p:sp>
+        <mc:AlternateContent xmlns:mc="http://schemas.openxmlformats.org/markup-compatibility/2006">
+          <mc:Choice xmlns:a14="http://schemas.microsoft.com/office/drawing/2010/main" Requires="a14">
+            <p:sp>
+              <p:nvSpPr>
+                <p:cNvPr id="143" name="TextBox 10">
+                  <a:extLst>
+                    <a:ext uri="{FF2B5EF4-FFF2-40B4-BE49-F238E27FC236}">
+                      <a16:creationId xmlns:a16="http://schemas.microsoft.com/office/drawing/2014/main" id="{F4BA87A4-FF23-4612-80FF-80921F92BB65}"/>
+                    </a:ext>
+                  </a:extLst>
+                </p:cNvPr>
+                <p:cNvSpPr txBox="1"/>
+                <p:nvPr/>
+              </p:nvSpPr>
+              <p:spPr>
+                <a:xfrm>
+                  <a:off x="444591" y="2117790"/>
+                  <a:ext cx="315234" cy="338554"/>
+                </a:xfrm>
+                <a:prstGeom prst="rect">
+                  <a:avLst/>
+                </a:prstGeom>
+                <a:noFill/>
+              </p:spPr>
+              <p:txBody>
+                <a:bodyPr wrap="square" rtlCol="0">
+                  <a:spAutoFit/>
+                </a:bodyPr>
+                <a:lstStyle/>
+                <a:p>
+                  <a:pPr/>
+                  <a14:m>
+                    <m:oMathPara xmlns:m="http://schemas.openxmlformats.org/officeDocument/2006/math">
+                      <m:oMathParaPr>
+                        <m:jc m:val="centerGroup"/>
+                      </m:oMathParaPr>
+                      <m:oMath xmlns:m="http://schemas.openxmlformats.org/officeDocument/2006/math">
+                        <m:r>
+                          <a:rPr lang="en-US" sz="1600" i="1">
+                            <a:latin typeface="Cambria Math" panose="02040503050406030204" pitchFamily="18" charset="0"/>
+                          </a:rPr>
+                          <m:t>𝛼</m:t>
+                        </m:r>
+                      </m:oMath>
+                    </m:oMathPara>
+                  </a14:m>
+                  <a:endParaRPr lang="en-US" sz="1600" dirty="0"/>
+                </a:p>
+              </p:txBody>
+            </p:sp>
+          </mc:Choice>
+          <mc:Fallback>
+            <p:sp>
+              <p:nvSpPr>
+                <p:cNvPr id="143" name="TextBox 10">
+                  <a:extLst>
+                    <a:ext uri="{FF2B5EF4-FFF2-40B4-BE49-F238E27FC236}">
+                      <a16:creationId xmlns:a16="http://schemas.microsoft.com/office/drawing/2014/main" id="{F4BA87A4-FF23-4612-80FF-80921F92BB65}"/>
+                    </a:ext>
+                  </a:extLst>
+                </p:cNvPr>
+                <p:cNvSpPr txBox="1">
+                  <a:spLocks noRot="1" noChangeAspect="1" noMove="1" noResize="1" noEditPoints="1" noAdjustHandles="1" noChangeArrowheads="1" noChangeShapeType="1" noTextEdit="1"/>
+                </p:cNvSpPr>
+                <p:nvPr/>
+              </p:nvSpPr>
+              <p:spPr>
+                <a:xfrm>
+                  <a:off x="444591" y="2117790"/>
+                  <a:ext cx="315234" cy="338554"/>
+                </a:xfrm>
+                <a:prstGeom prst="rect">
+                  <a:avLst/>
+                </a:prstGeom>
+                <a:blipFill>
+                  <a:blip r:embed="rId11"/>
+                  <a:stretch>
+                    <a:fillRect/>
+                  </a:stretch>
+                </a:blipFill>
+              </p:spPr>
+              <p:txBody>
+                <a:bodyPr/>
+                <a:lstStyle/>
+                <a:p>
+                  <a:r>
+                    <a:rPr lang="zh-TW" altLang="en-US">
+                      <a:noFill/>
+                    </a:rPr>
+                    <a:t> </a:t>
+                  </a:r>
+                </a:p>
+              </p:txBody>
+            </p:sp>
+          </mc:Fallback>
+        </mc:AlternateContent>
+        <p:cxnSp>
+          <p:nvCxnSpPr>
+            <p:cNvPr id="144" name="Straight Arrow Connector 17">
+              <a:extLst>
+                <a:ext uri="{FF2B5EF4-FFF2-40B4-BE49-F238E27FC236}">
+                  <a16:creationId xmlns:a16="http://schemas.microsoft.com/office/drawing/2014/main" id="{7EB6597C-C881-4F18-9B47-83683D4AF3FE}"/>
+                </a:ext>
+              </a:extLst>
+            </p:cNvPr>
+            <p:cNvCxnSpPr>
+              <a:cxnSpLocks/>
+            </p:cNvCxnSpPr>
+            <p:nvPr/>
+          </p:nvCxnSpPr>
+          <p:spPr>
+            <a:xfrm flipH="1">
+              <a:off x="651861" y="2182813"/>
+              <a:ext cx="221585" cy="286539"/>
+            </a:xfrm>
+            <a:prstGeom prst="straightConnector1">
+              <a:avLst/>
+            </a:prstGeom>
+            <a:ln w="38100">
+              <a:solidFill>
+                <a:schemeClr val="tx1"/>
+              </a:solidFill>
+              <a:tailEnd type="stealth" w="lg" len="lg"/>
+            </a:ln>
+          </p:spPr>
+          <p:style>
+            <a:lnRef idx="3">
+              <a:schemeClr val="accent6"/>
+            </a:lnRef>
+            <a:fillRef idx="0">
+              <a:schemeClr val="accent6"/>
+            </a:fillRef>
+            <a:effectRef idx="2">
+              <a:schemeClr val="accent6"/>
+            </a:effectRef>
+            <a:fontRef idx="minor">
+              <a:schemeClr val="tx1"/>
+            </a:fontRef>
+          </p:style>
+        </p:cxnSp>
+        <p:sp>
+          <p:nvSpPr>
+            <p:cNvPr id="145" name="Partial Circle 9">
+              <a:extLst>
+                <a:ext uri="{FF2B5EF4-FFF2-40B4-BE49-F238E27FC236}">
+                  <a16:creationId xmlns:a16="http://schemas.microsoft.com/office/drawing/2014/main" id="{6665CDF3-4625-42FB-84E0-3C96C4A5D8B9}"/>
+                </a:ext>
+              </a:extLst>
+            </p:cNvPr>
+            <p:cNvSpPr>
+              <a:spLocks noChangeAspect="1"/>
+            </p:cNvSpPr>
+            <p:nvPr/>
+          </p:nvSpPr>
+          <p:spPr>
+            <a:xfrm>
+              <a:off x="795884" y="2045519"/>
+              <a:ext cx="149214" cy="301366"/>
+            </a:xfrm>
+            <a:prstGeom prst="pie">
+              <a:avLst>
+                <a:gd name="adj1" fmla="val 16258856"/>
+                <a:gd name="adj2" fmla="val 19252600"/>
+              </a:avLst>
+            </a:prstGeom>
+            <a:gradFill flip="none" rotWithShape="1">
+              <a:gsLst>
+                <a:gs pos="0">
+                  <a:schemeClr val="tx1"/>
+                </a:gs>
+                <a:gs pos="50000">
+                  <a:schemeClr val="tx1">
+                    <a:lumMod val="50000"/>
+                    <a:lumOff val="50000"/>
+                  </a:schemeClr>
+                </a:gs>
+                <a:gs pos="100000">
+                  <a:schemeClr val="bg1">
+                    <a:lumMod val="50000"/>
+                  </a:schemeClr>
+                </a:gs>
+              </a:gsLst>
+              <a:lin ang="2700000" scaled="1"/>
+              <a:tileRect/>
+            </a:gradFill>
+            <a:ln w="19050">
+              <a:solidFill>
+                <a:schemeClr val="tx1"/>
+              </a:solidFill>
+            </a:ln>
+          </p:spPr>
+          <p:style>
+            <a:lnRef idx="2">
+              <a:schemeClr val="accent1">
+                <a:shade val="50000"/>
+              </a:schemeClr>
+            </a:lnRef>
+            <a:fillRef idx="1">
+              <a:schemeClr val="accent1"/>
+            </a:fillRef>
+            <a:effectRef idx="0">
+              <a:schemeClr val="accent1"/>
+            </a:effectRef>
+            <a:fontRef idx="minor">
+              <a:schemeClr val="lt1"/>
+            </a:fontRef>
+          </p:style>
+          <p:txBody>
+            <a:bodyPr rtlCol="0" anchor="ctr"/>
+            <a:lstStyle/>
+            <a:p>
+              <a:pPr algn="ctr"/>
+              <a:endParaRPr lang="en-US" sz="1600" dirty="0">
+                <a:solidFill>
+                  <a:schemeClr val="tx1"/>
+                </a:solidFill>
+              </a:endParaRPr>
+            </a:p>
+          </p:txBody>
+        </p:sp>
+        <mc:AlternateContent xmlns:mc="http://schemas.openxmlformats.org/markup-compatibility/2006">
+          <mc:Choice xmlns:a14="http://schemas.microsoft.com/office/drawing/2010/main" Requires="a14">
+            <p:sp>
+              <p:nvSpPr>
+                <p:cNvPr id="146" name="TextBox 10">
+                  <a:extLst>
+                    <a:ext uri="{FF2B5EF4-FFF2-40B4-BE49-F238E27FC236}">
+                      <a16:creationId xmlns:a16="http://schemas.microsoft.com/office/drawing/2014/main" id="{18AA10A0-393A-4B71-8D8A-7D5D0CD59BF5}"/>
+                    </a:ext>
+                  </a:extLst>
+                </p:cNvPr>
+                <p:cNvSpPr txBox="1"/>
+                <p:nvPr/>
+              </p:nvSpPr>
+              <p:spPr>
+                <a:xfrm>
+                  <a:off x="835662" y="1797372"/>
+                  <a:ext cx="297046" cy="338554"/>
+                </a:xfrm>
+                <a:prstGeom prst="rect">
+                  <a:avLst/>
+                </a:prstGeom>
+                <a:noFill/>
+              </p:spPr>
+              <p:txBody>
+                <a:bodyPr wrap="square" rtlCol="0">
+                  <a:spAutoFit/>
+                </a:bodyPr>
+                <a:lstStyle/>
+                <a:p>
+                  <a:pPr/>
+                  <a14:m>
+                    <m:oMathPara xmlns:m="http://schemas.openxmlformats.org/officeDocument/2006/math">
+                      <m:oMathParaPr>
+                        <m:jc m:val="centerGroup"/>
+                      </m:oMathParaPr>
+                      <m:oMath xmlns:m="http://schemas.openxmlformats.org/officeDocument/2006/math">
+                        <m:r>
+                          <a:rPr lang="en-US" sz="1600" i="1">
+                            <a:latin typeface="Cambria Math" panose="02040503050406030204" pitchFamily="18" charset="0"/>
+                          </a:rPr>
+                          <m:t>𝛽</m:t>
+                        </m:r>
+                      </m:oMath>
+                    </m:oMathPara>
+                  </a14:m>
+                  <a:endParaRPr lang="en-US" sz="1600" dirty="0"/>
+                </a:p>
+              </p:txBody>
+            </p:sp>
+          </mc:Choice>
+          <mc:Fallback>
+            <p:sp>
+              <p:nvSpPr>
+                <p:cNvPr id="146" name="TextBox 10">
+                  <a:extLst>
+                    <a:ext uri="{FF2B5EF4-FFF2-40B4-BE49-F238E27FC236}">
+                      <a16:creationId xmlns:a16="http://schemas.microsoft.com/office/drawing/2014/main" id="{18AA10A0-393A-4B71-8D8A-7D5D0CD59BF5}"/>
+                    </a:ext>
+                  </a:extLst>
+                </p:cNvPr>
+                <p:cNvSpPr txBox="1">
+                  <a:spLocks noRot="1" noChangeAspect="1" noMove="1" noResize="1" noEditPoints="1" noAdjustHandles="1" noChangeArrowheads="1" noChangeShapeType="1" noTextEdit="1"/>
+                </p:cNvSpPr>
+                <p:nvPr/>
+              </p:nvSpPr>
+              <p:spPr>
+                <a:xfrm>
+                  <a:off x="835662" y="1797372"/>
+                  <a:ext cx="297046" cy="338554"/>
+                </a:xfrm>
+                <a:prstGeom prst="rect">
+                  <a:avLst/>
+                </a:prstGeom>
+                <a:blipFill>
+                  <a:blip r:embed="rId12"/>
+                  <a:stretch>
+                    <a:fillRect r="-4082" b="-8929"/>
+                  </a:stretch>
+                </a:blipFill>
+              </p:spPr>
+              <p:txBody>
+                <a:bodyPr/>
+                <a:lstStyle/>
+                <a:p>
+                  <a:r>
+                    <a:rPr lang="zh-TW" altLang="en-US">
+                      <a:noFill/>
+                    </a:rPr>
+                    <a:t> </a:t>
+                  </a:r>
+                </a:p>
+              </p:txBody>
+            </p:sp>
+          </mc:Fallback>
+        </mc:AlternateContent>
+        <p:cxnSp>
+          <p:nvCxnSpPr>
+            <p:cNvPr id="147" name="Straight Arrow Connector 17">
+              <a:extLst>
+                <a:ext uri="{FF2B5EF4-FFF2-40B4-BE49-F238E27FC236}">
+                  <a16:creationId xmlns:a16="http://schemas.microsoft.com/office/drawing/2014/main" id="{6A2A4286-7281-4D37-A09A-D096937100CF}"/>
+                </a:ext>
+              </a:extLst>
+            </p:cNvPr>
+            <p:cNvCxnSpPr>
+              <a:cxnSpLocks/>
+            </p:cNvCxnSpPr>
+            <p:nvPr/>
+          </p:nvCxnSpPr>
+          <p:spPr>
+            <a:xfrm flipV="1">
+              <a:off x="865358" y="1737086"/>
+              <a:ext cx="571923" cy="449644"/>
+            </a:xfrm>
+            <a:prstGeom prst="straightConnector1">
+              <a:avLst/>
+            </a:prstGeom>
+            <a:ln w="38100">
+              <a:solidFill>
+                <a:schemeClr val="tx1"/>
+              </a:solidFill>
+              <a:tailEnd type="stealth" w="lg" len="lg"/>
+            </a:ln>
+          </p:spPr>
+          <p:style>
+            <a:lnRef idx="3">
+              <a:schemeClr val="accent6"/>
+            </a:lnRef>
+            <a:fillRef idx="0">
+              <a:schemeClr val="accent6"/>
+            </a:fillRef>
+            <a:effectRef idx="2">
+              <a:schemeClr val="accent6"/>
+            </a:effectRef>
+            <a:fontRef idx="minor">
+              <a:schemeClr val="tx1"/>
+            </a:fontRef>
+          </p:style>
+        </p:cxnSp>
+        <p:sp>
+          <p:nvSpPr>
+            <p:cNvPr id="44" name="等腰三角形 43">
+              <a:extLst>
+                <a:ext uri="{FF2B5EF4-FFF2-40B4-BE49-F238E27FC236}">
+                  <a16:creationId xmlns:a16="http://schemas.microsoft.com/office/drawing/2014/main" id="{724299CC-ACFF-4DA2-A7A6-DC7E7D1BAC58}"/>
+                </a:ext>
+              </a:extLst>
+            </p:cNvPr>
+            <p:cNvSpPr/>
+            <p:nvPr/>
+          </p:nvSpPr>
+          <p:spPr>
+            <a:xfrm rot="18689988">
+              <a:off x="1094853" y="1446159"/>
+              <a:ext cx="329835" cy="221179"/>
+            </a:xfrm>
+            <a:prstGeom prst="triangle">
+              <a:avLst/>
+            </a:prstGeom>
+          </p:spPr>
+          <p:style>
+            <a:lnRef idx="0">
+              <a:schemeClr val="accent6"/>
+            </a:lnRef>
+            <a:fillRef idx="3">
+              <a:schemeClr val="accent6"/>
+            </a:fillRef>
+            <a:effectRef idx="3">
+              <a:schemeClr val="accent6"/>
+            </a:effectRef>
+            <a:fontRef idx="minor">
+              <a:schemeClr val="lt1"/>
+            </a:fontRef>
+          </p:style>
+          <p:txBody>
+            <a:bodyPr rot="0" spcFirstLastPara="0" vertOverflow="overflow" horzOverflow="overflow" vert="horz" wrap="square" lIns="71889" tIns="35945" rIns="71889" bIns="35945" numCol="1" spcCol="0" rtlCol="0" fromWordArt="0" anchor="ctr" anchorCtr="0" forceAA="0" compatLnSpc="1">
+              <a:prstTxWarp prst="textNoShape">
+                <a:avLst/>
+              </a:prstTxWarp>
+              <a:noAutofit/>
+            </a:bodyPr>
+            <a:lstStyle/>
+            <a:p>
+              <a:pPr algn="ctr"/>
+              <a:endParaRPr lang="zh-TW" altLang="en-US" sz="1415" dirty="0"/>
+            </a:p>
+          </p:txBody>
+        </p:sp>
+        <p:pic>
+          <p:nvPicPr>
+            <p:cNvPr id="51" name="圖片 50">
+              <a:extLst>
+                <a:ext uri="{FF2B5EF4-FFF2-40B4-BE49-F238E27FC236}">
+                  <a16:creationId xmlns:a16="http://schemas.microsoft.com/office/drawing/2014/main" id="{E0126937-C336-43FE-A429-7EC671EC6B03}"/>
+                </a:ext>
+              </a:extLst>
+            </p:cNvPr>
+            <p:cNvPicPr>
+              <a:picLocks noChangeAspect="1"/>
+            </p:cNvPicPr>
+            <p:nvPr/>
+          </p:nvPicPr>
+          <p:blipFill rotWithShape="1">
+            <a:blip r:embed="rId13">
+              <a:extLst>
+                <a:ext uri="{28A0092B-C50C-407E-A947-70E740481C1C}">
+                  <a14:useLocalDpi xmlns:a14="http://schemas.microsoft.com/office/drawing/2010/main" val="0"/>
+                </a:ext>
+              </a:extLst>
+            </a:blip>
+            <a:srcRect l="28853" t="50556" r="52043" b="30217"/>
+            <a:stretch/>
+          </p:blipFill>
+          <p:spPr>
+            <a:xfrm>
+              <a:off x="5388326" y="1530132"/>
+              <a:ext cx="1498251" cy="1507936"/>
+            </a:xfrm>
+            <a:prstGeom prst="rect">
+              <a:avLst/>
+            </a:prstGeom>
+          </p:spPr>
+        </p:pic>
+        <p:pic>
+          <p:nvPicPr>
+            <p:cNvPr id="52" name="圖片 51">
+              <a:extLst>
+                <a:ext uri="{FF2B5EF4-FFF2-40B4-BE49-F238E27FC236}">
+                  <a16:creationId xmlns:a16="http://schemas.microsoft.com/office/drawing/2014/main" id="{00672F15-B2F5-4425-A664-275574E52424}"/>
+                </a:ext>
+              </a:extLst>
+            </p:cNvPr>
+            <p:cNvPicPr>
+              <a:picLocks noChangeAspect="1"/>
+            </p:cNvPicPr>
+            <p:nvPr/>
+          </p:nvPicPr>
+          <p:blipFill rotWithShape="1">
+            <a:blip r:embed="rId13">
+              <a:extLst>
+                <a:ext uri="{28A0092B-C50C-407E-A947-70E740481C1C}">
+                  <a14:useLocalDpi xmlns:a14="http://schemas.microsoft.com/office/drawing/2010/main" val="0"/>
+                </a:ext>
+              </a:extLst>
+            </a:blip>
+            <a:srcRect l="49431" t="50556" r="31305" b="30217"/>
+            <a:stretch/>
+          </p:blipFill>
+          <p:spPr>
+            <a:xfrm>
+              <a:off x="3700856" y="1526382"/>
+              <a:ext cx="1510702" cy="1507936"/>
+            </a:xfrm>
+            <a:prstGeom prst="rect">
+              <a:avLst/>
+            </a:prstGeom>
+          </p:spPr>
+        </p:pic>
+        <p:pic>
+          <p:nvPicPr>
+            <p:cNvPr id="53" name="圖片 52">
+              <a:extLst>
+                <a:ext uri="{FF2B5EF4-FFF2-40B4-BE49-F238E27FC236}">
+                  <a16:creationId xmlns:a16="http://schemas.microsoft.com/office/drawing/2014/main" id="{9114C173-5075-43F6-8535-F1D4024459D7}"/>
+                </a:ext>
+              </a:extLst>
+            </p:cNvPr>
+            <p:cNvPicPr>
+              <a:picLocks noChangeAspect="1"/>
+            </p:cNvPicPr>
+            <p:nvPr/>
+          </p:nvPicPr>
+          <p:blipFill rotWithShape="1">
+            <a:blip r:embed="rId13">
+              <a:extLst>
+                <a:ext uri="{28A0092B-C50C-407E-A947-70E740481C1C}">
+                  <a14:useLocalDpi xmlns:a14="http://schemas.microsoft.com/office/drawing/2010/main" val="0"/>
+                </a:ext>
+              </a:extLst>
+            </a:blip>
+            <a:srcRect l="70137" t="50556" r="10680" b="30217"/>
+            <a:stretch/>
+          </p:blipFill>
+          <p:spPr>
+            <a:xfrm>
+              <a:off x="7063345" y="1526382"/>
+              <a:ext cx="1504477" cy="1507936"/>
+            </a:xfrm>
+            <a:prstGeom prst="rect">
+              <a:avLst/>
+            </a:prstGeom>
+          </p:spPr>
+        </p:pic>
+        <p:pic>
+          <p:nvPicPr>
+            <p:cNvPr id="54" name="圖片 53">
+              <a:extLst>
+                <a:ext uri="{FF2B5EF4-FFF2-40B4-BE49-F238E27FC236}">
+                  <a16:creationId xmlns:a16="http://schemas.microsoft.com/office/drawing/2014/main" id="{38874CE3-919F-4977-9D6A-669D42C783AE}"/>
+                </a:ext>
+              </a:extLst>
+            </p:cNvPr>
+            <p:cNvPicPr>
+              <a:picLocks noChangeAspect="1"/>
+            </p:cNvPicPr>
+            <p:nvPr/>
+          </p:nvPicPr>
+          <p:blipFill rotWithShape="1">
+            <a:blip r:embed="rId13">
+              <a:extLst>
+                <a:ext uri="{28A0092B-C50C-407E-A947-70E740481C1C}">
+                  <a14:useLocalDpi xmlns:a14="http://schemas.microsoft.com/office/drawing/2010/main" val="0"/>
+                </a:ext>
+              </a:extLst>
+            </a:blip>
+            <a:srcRect l="8110" t="50556" r="72519" b="30217"/>
+            <a:stretch/>
+          </p:blipFill>
+          <p:spPr>
+            <a:xfrm>
+              <a:off x="2004895" y="1530131"/>
+              <a:ext cx="1519194" cy="1507937"/>
+            </a:xfrm>
+            <a:prstGeom prst="rect">
+              <a:avLst/>
+            </a:prstGeom>
+          </p:spPr>
+        </p:pic>
+        <p:sp>
+          <p:nvSpPr>
+            <p:cNvPr id="59" name="矩形 58">
+              <a:extLst>
+                <a:ext uri="{FF2B5EF4-FFF2-40B4-BE49-F238E27FC236}">
+                  <a16:creationId xmlns:a16="http://schemas.microsoft.com/office/drawing/2014/main" id="{2C2F7FA1-8515-486B-A52B-11405C691842}"/>
+                </a:ext>
+              </a:extLst>
+            </p:cNvPr>
+            <p:cNvSpPr/>
+            <p:nvPr/>
+          </p:nvSpPr>
+          <p:spPr>
+            <a:xfrm>
+              <a:off x="1681796" y="2972992"/>
+              <a:ext cx="1093569" cy="400110"/>
+            </a:xfrm>
+            <a:prstGeom prst="rect">
+              <a:avLst/>
+            </a:prstGeom>
+          </p:spPr>
+          <p:style>
+            <a:lnRef idx="0">
+              <a:schemeClr val="accent6"/>
+            </a:lnRef>
+            <a:fillRef idx="3">
+              <a:schemeClr val="accent6"/>
+            </a:fillRef>
+            <a:effectRef idx="3">
+              <a:schemeClr val="accent6"/>
+            </a:effectRef>
+            <a:fontRef idx="minor">
+              <a:schemeClr val="lt1"/>
+            </a:fontRef>
+          </p:style>
+          <p:txBody>
+            <a:bodyPr wrap="none">
+              <a:spAutoFit/>
+            </a:bodyPr>
+            <a:lstStyle/>
+            <a:p>
+              <a:r>
+                <a:rPr lang="en-US" altLang="zh-TW" sz="2000" dirty="0">
+                  <a:solidFill>
+                    <a:schemeClr val="tx1"/>
+                  </a:solidFill>
+                  <a:latin typeface="Times New Roman" panose="02020603050405020304" pitchFamily="18" charset="0"/>
+                  <a:cs typeface="Times New Roman" panose="02020603050405020304" pitchFamily="18" charset="0"/>
+                </a:rPr>
+                <a:t>meridian</a:t>
+              </a:r>
+              <a:endParaRPr lang="zh-TW" altLang="en-US" sz="2000" dirty="0">
+                <a:solidFill>
+                  <a:schemeClr val="tx1"/>
+                </a:solidFill>
+              </a:endParaRPr>
+            </a:p>
+          </p:txBody>
+        </p:sp>
+        <p:pic>
+          <p:nvPicPr>
+            <p:cNvPr id="65" name="圖片 64">
+              <a:extLst>
+                <a:ext uri="{FF2B5EF4-FFF2-40B4-BE49-F238E27FC236}">
+                  <a16:creationId xmlns:a16="http://schemas.microsoft.com/office/drawing/2014/main" id="{98B4C524-8031-4989-8914-5FA7271094D5}"/>
+                </a:ext>
+              </a:extLst>
+            </p:cNvPr>
+            <p:cNvPicPr>
+              <a:picLocks noChangeAspect="1"/>
+            </p:cNvPicPr>
+            <p:nvPr/>
+          </p:nvPicPr>
+          <p:blipFill>
+            <a:blip r:embed="rId14">
+              <a:clrChange>
+                <a:clrFrom>
+                  <a:srgbClr val="FFFFFF"/>
+                </a:clrFrom>
+                <a:clrTo>
+                  <a:srgbClr val="FFFFFF">
+                    <a:alpha val="0"/>
+                  </a:srgbClr>
+                </a:clrTo>
+              </a:clrChange>
+            </a:blip>
+            <a:stretch>
+              <a:fillRect/>
+            </a:stretch>
+          </p:blipFill>
+          <p:spPr>
+            <a:xfrm>
+              <a:off x="7033191" y="173942"/>
+              <a:ext cx="2491449" cy="575278"/>
+            </a:xfrm>
+            <a:prstGeom prst="rect">
+              <a:avLst/>
+            </a:prstGeom>
+          </p:spPr>
+        </p:pic>
+        <p:pic>
+          <p:nvPicPr>
+            <p:cNvPr id="66" name="圖片 65">
+              <a:extLst>
+                <a:ext uri="{FF2B5EF4-FFF2-40B4-BE49-F238E27FC236}">
+                  <a16:creationId xmlns:a16="http://schemas.microsoft.com/office/drawing/2014/main" id="{E480586A-2202-49A0-A95F-32C06DCF99FF}"/>
+                </a:ext>
+              </a:extLst>
+            </p:cNvPr>
+            <p:cNvPicPr>
+              <a:picLocks noChangeAspect="1"/>
+            </p:cNvPicPr>
+            <p:nvPr/>
+          </p:nvPicPr>
+          <p:blipFill rotWithShape="1">
+            <a:blip r:embed="rId15">
+              <a:clrChange>
+                <a:clrFrom>
+                  <a:srgbClr val="FFFFFF"/>
+                </a:clrFrom>
+                <a:clrTo>
+                  <a:srgbClr val="FFFFFF">
+                    <a:alpha val="0"/>
+                  </a:srgbClr>
+                </a:clrTo>
+              </a:clrChange>
+              <a:extLst>
+                <a:ext uri="{28A0092B-C50C-407E-A947-70E740481C1C}">
+                  <a14:useLocalDpi xmlns:a14="http://schemas.microsoft.com/office/drawing/2010/main" val="0"/>
+                </a:ext>
+              </a:extLst>
+            </a:blip>
+            <a:srcRect l="90860" t="49873" r="4750" b="29819"/>
+            <a:stretch/>
+          </p:blipFill>
+          <p:spPr>
+            <a:xfrm>
+              <a:off x="8629651" y="1489871"/>
+              <a:ext cx="507351" cy="1564481"/>
+            </a:xfrm>
+            <a:prstGeom prst="rect">
+              <a:avLst/>
+            </a:prstGeom>
+          </p:spPr>
+        </p:pic>
+      </p:grpSp>
+      <mc:AlternateContent xmlns:mc="http://schemas.openxmlformats.org/markup-compatibility/2006">
+        <mc:Choice xmlns:a14="http://schemas.microsoft.com/office/drawing/2010/main" Requires="a14">
+          <p:sp>
+            <p:nvSpPr>
+              <p:cNvPr id="71" name="文字方塊 70">
+                <a:extLst>
+                  <a:ext uri="{FF2B5EF4-FFF2-40B4-BE49-F238E27FC236}">
+                    <a16:creationId xmlns:a16="http://schemas.microsoft.com/office/drawing/2014/main" id="{B3C67AA4-E626-47DD-88F8-4694EF3F8830}"/>
+                  </a:ext>
+                </a:extLst>
+              </p:cNvPr>
+              <p:cNvSpPr txBox="1"/>
+              <p:nvPr/>
+            </p:nvSpPr>
+            <p:spPr>
+              <a:xfrm>
+                <a:off x="8560089" y="2762412"/>
+                <a:ext cx="479853" cy="338554"/>
+              </a:xfrm>
+              <a:prstGeom prst="rect">
+                <a:avLst/>
+              </a:prstGeom>
+              <a:noFill/>
+            </p:spPr>
+            <p:txBody>
+              <a:bodyPr wrap="square" rtlCol="0">
+                <a:spAutoFit/>
+              </a:bodyPr>
+              <a:lstStyle/>
+              <a:p>
+                <a:pPr/>
+                <a14:m>
+                  <m:oMathPara xmlns:m="http://schemas.openxmlformats.org/officeDocument/2006/math">
+                    <m:oMathParaPr>
+                      <m:jc m:val="centerGroup"/>
+                    </m:oMathParaPr>
+                    <m:oMath xmlns:m="http://schemas.openxmlformats.org/officeDocument/2006/math">
+                      <m:r>
+                        <m:rPr>
+                          <m:sty m:val="p"/>
+                        </m:rPr>
+                        <a:rPr lang="en-US" altLang="zh-TW" sz="1600">
+                          <a:solidFill>
+                            <a:schemeClr val="bg1"/>
+                          </a:solidFill>
+                          <a:latin typeface="Cambria Math" panose="02040503050406030204" pitchFamily="18" charset="0"/>
+                        </a:rPr>
+                        <m:t>a</m:t>
+                      </m:r>
+                      <m:r>
+                        <a:rPr lang="en-US" altLang="zh-TW" sz="1600">
+                          <a:solidFill>
+                            <a:schemeClr val="bg1"/>
+                          </a:solidFill>
+                          <a:latin typeface="Cambria Math" panose="02040503050406030204" pitchFamily="18" charset="0"/>
+                        </a:rPr>
+                        <m:t>.</m:t>
+                      </m:r>
+                      <m:r>
+                        <m:rPr>
+                          <m:sty m:val="p"/>
+                        </m:rPr>
+                        <a:rPr lang="en-US" altLang="zh-TW" sz="1600">
+                          <a:solidFill>
+                            <a:schemeClr val="bg1"/>
+                          </a:solidFill>
+                          <a:latin typeface="Cambria Math" panose="02040503050406030204" pitchFamily="18" charset="0"/>
+                        </a:rPr>
+                        <m:t>u</m:t>
+                      </m:r>
+                      <m:r>
+                        <a:rPr lang="en-US" altLang="zh-TW" sz="1600">
+                          <a:solidFill>
+                            <a:schemeClr val="bg1"/>
+                          </a:solidFill>
+                          <a:latin typeface="Cambria Math" panose="02040503050406030204" pitchFamily="18" charset="0"/>
+                        </a:rPr>
+                        <m:t>.</m:t>
+                      </m:r>
+                    </m:oMath>
+                  </m:oMathPara>
+                </a14:m>
+                <a:endParaRPr lang="zh-TW" altLang="en-US" sz="1600" dirty="0">
+                  <a:solidFill>
+                    <a:schemeClr val="bg1"/>
+                  </a:solidFill>
+                </a:endParaRPr>
+              </a:p>
+            </p:txBody>
+          </p:sp>
+        </mc:Choice>
+        <mc:Fallback>
+          <p:sp>
+            <p:nvSpPr>
+              <p:cNvPr id="71" name="文字方塊 70">
+                <a:extLst>
+                  <a:ext uri="{FF2B5EF4-FFF2-40B4-BE49-F238E27FC236}">
+                    <a16:creationId xmlns:a16="http://schemas.microsoft.com/office/drawing/2014/main" id="{B3C67AA4-E626-47DD-88F8-4694EF3F8830}"/>
+                  </a:ext>
+                </a:extLst>
+              </p:cNvPr>
+              <p:cNvSpPr txBox="1">
+                <a:spLocks noRot="1" noChangeAspect="1" noMove="1" noResize="1" noEditPoints="1" noAdjustHandles="1" noChangeArrowheads="1" noChangeShapeType="1" noTextEdit="1"/>
+              </p:cNvSpPr>
+              <p:nvPr/>
+            </p:nvSpPr>
+            <p:spPr>
+              <a:xfrm>
+                <a:off x="8560089" y="2762412"/>
+                <a:ext cx="479853" cy="338554"/>
+              </a:xfrm>
+              <a:prstGeom prst="rect">
+                <a:avLst/>
+              </a:prstGeom>
+              <a:blipFill>
+                <a:blip r:embed="rId16"/>
+                <a:stretch>
+                  <a:fillRect/>
+                </a:stretch>
+              </a:blipFill>
+            </p:spPr>
+            <p:txBody>
+              <a:bodyPr/>
+              <a:lstStyle/>
+              <a:p>
+                <a:r>
+                  <a:rPr lang="zh-TW" altLang="en-US">
+                    <a:noFill/>
+                  </a:rPr>
+                  <a:t> </a:t>
+                </a:r>
+              </a:p>
+            </p:txBody>
+          </p:sp>
+        </mc:Fallback>
+      </mc:AlternateContent>
+    </p:spTree>
+    <p:extLst>
+      <p:ext uri="{BB962C8B-B14F-4D97-AF65-F5344CB8AC3E}">
+        <p14:creationId xmlns:p14="http://schemas.microsoft.com/office/powerpoint/2010/main" val="3575759311"/>
       </p:ext>
     </p:extLst>
   </p:cSld>
